--- a/capstone_presentation.pptx
+++ b/capstone_presentation.pptx
@@ -70,20 +70,30 @@
             <a:noAutofit/>
           </a:bodyPr>
           <a:p>
-            <a:r>
-              <a:rPr b="0" lang="en-US" sz="1800" spc="-1" strike="noStrike">
-                <a:solidFill>
-                  <a:schemeClr val="dk1"/>
-                </a:solidFill>
-                <a:latin typeface="Calibri"/>
-              </a:rPr>
-              <a:t>Click to move the slide</a:t>
-            </a:r>
-            <a:endParaRPr b="0" lang="en-US" sz="1800" spc="-1" strike="noStrike">
-              <a:solidFill>
-                <a:schemeClr val="dk1"/>
-              </a:solidFill>
-              <a:latin typeface="Calibri"/>
+            <a:pPr algn="ctr"/>
+            <a:r>
+              <a:rPr b="0" lang="en-US" sz="4400" spc="-1" strike="noStrike">
+                <a:solidFill>
+                  <a:srgbClr val="000000"/>
+                </a:solidFill>
+                <a:latin typeface="Arial"/>
+              </a:rPr>
+              <a:t>Click to move </a:t>
+            </a:r>
+            <a:r>
+              <a:rPr b="0" lang="en-US" sz="4400" spc="-1" strike="noStrike">
+                <a:solidFill>
+                  <a:srgbClr val="000000"/>
+                </a:solidFill>
+                <a:latin typeface="Arial"/>
+              </a:rPr>
+              <a:t>the slide</a:t>
+            </a:r>
+            <a:endParaRPr b="0" lang="en-US" sz="4400" spc="-1" strike="noStrike">
+              <a:solidFill>
+                <a:srgbClr val="000000"/>
+              </a:solidFill>
+              <a:latin typeface="Arial"/>
             </a:endParaRPr>
           </a:p>
         </p:txBody>
@@ -348,7 +358,7 @@
             <a:pPr indent="0" algn="r">
               <a:buNone/>
             </a:pPr>
-            <a:fld id="{6171B05C-A2AE-4EE6-A5DD-F84FD048E553}" type="slidenum">
+            <a:fld id="{2269A59B-780A-417C-B56A-BB53A7AD67E9}" type="slidenum">
               <a:rPr b="0" lang="en-US" sz="1400" spc="-1" strike="noStrike">
                 <a:solidFill>
                   <a:srgbClr val="000000"/>
@@ -402,7 +412,7 @@
         <p:spPr>
           <a:xfrm>
             <a:off x="685800" y="1143000"/>
-            <a:ext cx="5486040" cy="3085920"/>
+            <a:ext cx="5485680" cy="3085560"/>
           </a:xfrm>
           <a:prstGeom prst="rect">
             <a:avLst/>
@@ -425,7 +435,7 @@
         <p:spPr>
           <a:xfrm>
             <a:off x="685800" y="4400640"/>
-            <a:ext cx="5486040" cy="3600000"/>
+            <a:ext cx="5485680" cy="3599640"/>
           </a:xfrm>
           <a:prstGeom prst="rect">
             <a:avLst/>
@@ -465,7 +475,7 @@
         <p:spPr>
           <a:xfrm>
             <a:off x="3884760" y="8685360"/>
-            <a:ext cx="2971440" cy="458280"/>
+            <a:ext cx="2971080" cy="457920"/>
           </a:xfrm>
           <a:prstGeom prst="rect">
             <a:avLst/>
@@ -485,6 +495,9 @@
                 <a:spcPct val="100000"/>
               </a:lnSpc>
               <a:buNone/>
+              <a:tabLst>
+                <a:tab algn="l" pos="0"/>
+              </a:tabLst>
               <a:defRPr b="0" lang="en-US" sz="1200" spc="-1" strike="noStrike">
                 <a:solidFill>
                   <a:schemeClr val="dk1"/>
@@ -500,8 +513,11 @@
                 <a:spcPct val="100000"/>
               </a:lnSpc>
               <a:buNone/>
-            </a:pPr>
-            <a:fld id="{AA1B06BD-B9FA-4512-8C7B-AB81905AA414}" type="slidenum">
+              <a:tabLst>
+                <a:tab algn="l" pos="0"/>
+              </a:tabLst>
+            </a:pPr>
+            <a:fld id="{1D11DD0C-7FAB-436B-B2AE-CCFAF5FE0826}" type="slidenum">
               <a:rPr b="0" lang="en-US" sz="1200" spc="-1" strike="noStrike">
                 <a:solidFill>
                   <a:schemeClr val="dk1"/>
@@ -555,7 +571,7 @@
         <p:spPr>
           <a:xfrm>
             <a:off x="685800" y="1143000"/>
-            <a:ext cx="5486040" cy="3085920"/>
+            <a:ext cx="5485680" cy="3085560"/>
           </a:xfrm>
           <a:prstGeom prst="rect">
             <a:avLst/>
@@ -578,7 +594,7 @@
         <p:spPr>
           <a:xfrm>
             <a:off x="685800" y="4400640"/>
-            <a:ext cx="5486040" cy="3600000"/>
+            <a:ext cx="5485680" cy="3599640"/>
           </a:xfrm>
           <a:prstGeom prst="rect">
             <a:avLst/>
@@ -618,7 +634,7 @@
         <p:spPr>
           <a:xfrm>
             <a:off x="3884760" y="8685360"/>
-            <a:ext cx="2971440" cy="458280"/>
+            <a:ext cx="2971080" cy="457920"/>
           </a:xfrm>
           <a:prstGeom prst="rect">
             <a:avLst/>
@@ -638,6 +654,9 @@
                 <a:spcPct val="100000"/>
               </a:lnSpc>
               <a:buNone/>
+              <a:tabLst>
+                <a:tab algn="l" pos="0"/>
+              </a:tabLst>
               <a:defRPr b="0" lang="en-US" sz="1200" spc="-1" strike="noStrike">
                 <a:solidFill>
                   <a:schemeClr val="dk1"/>
@@ -653,8 +672,11 @@
                 <a:spcPct val="100000"/>
               </a:lnSpc>
               <a:buNone/>
-            </a:pPr>
-            <a:fld id="{6332B1E2-D015-4240-AA98-2F30E7FB1C38}" type="slidenum">
+              <a:tabLst>
+                <a:tab algn="l" pos="0"/>
+              </a:tabLst>
+            </a:pPr>
+            <a:fld id="{ABCD274E-3CFB-49FC-B424-47375595D3BB}" type="slidenum">
               <a:rPr b="0" lang="en-US" sz="1200" spc="-1" strike="noStrike">
                 <a:solidFill>
                   <a:schemeClr val="dk1"/>
@@ -708,7 +730,7 @@
         <p:spPr>
           <a:xfrm>
             <a:off x="685800" y="1143000"/>
-            <a:ext cx="5486040" cy="3085920"/>
+            <a:ext cx="5485680" cy="3085560"/>
           </a:xfrm>
           <a:prstGeom prst="rect">
             <a:avLst/>
@@ -731,7 +753,7 @@
         <p:spPr>
           <a:xfrm>
             <a:off x="685800" y="4400640"/>
-            <a:ext cx="5486040" cy="3600000"/>
+            <a:ext cx="5485680" cy="3599640"/>
           </a:xfrm>
           <a:prstGeom prst="rect">
             <a:avLst/>
@@ -771,7 +793,7 @@
         <p:spPr>
           <a:xfrm>
             <a:off x="3884760" y="8685360"/>
-            <a:ext cx="2971440" cy="458280"/>
+            <a:ext cx="2971080" cy="457920"/>
           </a:xfrm>
           <a:prstGeom prst="rect">
             <a:avLst/>
@@ -791,6 +813,9 @@
                 <a:spcPct val="100000"/>
               </a:lnSpc>
               <a:buNone/>
+              <a:tabLst>
+                <a:tab algn="l" pos="0"/>
+              </a:tabLst>
               <a:defRPr b="0" lang="en-US" sz="1200" spc="-1" strike="noStrike">
                 <a:solidFill>
                   <a:schemeClr val="dk1"/>
@@ -806,8 +831,11 @@
                 <a:spcPct val="100000"/>
               </a:lnSpc>
               <a:buNone/>
-            </a:pPr>
-            <a:fld id="{495C897E-AE14-4601-8155-9306C86CCD8C}" type="slidenum">
+              <a:tabLst>
+                <a:tab algn="l" pos="0"/>
+              </a:tabLst>
+            </a:pPr>
+            <a:fld id="{37B2CB5C-20F0-44DB-B369-7B04520F6314}" type="slidenum">
               <a:rPr b="0" lang="en-US" sz="1200" spc="-1" strike="noStrike">
                 <a:solidFill>
                   <a:schemeClr val="dk1"/>
@@ -861,7 +889,7 @@
         <p:spPr>
           <a:xfrm>
             <a:off x="685800" y="1143000"/>
-            <a:ext cx="5486040" cy="3085920"/>
+            <a:ext cx="5485680" cy="3085560"/>
           </a:xfrm>
           <a:prstGeom prst="rect">
             <a:avLst/>
@@ -884,7 +912,7 @@
         <p:spPr>
           <a:xfrm>
             <a:off x="685800" y="4400640"/>
-            <a:ext cx="5486040" cy="3600000"/>
+            <a:ext cx="5485680" cy="3599640"/>
           </a:xfrm>
           <a:prstGeom prst="rect">
             <a:avLst/>
@@ -924,7 +952,7 @@
         <p:spPr>
           <a:xfrm>
             <a:off x="3884760" y="8685360"/>
-            <a:ext cx="2971440" cy="458280"/>
+            <a:ext cx="2971080" cy="457920"/>
           </a:xfrm>
           <a:prstGeom prst="rect">
             <a:avLst/>
@@ -944,6 +972,9 @@
                 <a:spcPct val="100000"/>
               </a:lnSpc>
               <a:buNone/>
+              <a:tabLst>
+                <a:tab algn="l" pos="0"/>
+              </a:tabLst>
               <a:defRPr b="0" lang="en-US" sz="1200" spc="-1" strike="noStrike">
                 <a:solidFill>
                   <a:schemeClr val="dk1"/>
@@ -959,8 +990,11 @@
                 <a:spcPct val="100000"/>
               </a:lnSpc>
               <a:buNone/>
-            </a:pPr>
-            <a:fld id="{042BD2D9-27D5-4F0F-97D5-D6D271016661}" type="slidenum">
+              <a:tabLst>
+                <a:tab algn="l" pos="0"/>
+              </a:tabLst>
+            </a:pPr>
+            <a:fld id="{FAED75B0-002E-400E-AFA4-E5E01D9CE255}" type="slidenum">
               <a:rPr b="0" lang="en-US" sz="1200" spc="-1" strike="noStrike">
                 <a:solidFill>
                   <a:schemeClr val="dk1"/>
@@ -1014,7 +1048,7 @@
         <p:spPr>
           <a:xfrm>
             <a:off x="685800" y="1143000"/>
-            <a:ext cx="5486040" cy="3085920"/>
+            <a:ext cx="5485680" cy="3085560"/>
           </a:xfrm>
           <a:prstGeom prst="rect">
             <a:avLst/>
@@ -1037,7 +1071,7 @@
         <p:spPr>
           <a:xfrm>
             <a:off x="685800" y="4400640"/>
-            <a:ext cx="5486040" cy="3600000"/>
+            <a:ext cx="5485680" cy="3599640"/>
           </a:xfrm>
           <a:prstGeom prst="rect">
             <a:avLst/>
@@ -1077,7 +1111,7 @@
         <p:spPr>
           <a:xfrm>
             <a:off x="3884760" y="8685360"/>
-            <a:ext cx="2971440" cy="458280"/>
+            <a:ext cx="2971080" cy="457920"/>
           </a:xfrm>
           <a:prstGeom prst="rect">
             <a:avLst/>
@@ -1097,6 +1131,9 @@
                 <a:spcPct val="100000"/>
               </a:lnSpc>
               <a:buNone/>
+              <a:tabLst>
+                <a:tab algn="l" pos="0"/>
+              </a:tabLst>
               <a:defRPr b="0" lang="en-US" sz="1200" spc="-1" strike="noStrike">
                 <a:solidFill>
                   <a:schemeClr val="dk1"/>
@@ -1112,8 +1149,11 @@
                 <a:spcPct val="100000"/>
               </a:lnSpc>
               <a:buNone/>
-            </a:pPr>
-            <a:fld id="{F19E46CC-5D46-469B-A6C6-02A29CF56CC2}" type="slidenum">
+              <a:tabLst>
+                <a:tab algn="l" pos="0"/>
+              </a:tabLst>
+            </a:pPr>
+            <a:fld id="{1CF03A17-FA4C-4BD7-B41B-2A3FEDD0A948}" type="slidenum">
               <a:rPr b="0" lang="en-US" sz="1200" spc="-1" strike="noStrike">
                 <a:solidFill>
                   <a:schemeClr val="dk1"/>
@@ -1167,7 +1207,7 @@
         <p:spPr>
           <a:xfrm>
             <a:off x="685800" y="1143000"/>
-            <a:ext cx="5486040" cy="3085920"/>
+            <a:ext cx="5485680" cy="3085560"/>
           </a:xfrm>
           <a:prstGeom prst="rect">
             <a:avLst/>
@@ -1190,7 +1230,7 @@
         <p:spPr>
           <a:xfrm>
             <a:off x="685800" y="4400640"/>
-            <a:ext cx="5486040" cy="3600000"/>
+            <a:ext cx="5485680" cy="3599640"/>
           </a:xfrm>
           <a:prstGeom prst="rect">
             <a:avLst/>
@@ -1230,7 +1270,7 @@
         <p:spPr>
           <a:xfrm>
             <a:off x="3884760" y="8685360"/>
-            <a:ext cx="2971440" cy="458280"/>
+            <a:ext cx="2971080" cy="457920"/>
           </a:xfrm>
           <a:prstGeom prst="rect">
             <a:avLst/>
@@ -1250,6 +1290,9 @@
                 <a:spcPct val="100000"/>
               </a:lnSpc>
               <a:buNone/>
+              <a:tabLst>
+                <a:tab algn="l" pos="0"/>
+              </a:tabLst>
               <a:defRPr b="0" lang="en-US" sz="1200" spc="-1" strike="noStrike">
                 <a:solidFill>
                   <a:schemeClr val="dk1"/>
@@ -1265,8 +1308,11 @@
                 <a:spcPct val="100000"/>
               </a:lnSpc>
               <a:buNone/>
-            </a:pPr>
-            <a:fld id="{7083BE0B-0FD8-4E35-850B-861E8773789A}" type="slidenum">
+              <a:tabLst>
+                <a:tab algn="l" pos="0"/>
+              </a:tabLst>
+            </a:pPr>
+            <a:fld id="{208C20BF-9CA9-41DE-AAD4-97E9917BC1FE}" type="slidenum">
               <a:rPr b="0" lang="en-US" sz="1200" spc="-1" strike="noStrike">
                 <a:solidFill>
                   <a:schemeClr val="dk1"/>
@@ -1320,7 +1366,7 @@
         <p:spPr>
           <a:xfrm>
             <a:off x="685800" y="1143000"/>
-            <a:ext cx="5486040" cy="3085920"/>
+            <a:ext cx="5485680" cy="3085560"/>
           </a:xfrm>
           <a:prstGeom prst="rect">
             <a:avLst/>
@@ -1343,7 +1389,7 @@
         <p:spPr>
           <a:xfrm>
             <a:off x="685800" y="4400640"/>
-            <a:ext cx="5486040" cy="3600000"/>
+            <a:ext cx="5485680" cy="3599640"/>
           </a:xfrm>
           <a:prstGeom prst="rect">
             <a:avLst/>
@@ -1383,7 +1429,7 @@
         <p:spPr>
           <a:xfrm>
             <a:off x="3884760" y="8685360"/>
-            <a:ext cx="2971440" cy="458280"/>
+            <a:ext cx="2971080" cy="457920"/>
           </a:xfrm>
           <a:prstGeom prst="rect">
             <a:avLst/>
@@ -1403,6 +1449,9 @@
                 <a:spcPct val="100000"/>
               </a:lnSpc>
               <a:buNone/>
+              <a:tabLst>
+                <a:tab algn="l" pos="0"/>
+              </a:tabLst>
               <a:defRPr b="0" lang="en-US" sz="1200" spc="-1" strike="noStrike">
                 <a:solidFill>
                   <a:schemeClr val="dk1"/>
@@ -1418,8 +1467,11 @@
                 <a:spcPct val="100000"/>
               </a:lnSpc>
               <a:buNone/>
-            </a:pPr>
-            <a:fld id="{1141F395-8BE4-40CA-A4D7-F62534A1970F}" type="slidenum">
+              <a:tabLst>
+                <a:tab algn="l" pos="0"/>
+              </a:tabLst>
+            </a:pPr>
+            <a:fld id="{A4FB1BE3-99B5-46DB-B747-2F50054059E1}" type="slidenum">
               <a:rPr b="0" lang="en-US" sz="1200" spc="-1" strike="noStrike">
                 <a:solidFill>
                   <a:schemeClr val="dk1"/>
@@ -1473,7 +1525,7 @@
         <p:spPr>
           <a:xfrm>
             <a:off x="685800" y="1143000"/>
-            <a:ext cx="5486040" cy="3085920"/>
+            <a:ext cx="5485680" cy="3085560"/>
           </a:xfrm>
           <a:prstGeom prst="rect">
             <a:avLst/>
@@ -1496,7 +1548,7 @@
         <p:spPr>
           <a:xfrm>
             <a:off x="685800" y="4400640"/>
-            <a:ext cx="5486040" cy="3600000"/>
+            <a:ext cx="5485680" cy="3599640"/>
           </a:xfrm>
           <a:prstGeom prst="rect">
             <a:avLst/>
@@ -1536,7 +1588,7 @@
         <p:spPr>
           <a:xfrm>
             <a:off x="3884760" y="8685360"/>
-            <a:ext cx="2971440" cy="458280"/>
+            <a:ext cx="2971080" cy="457920"/>
           </a:xfrm>
           <a:prstGeom prst="rect">
             <a:avLst/>
@@ -1556,6 +1608,9 @@
                 <a:spcPct val="100000"/>
               </a:lnSpc>
               <a:buNone/>
+              <a:tabLst>
+                <a:tab algn="l" pos="0"/>
+              </a:tabLst>
               <a:defRPr b="0" lang="en-US" sz="1200" spc="-1" strike="noStrike">
                 <a:solidFill>
                   <a:schemeClr val="dk1"/>
@@ -1571,8 +1626,11 @@
                 <a:spcPct val="100000"/>
               </a:lnSpc>
               <a:buNone/>
-            </a:pPr>
-            <a:fld id="{6038F6C0-414A-45A2-9141-6A7AFA347839}" type="slidenum">
+              <a:tabLst>
+                <a:tab algn="l" pos="0"/>
+              </a:tabLst>
+            </a:pPr>
+            <a:fld id="{7B694E21-3B46-4F03-ACF5-38889CAC3F5C}" type="slidenum">
               <a:rPr b="0" lang="en-US" sz="1200" spc="-1" strike="noStrike">
                 <a:solidFill>
                   <a:schemeClr val="dk1"/>
@@ -1626,7 +1684,7 @@
         <p:spPr>
           <a:xfrm>
             <a:off x="685800" y="1143000"/>
-            <a:ext cx="5486040" cy="3085920"/>
+            <a:ext cx="5485680" cy="3085560"/>
           </a:xfrm>
           <a:prstGeom prst="rect">
             <a:avLst/>
@@ -1649,7 +1707,7 @@
         <p:spPr>
           <a:xfrm>
             <a:off x="685800" y="4400640"/>
-            <a:ext cx="5486040" cy="3600000"/>
+            <a:ext cx="5485680" cy="3599640"/>
           </a:xfrm>
           <a:prstGeom prst="rect">
             <a:avLst/>
@@ -1689,7 +1747,7 @@
         <p:spPr>
           <a:xfrm>
             <a:off x="3884760" y="8685360"/>
-            <a:ext cx="2971440" cy="458280"/>
+            <a:ext cx="2971080" cy="457920"/>
           </a:xfrm>
           <a:prstGeom prst="rect">
             <a:avLst/>
@@ -1709,6 +1767,9 @@
                 <a:spcPct val="100000"/>
               </a:lnSpc>
               <a:buNone/>
+              <a:tabLst>
+                <a:tab algn="l" pos="0"/>
+              </a:tabLst>
               <a:defRPr b="0" lang="en-US" sz="1200" spc="-1" strike="noStrike">
                 <a:solidFill>
                   <a:schemeClr val="dk1"/>
@@ -1724,8 +1785,11 @@
                 <a:spcPct val="100000"/>
               </a:lnSpc>
               <a:buNone/>
-            </a:pPr>
-            <a:fld id="{704B7E22-C02F-4DA0-A593-CA92D15D6CBD}" type="slidenum">
+              <a:tabLst>
+                <a:tab algn="l" pos="0"/>
+              </a:tabLst>
+            </a:pPr>
+            <a:fld id="{23B11D06-F533-43C9-B6EA-33FEAD5717D0}" type="slidenum">
               <a:rPr b="0" lang="en-US" sz="1200" spc="-1" strike="noStrike">
                 <a:solidFill>
                   <a:schemeClr val="dk1"/>
@@ -1779,7 +1843,7 @@
         <p:spPr>
           <a:xfrm>
             <a:off x="685800" y="1143000"/>
-            <a:ext cx="5486040" cy="3085920"/>
+            <a:ext cx="5485680" cy="3085560"/>
           </a:xfrm>
           <a:prstGeom prst="rect">
             <a:avLst/>
@@ -1802,7 +1866,7 @@
         <p:spPr>
           <a:xfrm>
             <a:off x="685800" y="4400640"/>
-            <a:ext cx="5486040" cy="3600000"/>
+            <a:ext cx="5485680" cy="3599640"/>
           </a:xfrm>
           <a:prstGeom prst="rect">
             <a:avLst/>
@@ -1842,7 +1906,7 @@
         <p:spPr>
           <a:xfrm>
             <a:off x="3884760" y="8685360"/>
-            <a:ext cx="2971440" cy="458280"/>
+            <a:ext cx="2971080" cy="457920"/>
           </a:xfrm>
           <a:prstGeom prst="rect">
             <a:avLst/>
@@ -1862,6 +1926,9 @@
                 <a:spcPct val="100000"/>
               </a:lnSpc>
               <a:buNone/>
+              <a:tabLst>
+                <a:tab algn="l" pos="0"/>
+              </a:tabLst>
               <a:defRPr b="0" lang="en-US" sz="1200" spc="-1" strike="noStrike">
                 <a:solidFill>
                   <a:schemeClr val="dk1"/>
@@ -1877,8 +1944,11 @@
                 <a:spcPct val="100000"/>
               </a:lnSpc>
               <a:buNone/>
-            </a:pPr>
-            <a:fld id="{A74BFC66-155E-4208-848A-852DCE83A8EE}" type="slidenum">
+              <a:tabLst>
+                <a:tab algn="l" pos="0"/>
+              </a:tabLst>
+            </a:pPr>
+            <a:fld id="{AAA59193-8D3F-4008-A122-C11A595E1C16}" type="slidenum">
               <a:rPr b="0" lang="en-US" sz="1200" spc="-1" strike="noStrike">
                 <a:solidFill>
                   <a:schemeClr val="dk1"/>
@@ -1932,7 +2002,7 @@
         <p:spPr>
           <a:xfrm>
             <a:off x="685800" y="1143000"/>
-            <a:ext cx="5486040" cy="3085920"/>
+            <a:ext cx="5485680" cy="3085560"/>
           </a:xfrm>
           <a:prstGeom prst="rect">
             <a:avLst/>
@@ -1955,7 +2025,7 @@
         <p:spPr>
           <a:xfrm>
             <a:off x="685800" y="4400640"/>
-            <a:ext cx="5486040" cy="3600000"/>
+            <a:ext cx="5485680" cy="3599640"/>
           </a:xfrm>
           <a:prstGeom prst="rect">
             <a:avLst/>
@@ -1995,7 +2065,7 @@
         <p:spPr>
           <a:xfrm>
             <a:off x="3884760" y="8685360"/>
-            <a:ext cx="2971440" cy="458280"/>
+            <a:ext cx="2971080" cy="457920"/>
           </a:xfrm>
           <a:prstGeom prst="rect">
             <a:avLst/>
@@ -2015,6 +2085,9 @@
                 <a:spcPct val="100000"/>
               </a:lnSpc>
               <a:buNone/>
+              <a:tabLst>
+                <a:tab algn="l" pos="0"/>
+              </a:tabLst>
               <a:defRPr b="0" lang="en-US" sz="1200" spc="-1" strike="noStrike">
                 <a:solidFill>
                   <a:schemeClr val="dk1"/>
@@ -2030,8 +2103,11 @@
                 <a:spcPct val="100000"/>
               </a:lnSpc>
               <a:buNone/>
-            </a:pPr>
-            <a:fld id="{AA2E4AE8-9FA3-4588-8C41-76639A8E3A1B}" type="slidenum">
+              <a:tabLst>
+                <a:tab algn="l" pos="0"/>
+              </a:tabLst>
+            </a:pPr>
+            <a:fld id="{5A2D6E82-8CA0-4816-BCCB-E25513B200B5}" type="slidenum">
               <a:rPr b="0" lang="en-US" sz="1200" spc="-1" strike="noStrike">
                 <a:solidFill>
                   <a:schemeClr val="dk1"/>
@@ -2129,23 +2205,158 @@
             <a:noAutofit/>
           </a:bodyPr>
           <a:p>
-            <a:pPr indent="0">
+            <a:pPr indent="0" algn="ctr">
               <a:buNone/>
             </a:pPr>
             <a:r>
-              <a:rPr b="0" lang="en-US" sz="1800" spc="-1" strike="noStrike">
-                <a:solidFill>
-                  <a:schemeClr val="dk1"/>
-                </a:solidFill>
-                <a:latin typeface="Calibri"/>
-              </a:rPr>
-              <a:t>Click to edit the title text format</a:t>
-            </a:r>
-            <a:endParaRPr b="0" lang="en-US" sz="1800" spc="-1" strike="noStrike">
-              <a:solidFill>
-                <a:schemeClr val="dk1"/>
-              </a:solidFill>
-              <a:latin typeface="Calibri"/>
+              <a:rPr b="0" lang="en-US" sz="4400" spc="-1" strike="noStrike">
+                <a:solidFill>
+                  <a:srgbClr val="000000"/>
+                </a:solidFill>
+                <a:latin typeface="Arial"/>
+              </a:rPr>
+              <a:t>Cl</a:t>
+            </a:r>
+            <a:r>
+              <a:rPr b="0" lang="en-US" sz="4400" spc="-1" strike="noStrike">
+                <a:solidFill>
+                  <a:srgbClr val="000000"/>
+                </a:solidFill>
+                <a:latin typeface="Arial"/>
+              </a:rPr>
+              <a:t>ic</a:t>
+            </a:r>
+            <a:r>
+              <a:rPr b="0" lang="en-US" sz="4400" spc="-1" strike="noStrike">
+                <a:solidFill>
+                  <a:srgbClr val="000000"/>
+                </a:solidFill>
+                <a:latin typeface="Arial"/>
+              </a:rPr>
+              <a:t>k </a:t>
+            </a:r>
+            <a:r>
+              <a:rPr b="0" lang="en-US" sz="4400" spc="-1" strike="noStrike">
+                <a:solidFill>
+                  <a:srgbClr val="000000"/>
+                </a:solidFill>
+                <a:latin typeface="Arial"/>
+              </a:rPr>
+              <a:t>to </a:t>
+            </a:r>
+            <a:r>
+              <a:rPr b="0" lang="en-US" sz="4400" spc="-1" strike="noStrike">
+                <a:solidFill>
+                  <a:srgbClr val="000000"/>
+                </a:solidFill>
+                <a:latin typeface="Arial"/>
+              </a:rPr>
+              <a:t>e</a:t>
+            </a:r>
+            <a:r>
+              <a:rPr b="0" lang="en-US" sz="4400" spc="-1" strike="noStrike">
+                <a:solidFill>
+                  <a:srgbClr val="000000"/>
+                </a:solidFill>
+                <a:latin typeface="Arial"/>
+              </a:rPr>
+              <a:t>dit </a:t>
+            </a:r>
+            <a:r>
+              <a:rPr b="0" lang="en-US" sz="4400" spc="-1" strike="noStrike">
+                <a:solidFill>
+                  <a:srgbClr val="000000"/>
+                </a:solidFill>
+                <a:latin typeface="Arial"/>
+              </a:rPr>
+              <a:t>th</a:t>
+            </a:r>
+            <a:r>
+              <a:rPr b="0" lang="en-US" sz="4400" spc="-1" strike="noStrike">
+                <a:solidFill>
+                  <a:srgbClr val="000000"/>
+                </a:solidFill>
+                <a:latin typeface="Arial"/>
+              </a:rPr>
+              <a:t>e </a:t>
+            </a:r>
+            <a:r>
+              <a:rPr b="0" lang="en-US" sz="4400" spc="-1" strike="noStrike">
+                <a:solidFill>
+                  <a:srgbClr val="000000"/>
+                </a:solidFill>
+                <a:latin typeface="Arial"/>
+              </a:rPr>
+              <a:t>titl</a:t>
+            </a:r>
+            <a:r>
+              <a:rPr b="0" lang="en-US" sz="4400" spc="-1" strike="noStrike">
+                <a:solidFill>
+                  <a:srgbClr val="000000"/>
+                </a:solidFill>
+                <a:latin typeface="Arial"/>
+              </a:rPr>
+              <a:t>e </a:t>
+            </a:r>
+            <a:r>
+              <a:rPr b="0" lang="en-US" sz="4400" spc="-1" strike="noStrike">
+                <a:solidFill>
+                  <a:srgbClr val="000000"/>
+                </a:solidFill>
+                <a:latin typeface="Arial"/>
+              </a:rPr>
+              <a:t>te</a:t>
+            </a:r>
+            <a:r>
+              <a:rPr b="0" lang="en-US" sz="4400" spc="-1" strike="noStrike">
+                <a:solidFill>
+                  <a:srgbClr val="000000"/>
+                </a:solidFill>
+                <a:latin typeface="Arial"/>
+              </a:rPr>
+              <a:t>xt </a:t>
+            </a:r>
+            <a:r>
+              <a:rPr b="0" lang="en-US" sz="4400" spc="-1" strike="noStrike">
+                <a:solidFill>
+                  <a:srgbClr val="000000"/>
+                </a:solidFill>
+                <a:latin typeface="Arial"/>
+              </a:rPr>
+              <a:t>fo</a:t>
+            </a:r>
+            <a:r>
+              <a:rPr b="0" lang="en-US" sz="4400" spc="-1" strike="noStrike">
+                <a:solidFill>
+                  <a:srgbClr val="000000"/>
+                </a:solidFill>
+                <a:latin typeface="Arial"/>
+              </a:rPr>
+              <a:t>r</a:t>
+            </a:r>
+            <a:r>
+              <a:rPr b="0" lang="en-US" sz="4400" spc="-1" strike="noStrike">
+                <a:solidFill>
+                  <a:srgbClr val="000000"/>
+                </a:solidFill>
+                <a:latin typeface="Arial"/>
+              </a:rPr>
+              <a:t>m</a:t>
+            </a:r>
+            <a:r>
+              <a:rPr b="0" lang="en-US" sz="4400" spc="-1" strike="noStrike">
+                <a:solidFill>
+                  <a:srgbClr val="000000"/>
+                </a:solidFill>
+                <a:latin typeface="Arial"/>
+              </a:rPr>
+              <a:t>at</a:t>
+            </a:r>
+            <a:endParaRPr b="0" lang="en-US" sz="4400" spc="-1" strike="noStrike">
+              <a:solidFill>
+                <a:srgbClr val="000000"/>
+              </a:solidFill>
+              <a:latin typeface="Arial"/>
             </a:endParaRPr>
           </a:p>
         </p:txBody>
@@ -2175,7 +2386,7 @@
         </p:spPr>
         <p:txBody>
           <a:bodyPr lIns="0" rIns="0" tIns="0" bIns="0" anchor="t">
-            <a:normAutofit fontScale="95303"/>
+            <a:normAutofit/>
           </a:bodyPr>
           <a:p>
             <a:pPr marL="432000" indent="-324000">
@@ -2192,17 +2403,17 @@
             <a:r>
               <a:rPr b="0" lang="en-US" sz="3200" spc="-1" strike="noStrike">
                 <a:solidFill>
-                  <a:schemeClr val="dk1"/>
-                </a:solidFill>
-                <a:latin typeface="Calibri"/>
+                  <a:srgbClr val="000000"/>
+                </a:solidFill>
+                <a:latin typeface="Arial"/>
               </a:rPr>
               <a:t>Click to edit the outline text format</a:t>
             </a:r>
             <a:endParaRPr b="0" lang="en-US" sz="3200" spc="-1" strike="noStrike">
               <a:solidFill>
-                <a:schemeClr val="dk1"/>
-              </a:solidFill>
-              <a:latin typeface="Calibri"/>
+                <a:srgbClr val="000000"/>
+              </a:solidFill>
+              <a:latin typeface="Arial"/>
             </a:endParaRPr>
           </a:p>
           <a:p>
@@ -2218,19 +2429,19 @@
               <a:buChar char=""/>
             </a:pPr>
             <a:r>
-              <a:rPr b="0" lang="en-US" sz="2400" spc="-1" strike="noStrike">
-                <a:solidFill>
-                  <a:schemeClr val="dk1"/>
-                </a:solidFill>
-                <a:latin typeface="Calibri"/>
+              <a:rPr b="0" lang="en-US" sz="2800" spc="-1" strike="noStrike">
+                <a:solidFill>
+                  <a:srgbClr val="000000"/>
+                </a:solidFill>
+                <a:latin typeface="Arial"/>
               </a:rPr>
               <a:t>Second Outline Level</a:t>
             </a:r>
-            <a:endParaRPr b="0" lang="en-US" sz="2400" spc="-1" strike="noStrike">
-              <a:solidFill>
-                <a:schemeClr val="dk1"/>
-              </a:solidFill>
-              <a:latin typeface="Calibri"/>
+            <a:endParaRPr b="0" lang="en-US" sz="2800" spc="-1" strike="noStrike">
+              <a:solidFill>
+                <a:srgbClr val="000000"/>
+              </a:solidFill>
+              <a:latin typeface="Arial"/>
             </a:endParaRPr>
           </a:p>
           <a:p>
@@ -2246,19 +2457,19 @@
               <a:buChar char=""/>
             </a:pPr>
             <a:r>
-              <a:rPr b="0" lang="en-US" sz="2000" spc="-1" strike="noStrike">
-                <a:solidFill>
-                  <a:schemeClr val="dk1"/>
-                </a:solidFill>
-                <a:latin typeface="Calibri"/>
+              <a:rPr b="0" lang="en-US" sz="2400" spc="-1" strike="noStrike">
+                <a:solidFill>
+                  <a:srgbClr val="000000"/>
+                </a:solidFill>
+                <a:latin typeface="Arial"/>
               </a:rPr>
               <a:t>Third Outline Level</a:t>
             </a:r>
-            <a:endParaRPr b="0" lang="en-US" sz="2000" spc="-1" strike="noStrike">
-              <a:solidFill>
-                <a:schemeClr val="dk1"/>
-              </a:solidFill>
-              <a:latin typeface="Calibri"/>
+            <a:endParaRPr b="0" lang="en-US" sz="2400" spc="-1" strike="noStrike">
+              <a:solidFill>
+                <a:srgbClr val="000000"/>
+              </a:solidFill>
+              <a:latin typeface="Arial"/>
             </a:endParaRPr>
           </a:p>
           <a:p>
@@ -2276,17 +2487,17 @@
             <a:r>
               <a:rPr b="0" lang="en-US" sz="2000" spc="-1" strike="noStrike">
                 <a:solidFill>
-                  <a:schemeClr val="dk1"/>
-                </a:solidFill>
-                <a:latin typeface="Calibri"/>
+                  <a:srgbClr val="000000"/>
+                </a:solidFill>
+                <a:latin typeface="Arial"/>
               </a:rPr>
               <a:t>Fourth Outline Level</a:t>
             </a:r>
             <a:endParaRPr b="0" lang="en-US" sz="2000" spc="-1" strike="noStrike">
               <a:solidFill>
-                <a:schemeClr val="dk1"/>
-              </a:solidFill>
-              <a:latin typeface="Calibri"/>
+                <a:srgbClr val="000000"/>
+              </a:solidFill>
+              <a:latin typeface="Arial"/>
             </a:endParaRPr>
           </a:p>
           <a:p>
@@ -2304,17 +2515,17 @@
             <a:r>
               <a:rPr b="0" lang="en-US" sz="2000" spc="-1" strike="noStrike">
                 <a:solidFill>
-                  <a:schemeClr val="dk1"/>
-                </a:solidFill>
-                <a:latin typeface="Calibri"/>
+                  <a:srgbClr val="000000"/>
+                </a:solidFill>
+                <a:latin typeface="Arial"/>
               </a:rPr>
               <a:t>Fifth Outline Level</a:t>
             </a:r>
             <a:endParaRPr b="0" lang="en-US" sz="2000" spc="-1" strike="noStrike">
               <a:solidFill>
-                <a:schemeClr val="dk1"/>
-              </a:solidFill>
-              <a:latin typeface="Calibri"/>
+                <a:srgbClr val="000000"/>
+              </a:solidFill>
+              <a:latin typeface="Arial"/>
             </a:endParaRPr>
           </a:p>
           <a:p>
@@ -2332,17 +2543,17 @@
             <a:r>
               <a:rPr b="0" lang="en-US" sz="2000" spc="-1" strike="noStrike">
                 <a:solidFill>
-                  <a:schemeClr val="dk1"/>
-                </a:solidFill>
-                <a:latin typeface="Calibri"/>
+                  <a:srgbClr val="000000"/>
+                </a:solidFill>
+                <a:latin typeface="Arial"/>
               </a:rPr>
               <a:t>Sixth Outline Level</a:t>
             </a:r>
             <a:endParaRPr b="0" lang="en-US" sz="2000" spc="-1" strike="noStrike">
               <a:solidFill>
-                <a:schemeClr val="dk1"/>
-              </a:solidFill>
-              <a:latin typeface="Calibri"/>
+                <a:srgbClr val="000000"/>
+              </a:solidFill>
+              <a:latin typeface="Arial"/>
             </a:endParaRPr>
           </a:p>
           <a:p>
@@ -2360,17 +2571,17 @@
             <a:r>
               <a:rPr b="0" lang="en-US" sz="2000" spc="-1" strike="noStrike">
                 <a:solidFill>
-                  <a:schemeClr val="dk1"/>
-                </a:solidFill>
-                <a:latin typeface="Calibri"/>
+                  <a:srgbClr val="000000"/>
+                </a:solidFill>
+                <a:latin typeface="Arial"/>
               </a:rPr>
               <a:t>Seventh Outline Level</a:t>
             </a:r>
             <a:endParaRPr b="0" lang="en-US" sz="2000" spc="-1" strike="noStrike">
               <a:solidFill>
-                <a:schemeClr val="dk1"/>
-              </a:solidFill>
-              <a:latin typeface="Calibri"/>
+                <a:srgbClr val="000000"/>
+              </a:solidFill>
+              <a:latin typeface="Arial"/>
             </a:endParaRPr>
           </a:p>
         </p:txBody>
@@ -2417,7 +2628,7 @@
         <p:spPr>
           <a:xfrm>
             <a:off x="0" y="0"/>
-            <a:ext cx="9143640" cy="63720"/>
+            <a:ext cx="9143280" cy="63360"/>
           </a:xfrm>
           <a:prstGeom prst="rect">
             <a:avLst/>
@@ -2443,6 +2654,11 @@
             <a:noAutofit/>
           </a:bodyPr>
           <a:p>
+            <a:pPr>
+              <a:lnSpc>
+                <a:spcPct val="100000"/>
+              </a:lnSpc>
+            </a:pPr>
             <a:endParaRPr b="0" lang="en-US" sz="1800" spc="-1" strike="noStrike">
               <a:solidFill>
                 <a:srgbClr val="ffffff"/>
@@ -2461,7 +2677,7 @@
         <p:spPr>
           <a:xfrm>
             <a:off x="0" y="5079600"/>
-            <a:ext cx="9143640" cy="63720"/>
+            <a:ext cx="9143280" cy="63360"/>
           </a:xfrm>
           <a:prstGeom prst="rect">
             <a:avLst/>
@@ -2487,6 +2703,11 @@
             <a:noAutofit/>
           </a:bodyPr>
           <a:p>
+            <a:pPr>
+              <a:lnSpc>
+                <a:spcPct val="100000"/>
+              </a:lnSpc>
+            </a:pPr>
             <a:endParaRPr b="0" lang="en-US" sz="1800" spc="-1" strike="noStrike">
               <a:solidFill>
                 <a:srgbClr val="ffffff"/>
@@ -2505,7 +2726,7 @@
         <p:spPr>
           <a:xfrm>
             <a:off x="320040" y="777240"/>
-            <a:ext cx="91080" cy="3017160"/>
+            <a:ext cx="90720" cy="3016800"/>
           </a:xfrm>
           <a:prstGeom prst="rect">
             <a:avLst/>
@@ -2535,6 +2756,11 @@
             <a:noAutofit/>
           </a:bodyPr>
           <a:p>
+            <a:pPr>
+              <a:lnSpc>
+                <a:spcPct val="100000"/>
+              </a:lnSpc>
+            </a:pPr>
             <a:endParaRPr b="0" lang="en-US" sz="1800" spc="-1" strike="noStrike">
               <a:solidFill>
                 <a:srgbClr val="ffffff"/>
@@ -2553,7 +2779,7 @@
         <p:spPr>
           <a:xfrm>
             <a:off x="320040" y="777240"/>
-            <a:ext cx="411120" cy="91080"/>
+            <a:ext cx="410760" cy="90720"/>
           </a:xfrm>
           <a:prstGeom prst="rect">
             <a:avLst/>
@@ -2583,6 +2809,11 @@
             <a:noAutofit/>
           </a:bodyPr>
           <a:p>
+            <a:pPr>
+              <a:lnSpc>
+                <a:spcPct val="100000"/>
+              </a:lnSpc>
+            </a:pPr>
             <a:endParaRPr b="0" lang="en-US" sz="1800" spc="-1" strike="noStrike">
               <a:solidFill>
                 <a:srgbClr val="ffffff"/>
@@ -2601,7 +2832,7 @@
         <p:spPr>
           <a:xfrm>
             <a:off x="320040" y="3703320"/>
-            <a:ext cx="411120" cy="91080"/>
+            <a:ext cx="410760" cy="90720"/>
           </a:xfrm>
           <a:prstGeom prst="rect">
             <a:avLst/>
@@ -2631,6 +2862,11 @@
             <a:noAutofit/>
           </a:bodyPr>
           <a:p>
+            <a:pPr>
+              <a:lnSpc>
+                <a:spcPct val="100000"/>
+              </a:lnSpc>
+            </a:pPr>
             <a:endParaRPr b="0" lang="en-US" sz="1800" spc="-1" strike="noStrike">
               <a:solidFill>
                 <a:srgbClr val="ffffff"/>
@@ -2649,7 +2885,7 @@
         <p:spPr>
           <a:xfrm>
             <a:off x="914400" y="914400"/>
-            <a:ext cx="6583320" cy="1828440"/>
+            <a:ext cx="6582960" cy="1828080"/>
           </a:xfrm>
           <a:prstGeom prst="rect">
             <a:avLst/>
@@ -2731,8 +2967,8 @@
         </p:nvSpPr>
         <p:spPr>
           <a:xfrm>
-            <a:off x="877680" y="3200760"/>
-            <a:ext cx="6583320" cy="456840"/>
+            <a:off x="823680" y="3429000"/>
+            <a:ext cx="6582960" cy="456480"/>
           </a:xfrm>
           <a:prstGeom prst="rect">
             <a:avLst/>
@@ -2789,7 +3025,7 @@
         <p:spPr>
           <a:xfrm>
             <a:off x="7406640" y="1097280"/>
-            <a:ext cx="1416960" cy="2697120"/>
+            <a:ext cx="1416600" cy="2696760"/>
           </a:xfrm>
           <a:prstGeom prst="rect">
             <a:avLst/>
@@ -2822,6 +3058,11 @@
             <a:noAutofit/>
           </a:bodyPr>
           <a:p>
+            <a:pPr>
+              <a:lnSpc>
+                <a:spcPct val="100000"/>
+              </a:lnSpc>
+            </a:pPr>
             <a:endParaRPr b="0" lang="en-US" sz="1800" spc="-1" strike="noStrike">
               <a:solidFill>
                 <a:srgbClr val="ffffff"/>
@@ -2840,7 +3081,7 @@
         <p:spPr>
           <a:xfrm>
             <a:off x="7406640" y="1097280"/>
-            <a:ext cx="54360" cy="2697120"/>
+            <a:ext cx="54000" cy="2696760"/>
           </a:xfrm>
           <a:prstGeom prst="rect">
             <a:avLst/>
@@ -2866,6 +3107,11 @@
             <a:noAutofit/>
           </a:bodyPr>
           <a:p>
+            <a:pPr>
+              <a:lnSpc>
+                <a:spcPct val="100000"/>
+              </a:lnSpc>
+            </a:pPr>
             <a:endParaRPr b="0" lang="en-US" sz="1800" spc="-1" strike="noStrike">
               <a:solidFill>
                 <a:srgbClr val="000000"/>
@@ -2884,7 +3130,7 @@
         <p:spPr>
           <a:xfrm>
             <a:off x="7516440" y="1234440"/>
-            <a:ext cx="1234080" cy="319680"/>
+            <a:ext cx="1233720" cy="319320"/>
           </a:xfrm>
           <a:prstGeom prst="rect">
             <a:avLst/>
@@ -2941,7 +3187,7 @@
         <p:spPr>
           <a:xfrm>
             <a:off x="7516440" y="1527120"/>
-            <a:ext cx="1234080" cy="219240"/>
+            <a:ext cx="1233720" cy="218880"/>
           </a:xfrm>
           <a:prstGeom prst="rect">
             <a:avLst/>
@@ -2998,7 +3244,7 @@
         <p:spPr>
           <a:xfrm>
             <a:off x="7516440" y="1837800"/>
-            <a:ext cx="1234080" cy="319680"/>
+            <a:ext cx="1233720" cy="319320"/>
           </a:xfrm>
           <a:prstGeom prst="rect">
             <a:avLst/>
@@ -3055,7 +3301,7 @@
         <p:spPr>
           <a:xfrm>
             <a:off x="7516440" y="2130480"/>
-            <a:ext cx="1234080" cy="219240"/>
+            <a:ext cx="1233720" cy="218880"/>
           </a:xfrm>
           <a:prstGeom prst="rect">
             <a:avLst/>
@@ -3112,7 +3358,7 @@
         <p:spPr>
           <a:xfrm>
             <a:off x="7516440" y="2441520"/>
-            <a:ext cx="1234080" cy="319680"/>
+            <a:ext cx="1233720" cy="319320"/>
           </a:xfrm>
           <a:prstGeom prst="rect">
             <a:avLst/>
@@ -3169,7 +3415,7 @@
         <p:spPr>
           <a:xfrm>
             <a:off x="7516440" y="2734200"/>
-            <a:ext cx="1234080" cy="219240"/>
+            <a:ext cx="1233720" cy="218880"/>
           </a:xfrm>
           <a:prstGeom prst="rect">
             <a:avLst/>
@@ -3226,7 +3472,7 @@
         <p:spPr>
           <a:xfrm>
             <a:off x="7516440" y="3044880"/>
-            <a:ext cx="1234080" cy="319680"/>
+            <a:ext cx="1233720" cy="319320"/>
           </a:xfrm>
           <a:prstGeom prst="rect">
             <a:avLst/>
@@ -3283,7 +3529,7 @@
         <p:spPr>
           <a:xfrm>
             <a:off x="7516440" y="3337560"/>
-            <a:ext cx="1234080" cy="219240"/>
+            <a:ext cx="1233720" cy="218880"/>
           </a:xfrm>
           <a:prstGeom prst="rect">
             <a:avLst/>
@@ -3340,7 +3586,7 @@
         <p:spPr>
           <a:xfrm>
             <a:off x="457200" y="4160520"/>
-            <a:ext cx="1572480" cy="347040"/>
+            <a:ext cx="1572120" cy="346680"/>
           </a:xfrm>
           <a:prstGeom prst="roundRect">
             <a:avLst>
@@ -3368,6 +3614,11 @@
             <a:noAutofit/>
           </a:bodyPr>
           <a:p>
+            <a:pPr>
+              <a:lnSpc>
+                <a:spcPct val="100000"/>
+              </a:lnSpc>
+            </a:pPr>
             <a:endParaRPr b="0" lang="en-US" sz="1800" spc="-1" strike="noStrike">
               <a:solidFill>
                 <a:srgbClr val="ffffff"/>
@@ -3386,7 +3637,7 @@
         <p:spPr>
           <a:xfrm>
             <a:off x="457200" y="4160520"/>
-            <a:ext cx="1572480" cy="347040"/>
+            <a:ext cx="1572120" cy="346680"/>
           </a:xfrm>
           <a:prstGeom prst="rect">
             <a:avLst/>
@@ -3443,7 +3694,7 @@
         <p:spPr>
           <a:xfrm>
             <a:off x="2148840" y="4160520"/>
-            <a:ext cx="1572480" cy="347040"/>
+            <a:ext cx="1572120" cy="346680"/>
           </a:xfrm>
           <a:prstGeom prst="roundRect">
             <a:avLst>
@@ -3471,6 +3722,11 @@
             <a:noAutofit/>
           </a:bodyPr>
           <a:p>
+            <a:pPr>
+              <a:lnSpc>
+                <a:spcPct val="100000"/>
+              </a:lnSpc>
+            </a:pPr>
             <a:endParaRPr b="0" lang="en-US" sz="1800" spc="-1" strike="noStrike">
               <a:solidFill>
                 <a:srgbClr val="ffffff"/>
@@ -3489,7 +3745,7 @@
         <p:spPr>
           <a:xfrm>
             <a:off x="2148840" y="4160520"/>
-            <a:ext cx="1572480" cy="347040"/>
+            <a:ext cx="1572120" cy="346680"/>
           </a:xfrm>
           <a:prstGeom prst="rect">
             <a:avLst/>
@@ -3546,7 +3802,7 @@
         <p:spPr>
           <a:xfrm>
             <a:off x="3840480" y="4160520"/>
-            <a:ext cx="1572480" cy="347040"/>
+            <a:ext cx="1572120" cy="346680"/>
           </a:xfrm>
           <a:prstGeom prst="roundRect">
             <a:avLst>
@@ -3574,6 +3830,11 @@
             <a:noAutofit/>
           </a:bodyPr>
           <a:p>
+            <a:pPr>
+              <a:lnSpc>
+                <a:spcPct val="100000"/>
+              </a:lnSpc>
+            </a:pPr>
             <a:endParaRPr b="0" lang="en-US" sz="1800" spc="-1" strike="noStrike">
               <a:solidFill>
                 <a:srgbClr val="ffffff"/>
@@ -3592,7 +3853,7 @@
         <p:spPr>
           <a:xfrm>
             <a:off x="3840480" y="4160520"/>
-            <a:ext cx="1572480" cy="347040"/>
+            <a:ext cx="1572120" cy="346680"/>
           </a:xfrm>
           <a:prstGeom prst="rect">
             <a:avLst/>
@@ -3649,7 +3910,7 @@
         <p:spPr>
           <a:xfrm>
             <a:off x="5532120" y="4160520"/>
-            <a:ext cx="1572480" cy="347040"/>
+            <a:ext cx="1572120" cy="346680"/>
           </a:xfrm>
           <a:prstGeom prst="roundRect">
             <a:avLst>
@@ -3677,6 +3938,11 @@
             <a:noAutofit/>
           </a:bodyPr>
           <a:p>
+            <a:pPr>
+              <a:lnSpc>
+                <a:spcPct val="100000"/>
+              </a:lnSpc>
+            </a:pPr>
             <a:endParaRPr b="0" lang="en-US" sz="1800" spc="-1" strike="noStrike">
               <a:solidFill>
                 <a:srgbClr val="ffffff"/>
@@ -3695,7 +3961,7 @@
         <p:spPr>
           <a:xfrm>
             <a:off x="5532120" y="4160520"/>
-            <a:ext cx="1572480" cy="347040"/>
+            <a:ext cx="1572120" cy="346680"/>
           </a:xfrm>
           <a:prstGeom prst="rect">
             <a:avLst/>
@@ -3752,7 +4018,7 @@
         <p:spPr>
           <a:xfrm>
             <a:off x="7223760" y="4160520"/>
-            <a:ext cx="1572480" cy="347040"/>
+            <a:ext cx="1572120" cy="346680"/>
           </a:xfrm>
           <a:prstGeom prst="roundRect">
             <a:avLst>
@@ -3780,6 +4046,11 @@
             <a:noAutofit/>
           </a:bodyPr>
           <a:p>
+            <a:pPr>
+              <a:lnSpc>
+                <a:spcPct val="100000"/>
+              </a:lnSpc>
+            </a:pPr>
             <a:endParaRPr b="0" lang="en-US" sz="1800" spc="-1" strike="noStrike">
               <a:solidFill>
                 <a:srgbClr val="ffffff"/>
@@ -3798,7 +4069,7 @@
         <p:spPr>
           <a:xfrm>
             <a:off x="7223760" y="4160520"/>
-            <a:ext cx="1572480" cy="347040"/>
+            <a:ext cx="1572120" cy="346680"/>
           </a:xfrm>
           <a:prstGeom prst="rect">
             <a:avLst/>
@@ -3855,7 +4126,7 @@
         <p:spPr>
           <a:xfrm>
             <a:off x="320040" y="4681800"/>
-            <a:ext cx="6857640" cy="273960"/>
+            <a:ext cx="6857280" cy="273600"/>
           </a:xfrm>
           <a:prstGeom prst="rect">
             <a:avLst/>
@@ -3896,27 +4167,38 @@
       <p:sp>
         <p:nvSpPr>
           <p:cNvPr id="36" name=""/>
-          <p:cNvSpPr txBox="1"/>
-          <p:nvPr/>
-        </p:nvSpPr>
-        <p:spPr>
-          <a:xfrm>
-            <a:off x="3429000" y="2971800"/>
-            <a:ext cx="4114800" cy="457200"/>
-          </a:xfrm>
-          <a:prstGeom prst="rect">
-            <a:avLst/>
-          </a:prstGeom>
-          <a:noFill/>
-          <a:ln w="0">
-            <a:noFill/>
-          </a:ln>
-        </p:spPr>
+          <p:cNvSpPr/>
+          <p:nvPr/>
+        </p:nvSpPr>
+        <p:spPr>
+          <a:xfrm>
+            <a:off x="2514600" y="2972160"/>
+            <a:ext cx="4114440" cy="456840"/>
+          </a:xfrm>
+          <a:prstGeom prst="rect">
+            <a:avLst/>
+          </a:prstGeom>
+          <a:noFill/>
+          <a:ln w="0">
+            <a:noFill/>
+          </a:ln>
+        </p:spPr>
+        <p:style>
+          <a:lnRef idx="0"/>
+          <a:fillRef idx="0"/>
+          <a:effectRef idx="0"/>
+          <a:fontRef idx="minor"/>
+        </p:style>
         <p:txBody>
           <a:bodyPr lIns="90000" rIns="90000" tIns="45000" bIns="45000" anchor="t">
             <a:noAutofit/>
           </a:bodyPr>
           <a:p>
+            <a:pPr>
+              <a:lnSpc>
+                <a:spcPct val="100000"/>
+              </a:lnSpc>
+            </a:pPr>
             <a:r>
               <a:rPr b="0" lang="en-US" sz="1800" spc="-1" strike="noStrike">
                 <a:solidFill>
@@ -3924,7 +4206,7 @@
                 </a:solidFill>
                 <a:latin typeface="Arial"/>
               </a:rPr>
-              <a:t>SAMSAR 2.0</a:t>
+              <a:t>SAMSAR 2.0 :  22013 22040 25239</a:t>
             </a:r>
             <a:endParaRPr b="0" lang="en-US" sz="1800" spc="-1" strike="noStrike">
               <a:solidFill>
@@ -3981,7 +4263,7 @@
         <p:spPr>
           <a:xfrm>
             <a:off x="320040" y="201240"/>
-            <a:ext cx="63720" cy="566640"/>
+            <a:ext cx="63360" cy="566280"/>
           </a:xfrm>
           <a:prstGeom prst="rect">
             <a:avLst/>
@@ -4007,6 +4289,11 @@
             <a:noAutofit/>
           </a:bodyPr>
           <a:p>
+            <a:pPr>
+              <a:lnSpc>
+                <a:spcPct val="100000"/>
+              </a:lnSpc>
+            </a:pPr>
             <a:endParaRPr b="0" lang="en-US" sz="1800" spc="-1" strike="noStrike">
               <a:solidFill>
                 <a:srgbClr val="ffffff"/>
@@ -4025,7 +4312,7 @@
         <p:spPr>
           <a:xfrm>
             <a:off x="475560" y="164520"/>
-            <a:ext cx="8320680" cy="658080"/>
+            <a:ext cx="8320320" cy="657720"/>
           </a:xfrm>
           <a:prstGeom prst="rect">
             <a:avLst/>
@@ -4125,7 +4412,7 @@
         <p:spPr>
           <a:xfrm>
             <a:off x="320040" y="960120"/>
-            <a:ext cx="4160160" cy="3931560"/>
+            <a:ext cx="4159800" cy="3931200"/>
           </a:xfrm>
           <a:prstGeom prst="rect">
             <a:avLst/>
@@ -4158,6 +4445,11 @@
             <a:noAutofit/>
           </a:bodyPr>
           <a:p>
+            <a:pPr>
+              <a:lnSpc>
+                <a:spcPct val="100000"/>
+              </a:lnSpc>
+            </a:pPr>
             <a:endParaRPr b="0" lang="en-US" sz="1800" spc="-1" strike="noStrike">
               <a:solidFill>
                 <a:srgbClr val="ffffff"/>
@@ -4176,7 +4468,7 @@
         <p:spPr>
           <a:xfrm>
             <a:off x="457200" y="1051560"/>
-            <a:ext cx="3885840" cy="228240"/>
+            <a:ext cx="3885480" cy="227880"/>
           </a:xfrm>
           <a:prstGeom prst="rect">
             <a:avLst/>
@@ -4233,7 +4525,7 @@
         <p:spPr>
           <a:xfrm>
             <a:off x="457200" y="1353240"/>
-            <a:ext cx="1188360" cy="475200"/>
+            <a:ext cx="1188000" cy="474840"/>
           </a:xfrm>
           <a:prstGeom prst="rect">
             <a:avLst/>
@@ -4266,6 +4558,11 @@
             <a:noAutofit/>
           </a:bodyPr>
           <a:p>
+            <a:pPr>
+              <a:lnSpc>
+                <a:spcPct val="100000"/>
+              </a:lnSpc>
+            </a:pPr>
             <a:endParaRPr b="0" lang="en-US" sz="1800" spc="-1" strike="noStrike">
               <a:solidFill>
                 <a:srgbClr val="ffffff"/>
@@ -4284,7 +4581,7 @@
         <p:spPr>
           <a:xfrm>
             <a:off x="457200" y="1353240"/>
-            <a:ext cx="1188360" cy="475200"/>
+            <a:ext cx="1188000" cy="474840"/>
           </a:xfrm>
           <a:prstGeom prst="rect">
             <a:avLst/>
@@ -4341,7 +4638,7 @@
         <p:spPr>
           <a:xfrm>
             <a:off x="1783080" y="1353240"/>
-            <a:ext cx="1188360" cy="475200"/>
+            <a:ext cx="1188000" cy="474840"/>
           </a:xfrm>
           <a:prstGeom prst="rect">
             <a:avLst/>
@@ -4374,6 +4671,11 @@
             <a:noAutofit/>
           </a:bodyPr>
           <a:p>
+            <a:pPr>
+              <a:lnSpc>
+                <a:spcPct val="100000"/>
+              </a:lnSpc>
+            </a:pPr>
             <a:endParaRPr b="0" lang="en-US" sz="1800" spc="-1" strike="noStrike">
               <a:solidFill>
                 <a:srgbClr val="ffffff"/>
@@ -4392,7 +4694,7 @@
         <p:spPr>
           <a:xfrm>
             <a:off x="1783080" y="1353240"/>
-            <a:ext cx="1188360" cy="475200"/>
+            <a:ext cx="1188000" cy="474840"/>
           </a:xfrm>
           <a:prstGeom prst="rect">
             <a:avLst/>
@@ -4449,7 +4751,7 @@
         <p:spPr>
           <a:xfrm>
             <a:off x="3108960" y="1353240"/>
-            <a:ext cx="1188360" cy="475200"/>
+            <a:ext cx="1188000" cy="474840"/>
           </a:xfrm>
           <a:prstGeom prst="rect">
             <a:avLst/>
@@ -4482,6 +4784,11 @@
             <a:noAutofit/>
           </a:bodyPr>
           <a:p>
+            <a:pPr>
+              <a:lnSpc>
+                <a:spcPct val="100000"/>
+              </a:lnSpc>
+            </a:pPr>
             <a:endParaRPr b="0" lang="en-US" sz="1800" spc="-1" strike="noStrike">
               <a:solidFill>
                 <a:srgbClr val="ffffff"/>
@@ -4500,7 +4807,7 @@
         <p:spPr>
           <a:xfrm>
             <a:off x="3108960" y="1353240"/>
-            <a:ext cx="1188360" cy="475200"/>
+            <a:ext cx="1188000" cy="474840"/>
           </a:xfrm>
           <a:prstGeom prst="rect">
             <a:avLst/>
@@ -4557,7 +4864,7 @@
         <p:spPr>
           <a:xfrm>
             <a:off x="457200" y="1974960"/>
-            <a:ext cx="1188360" cy="475200"/>
+            <a:ext cx="1188000" cy="474840"/>
           </a:xfrm>
           <a:prstGeom prst="rect">
             <a:avLst/>
@@ -4590,6 +4897,11 @@
             <a:noAutofit/>
           </a:bodyPr>
           <a:p>
+            <a:pPr>
+              <a:lnSpc>
+                <a:spcPct val="100000"/>
+              </a:lnSpc>
+            </a:pPr>
             <a:endParaRPr b="0" lang="en-US" sz="1800" spc="-1" strike="noStrike">
               <a:solidFill>
                 <a:srgbClr val="ffffff"/>
@@ -4608,7 +4920,7 @@
         <p:spPr>
           <a:xfrm>
             <a:off x="457200" y="1974960"/>
-            <a:ext cx="1188360" cy="475200"/>
+            <a:ext cx="1188000" cy="474840"/>
           </a:xfrm>
           <a:prstGeom prst="rect">
             <a:avLst/>
@@ -4665,7 +4977,7 @@
         <p:spPr>
           <a:xfrm>
             <a:off x="1783080" y="1974960"/>
-            <a:ext cx="1188360" cy="475200"/>
+            <a:ext cx="1188000" cy="474840"/>
           </a:xfrm>
           <a:prstGeom prst="rect">
             <a:avLst/>
@@ -4698,6 +5010,11 @@
             <a:noAutofit/>
           </a:bodyPr>
           <a:p>
+            <a:pPr>
+              <a:lnSpc>
+                <a:spcPct val="100000"/>
+              </a:lnSpc>
+            </a:pPr>
             <a:endParaRPr b="0" lang="en-US" sz="1800" spc="-1" strike="noStrike">
               <a:solidFill>
                 <a:srgbClr val="ffffff"/>
@@ -4716,7 +5033,7 @@
         <p:spPr>
           <a:xfrm>
             <a:off x="1783080" y="1974960"/>
-            <a:ext cx="1188360" cy="475200"/>
+            <a:ext cx="1188000" cy="474840"/>
           </a:xfrm>
           <a:prstGeom prst="rect">
             <a:avLst/>
@@ -4773,7 +5090,7 @@
         <p:spPr>
           <a:xfrm>
             <a:off x="3108960" y="1974960"/>
-            <a:ext cx="1188360" cy="475200"/>
+            <a:ext cx="1188000" cy="474840"/>
           </a:xfrm>
           <a:prstGeom prst="rect">
             <a:avLst/>
@@ -4806,6 +5123,11 @@
             <a:noAutofit/>
           </a:bodyPr>
           <a:p>
+            <a:pPr>
+              <a:lnSpc>
+                <a:spcPct val="100000"/>
+              </a:lnSpc>
+            </a:pPr>
             <a:endParaRPr b="0" lang="en-US" sz="1800" spc="-1" strike="noStrike">
               <a:solidFill>
                 <a:srgbClr val="ffffff"/>
@@ -4824,7 +5146,7 @@
         <p:spPr>
           <a:xfrm>
             <a:off x="3108960" y="1974960"/>
-            <a:ext cx="1188360" cy="475200"/>
+            <a:ext cx="1188000" cy="474840"/>
           </a:xfrm>
           <a:prstGeom prst="rect">
             <a:avLst/>
@@ -4881,7 +5203,7 @@
         <p:spPr>
           <a:xfrm>
             <a:off x="457200" y="2651760"/>
-            <a:ext cx="3840120" cy="255600"/>
+            <a:ext cx="3839760" cy="255240"/>
           </a:xfrm>
           <a:prstGeom prst="rect">
             <a:avLst/>
@@ -4938,7 +5260,7 @@
         <p:spPr>
           <a:xfrm>
             <a:off x="731520" y="2962800"/>
-            <a:ext cx="3382920" cy="502560"/>
+            <a:ext cx="3382560" cy="502200"/>
           </a:xfrm>
           <a:prstGeom prst="rect">
             <a:avLst/>
@@ -4971,6 +5293,11 @@
             <a:noAutofit/>
           </a:bodyPr>
           <a:p>
+            <a:pPr>
+              <a:lnSpc>
+                <a:spcPct val="100000"/>
+              </a:lnSpc>
+            </a:pPr>
             <a:endParaRPr b="0" lang="en-US" sz="1800" spc="-1" strike="noStrike">
               <a:solidFill>
                 <a:srgbClr val="ffffff"/>
@@ -4989,7 +5316,7 @@
         <p:spPr>
           <a:xfrm>
             <a:off x="731520" y="2962800"/>
-            <a:ext cx="3382920" cy="502560"/>
+            <a:ext cx="3382560" cy="502200"/>
           </a:xfrm>
           <a:prstGeom prst="rect">
             <a:avLst/>
@@ -5046,7 +5373,7 @@
         <p:spPr>
           <a:xfrm>
             <a:off x="457200" y="3520440"/>
-            <a:ext cx="3840120" cy="255600"/>
+            <a:ext cx="3839760" cy="255240"/>
           </a:xfrm>
           <a:prstGeom prst="rect">
             <a:avLst/>
@@ -5103,7 +5430,7 @@
         <p:spPr>
           <a:xfrm>
             <a:off x="1005840" y="3822120"/>
-            <a:ext cx="2834280" cy="475200"/>
+            <a:ext cx="2833920" cy="474840"/>
           </a:xfrm>
           <a:prstGeom prst="rect">
             <a:avLst/>
@@ -5131,6 +5458,11 @@
             <a:noAutofit/>
           </a:bodyPr>
           <a:p>
+            <a:pPr>
+              <a:lnSpc>
+                <a:spcPct val="100000"/>
+              </a:lnSpc>
+            </a:pPr>
             <a:endParaRPr b="0" lang="en-US" sz="1800" spc="-1" strike="noStrike">
               <a:solidFill>
                 <a:srgbClr val="ffffff"/>
@@ -5149,7 +5481,7 @@
         <p:spPr>
           <a:xfrm>
             <a:off x="1005840" y="3822120"/>
-            <a:ext cx="2834280" cy="475200"/>
+            <a:ext cx="2833920" cy="474840"/>
           </a:xfrm>
           <a:prstGeom prst="rect">
             <a:avLst/>
@@ -5206,7 +5538,7 @@
         <p:spPr>
           <a:xfrm>
             <a:off x="4663440" y="960120"/>
-            <a:ext cx="4160160" cy="1170000"/>
+            <a:ext cx="4159800" cy="1169640"/>
           </a:xfrm>
           <a:prstGeom prst="rect">
             <a:avLst/>
@@ -5239,6 +5571,11 @@
             <a:noAutofit/>
           </a:bodyPr>
           <a:p>
+            <a:pPr>
+              <a:lnSpc>
+                <a:spcPct val="100000"/>
+              </a:lnSpc>
+            </a:pPr>
             <a:endParaRPr b="0" lang="en-US" sz="1800" spc="-1" strike="noStrike">
               <a:solidFill>
                 <a:srgbClr val="ffffff"/>
@@ -5257,7 +5594,7 @@
         <p:spPr>
           <a:xfrm>
             <a:off x="4663440" y="960120"/>
-            <a:ext cx="54360" cy="1170000"/>
+            <a:ext cx="54000" cy="1169640"/>
           </a:xfrm>
           <a:prstGeom prst="rect">
             <a:avLst/>
@@ -5283,6 +5620,11 @@
             <a:noAutofit/>
           </a:bodyPr>
           <a:p>
+            <a:pPr>
+              <a:lnSpc>
+                <a:spcPct val="100000"/>
+              </a:lnSpc>
+            </a:pPr>
             <a:endParaRPr b="0" lang="en-US" sz="1800" spc="-1" strike="noStrike">
               <a:solidFill>
                 <a:srgbClr val="ffffff"/>
@@ -5301,7 +5643,7 @@
         <p:spPr>
           <a:xfrm>
             <a:off x="4827960" y="1051560"/>
-            <a:ext cx="3858480" cy="273960"/>
+            <a:ext cx="3858120" cy="273600"/>
           </a:xfrm>
           <a:prstGeom prst="rect">
             <a:avLst/>
@@ -5358,7 +5700,7 @@
         <p:spPr>
           <a:xfrm>
             <a:off x="4827960" y="1362600"/>
-            <a:ext cx="3858480" cy="694440"/>
+            <a:ext cx="3858120" cy="694080"/>
           </a:xfrm>
           <a:prstGeom prst="rect">
             <a:avLst/>
@@ -5415,7 +5757,7 @@
         <p:spPr>
           <a:xfrm>
             <a:off x="4663440" y="2286000"/>
-            <a:ext cx="4160160" cy="1170000"/>
+            <a:ext cx="4159800" cy="1169640"/>
           </a:xfrm>
           <a:prstGeom prst="rect">
             <a:avLst/>
@@ -5448,6 +5790,11 @@
             <a:noAutofit/>
           </a:bodyPr>
           <a:p>
+            <a:pPr>
+              <a:lnSpc>
+                <a:spcPct val="100000"/>
+              </a:lnSpc>
+            </a:pPr>
             <a:endParaRPr b="0" lang="en-US" sz="1800" spc="-1" strike="noStrike">
               <a:solidFill>
                 <a:srgbClr val="ffffff"/>
@@ -5466,7 +5813,7 @@
         <p:spPr>
           <a:xfrm>
             <a:off x="4663440" y="2286000"/>
-            <a:ext cx="54360" cy="1170000"/>
+            <a:ext cx="54000" cy="1169640"/>
           </a:xfrm>
           <a:prstGeom prst="rect">
             <a:avLst/>
@@ -5492,6 +5839,11 @@
             <a:noAutofit/>
           </a:bodyPr>
           <a:p>
+            <a:pPr>
+              <a:lnSpc>
+                <a:spcPct val="100000"/>
+              </a:lnSpc>
+            </a:pPr>
             <a:endParaRPr b="0" lang="en-US" sz="1800" spc="-1" strike="noStrike">
               <a:solidFill>
                 <a:srgbClr val="ffffff"/>
@@ -5510,7 +5862,7 @@
         <p:spPr>
           <a:xfrm>
             <a:off x="4827960" y="2377440"/>
-            <a:ext cx="3858480" cy="273960"/>
+            <a:ext cx="3858120" cy="273600"/>
           </a:xfrm>
           <a:prstGeom prst="rect">
             <a:avLst/>
@@ -5567,7 +5919,7 @@
         <p:spPr>
           <a:xfrm>
             <a:off x="4827960" y="2688480"/>
-            <a:ext cx="3858480" cy="694440"/>
+            <a:ext cx="3858120" cy="694080"/>
           </a:xfrm>
           <a:prstGeom prst="rect">
             <a:avLst/>
@@ -5624,7 +5976,7 @@
         <p:spPr>
           <a:xfrm>
             <a:off x="4663440" y="3611880"/>
-            <a:ext cx="4160160" cy="1170000"/>
+            <a:ext cx="4159800" cy="1169640"/>
           </a:xfrm>
           <a:prstGeom prst="rect">
             <a:avLst/>
@@ -5657,6 +6009,11 @@
             <a:noAutofit/>
           </a:bodyPr>
           <a:p>
+            <a:pPr>
+              <a:lnSpc>
+                <a:spcPct val="100000"/>
+              </a:lnSpc>
+            </a:pPr>
             <a:endParaRPr b="0" lang="en-US" sz="1800" spc="-1" strike="noStrike">
               <a:solidFill>
                 <a:srgbClr val="ffffff"/>
@@ -5675,7 +6032,7 @@
         <p:spPr>
           <a:xfrm>
             <a:off x="4663440" y="3611880"/>
-            <a:ext cx="54360" cy="1170000"/>
+            <a:ext cx="54000" cy="1169640"/>
           </a:xfrm>
           <a:prstGeom prst="rect">
             <a:avLst/>
@@ -5701,6 +6058,11 @@
             <a:noAutofit/>
           </a:bodyPr>
           <a:p>
+            <a:pPr>
+              <a:lnSpc>
+                <a:spcPct val="100000"/>
+              </a:lnSpc>
+            </a:pPr>
             <a:endParaRPr b="0" lang="en-US" sz="1800" spc="-1" strike="noStrike">
               <a:solidFill>
                 <a:srgbClr val="ffffff"/>
@@ -5719,7 +6081,7 @@
         <p:spPr>
           <a:xfrm>
             <a:off x="4827960" y="3703320"/>
-            <a:ext cx="3858480" cy="273960"/>
+            <a:ext cx="3858120" cy="273600"/>
           </a:xfrm>
           <a:prstGeom prst="rect">
             <a:avLst/>
@@ -5776,7 +6138,7 @@
         <p:spPr>
           <a:xfrm>
             <a:off x="4827960" y="4014360"/>
-            <a:ext cx="3858480" cy="694440"/>
+            <a:ext cx="3858120" cy="694080"/>
           </a:xfrm>
           <a:prstGeom prst="rect">
             <a:avLst/>
@@ -5870,7 +6232,7 @@
         <p:spPr>
           <a:xfrm>
             <a:off x="320040" y="201240"/>
-            <a:ext cx="63720" cy="566640"/>
+            <a:ext cx="63360" cy="566280"/>
           </a:xfrm>
           <a:prstGeom prst="rect">
             <a:avLst/>
@@ -5896,6 +6258,11 @@
             <a:noAutofit/>
           </a:bodyPr>
           <a:p>
+            <a:pPr>
+              <a:lnSpc>
+                <a:spcPct val="100000"/>
+              </a:lnSpc>
+            </a:pPr>
             <a:endParaRPr b="0" lang="en-US" sz="1800" spc="-1" strike="noStrike">
               <a:solidFill>
                 <a:srgbClr val="ffffff"/>
@@ -5914,7 +6281,7 @@
         <p:spPr>
           <a:xfrm>
             <a:off x="475560" y="164520"/>
-            <a:ext cx="8320680" cy="658080"/>
+            <a:ext cx="8320320" cy="657720"/>
           </a:xfrm>
           <a:prstGeom prst="rect">
             <a:avLst/>
@@ -6014,7 +6381,7 @@
         <p:spPr>
           <a:xfrm>
             <a:off x="320040" y="960120"/>
-            <a:ext cx="8503560" cy="347040"/>
+            <a:ext cx="8503200" cy="346680"/>
           </a:xfrm>
           <a:prstGeom prst="rect">
             <a:avLst/>
@@ -6040,6 +6407,11 @@
             <a:noAutofit/>
           </a:bodyPr>
           <a:p>
+            <a:pPr>
+              <a:lnSpc>
+                <a:spcPct val="100000"/>
+              </a:lnSpc>
+            </a:pPr>
             <a:endParaRPr b="0" lang="en-US" sz="1800" spc="-1" strike="noStrike">
               <a:solidFill>
                 <a:srgbClr val="ffffff"/>
@@ -6058,7 +6430,7 @@
         <p:spPr>
           <a:xfrm>
             <a:off x="457200" y="960120"/>
-            <a:ext cx="8320680" cy="347040"/>
+            <a:ext cx="8320320" cy="346680"/>
           </a:xfrm>
           <a:prstGeom prst="rect">
             <a:avLst/>
@@ -6125,7 +6497,7 @@
         <p:spPr>
           <a:xfrm>
             <a:off x="320040" y="1417320"/>
-            <a:ext cx="4160160" cy="1663920"/>
+            <a:ext cx="4159800" cy="1663560"/>
           </a:xfrm>
           <a:prstGeom prst="rect">
             <a:avLst/>
@@ -6158,6 +6530,11 @@
             <a:noAutofit/>
           </a:bodyPr>
           <a:p>
+            <a:pPr>
+              <a:lnSpc>
+                <a:spcPct val="100000"/>
+              </a:lnSpc>
+            </a:pPr>
             <a:endParaRPr b="0" lang="en-US" sz="1800" spc="-1" strike="noStrike">
               <a:solidFill>
                 <a:srgbClr val="ffffff"/>
@@ -6176,7 +6553,7 @@
         <p:spPr>
           <a:xfrm>
             <a:off x="320040" y="1417320"/>
-            <a:ext cx="4160160" cy="54360"/>
+            <a:ext cx="4159800" cy="54000"/>
           </a:xfrm>
           <a:prstGeom prst="rect">
             <a:avLst/>
@@ -6202,6 +6579,11 @@
             <a:noAutofit/>
           </a:bodyPr>
           <a:p>
+            <a:pPr>
+              <a:lnSpc>
+                <a:spcPct val="100000"/>
+              </a:lnSpc>
+            </a:pPr>
             <a:endParaRPr b="0" lang="en-US" sz="1800" spc="-1" strike="noStrike">
               <a:solidFill>
                 <a:srgbClr val="ffffff"/>
@@ -6220,7 +6602,7 @@
         <p:spPr>
           <a:xfrm>
             <a:off x="457200" y="1508760"/>
-            <a:ext cx="1371240" cy="255600"/>
+            <a:ext cx="1370880" cy="255240"/>
           </a:xfrm>
           <a:prstGeom prst="rect">
             <a:avLst/>
@@ -6277,7 +6659,7 @@
         <p:spPr>
           <a:xfrm>
             <a:off x="3063240" y="1508760"/>
-            <a:ext cx="1279800" cy="255600"/>
+            <a:ext cx="1279440" cy="255240"/>
           </a:xfrm>
           <a:prstGeom prst="rect">
             <a:avLst/>
@@ -6334,7 +6716,7 @@
         <p:spPr>
           <a:xfrm>
             <a:off x="457200" y="1764720"/>
-            <a:ext cx="3858480" cy="219240"/>
+            <a:ext cx="3858120" cy="218880"/>
           </a:xfrm>
           <a:prstGeom prst="rect">
             <a:avLst/>
@@ -6391,7 +6773,7 @@
         <p:spPr>
           <a:xfrm>
             <a:off x="457200" y="2002680"/>
-            <a:ext cx="3858480" cy="475200"/>
+            <a:ext cx="3858120" cy="474840"/>
           </a:xfrm>
           <a:prstGeom prst="rect">
             <a:avLst/>
@@ -6448,7 +6830,7 @@
         <p:spPr>
           <a:xfrm>
             <a:off x="457200" y="2532960"/>
-            <a:ext cx="45360" cy="402120"/>
+            <a:ext cx="45000" cy="401760"/>
           </a:xfrm>
           <a:prstGeom prst="rect">
             <a:avLst/>
@@ -6474,6 +6856,11 @@
             <a:noAutofit/>
           </a:bodyPr>
           <a:p>
+            <a:pPr>
+              <a:lnSpc>
+                <a:spcPct val="100000"/>
+              </a:lnSpc>
+            </a:pPr>
             <a:endParaRPr b="0" lang="en-US" sz="1800" spc="-1" strike="noStrike">
               <a:solidFill>
                 <a:srgbClr val="ffffff"/>
@@ -6492,7 +6879,7 @@
         <p:spPr>
           <a:xfrm>
             <a:off x="576000" y="2532960"/>
-            <a:ext cx="3730320" cy="475200"/>
+            <a:ext cx="3729960" cy="474840"/>
           </a:xfrm>
           <a:prstGeom prst="rect">
             <a:avLst/>
@@ -6549,7 +6936,7 @@
         <p:spPr>
           <a:xfrm>
             <a:off x="4663440" y="1417320"/>
-            <a:ext cx="4160160" cy="1663920"/>
+            <a:ext cx="4159800" cy="1663560"/>
           </a:xfrm>
           <a:prstGeom prst="rect">
             <a:avLst/>
@@ -6582,6 +6969,11 @@
             <a:noAutofit/>
           </a:bodyPr>
           <a:p>
+            <a:pPr>
+              <a:lnSpc>
+                <a:spcPct val="100000"/>
+              </a:lnSpc>
+            </a:pPr>
             <a:endParaRPr b="0" lang="en-US" sz="1800" spc="-1" strike="noStrike">
               <a:solidFill>
                 <a:srgbClr val="ffffff"/>
@@ -6600,7 +6992,7 @@
         <p:spPr>
           <a:xfrm>
             <a:off x="4663440" y="1417320"/>
-            <a:ext cx="4160160" cy="54360"/>
+            <a:ext cx="4159800" cy="54000"/>
           </a:xfrm>
           <a:prstGeom prst="rect">
             <a:avLst/>
@@ -6626,6 +7018,11 @@
             <a:noAutofit/>
           </a:bodyPr>
           <a:p>
+            <a:pPr>
+              <a:lnSpc>
+                <a:spcPct val="100000"/>
+              </a:lnSpc>
+            </a:pPr>
             <a:endParaRPr b="0" lang="en-US" sz="1800" spc="-1" strike="noStrike">
               <a:solidFill>
                 <a:srgbClr val="ffffff"/>
@@ -6644,7 +7041,7 @@
         <p:spPr>
           <a:xfrm>
             <a:off x="4800600" y="1508760"/>
-            <a:ext cx="1371240" cy="255600"/>
+            <a:ext cx="1370880" cy="255240"/>
           </a:xfrm>
           <a:prstGeom prst="rect">
             <a:avLst/>
@@ -6701,7 +7098,7 @@
         <p:spPr>
           <a:xfrm>
             <a:off x="7406640" y="1508760"/>
-            <a:ext cx="1279800" cy="255600"/>
+            <a:ext cx="1279440" cy="255240"/>
           </a:xfrm>
           <a:prstGeom prst="rect">
             <a:avLst/>
@@ -6758,7 +7155,7 @@
         <p:spPr>
           <a:xfrm>
             <a:off x="4800600" y="1764720"/>
-            <a:ext cx="3858480" cy="219240"/>
+            <a:ext cx="3858120" cy="218880"/>
           </a:xfrm>
           <a:prstGeom prst="rect">
             <a:avLst/>
@@ -6815,7 +7212,7 @@
         <p:spPr>
           <a:xfrm>
             <a:off x="4800600" y="2002680"/>
-            <a:ext cx="3858480" cy="475200"/>
+            <a:ext cx="3858120" cy="474840"/>
           </a:xfrm>
           <a:prstGeom prst="rect">
             <a:avLst/>
@@ -6872,7 +7269,7 @@
         <p:spPr>
           <a:xfrm>
             <a:off x="4800600" y="2532960"/>
-            <a:ext cx="45360" cy="402120"/>
+            <a:ext cx="45000" cy="401760"/>
           </a:xfrm>
           <a:prstGeom prst="rect">
             <a:avLst/>
@@ -6898,6 +7295,11 @@
             <a:noAutofit/>
           </a:bodyPr>
           <a:p>
+            <a:pPr>
+              <a:lnSpc>
+                <a:spcPct val="100000"/>
+              </a:lnSpc>
+            </a:pPr>
             <a:endParaRPr b="0" lang="en-US" sz="1800" spc="-1" strike="noStrike">
               <a:solidFill>
                 <a:srgbClr val="ffffff"/>
@@ -6916,7 +7318,7 @@
         <p:spPr>
           <a:xfrm>
             <a:off x="4919400" y="2532960"/>
-            <a:ext cx="3730320" cy="475200"/>
+            <a:ext cx="3729960" cy="474840"/>
           </a:xfrm>
           <a:prstGeom prst="rect">
             <a:avLst/>
@@ -6973,7 +7375,7 @@
         <p:spPr>
           <a:xfrm>
             <a:off x="320040" y="3246120"/>
-            <a:ext cx="4160160" cy="1663920"/>
+            <a:ext cx="4159800" cy="1663560"/>
           </a:xfrm>
           <a:prstGeom prst="rect">
             <a:avLst/>
@@ -7006,6 +7408,11 @@
             <a:noAutofit/>
           </a:bodyPr>
           <a:p>
+            <a:pPr>
+              <a:lnSpc>
+                <a:spcPct val="100000"/>
+              </a:lnSpc>
+            </a:pPr>
             <a:endParaRPr b="0" lang="en-US" sz="1800" spc="-1" strike="noStrike">
               <a:solidFill>
                 <a:srgbClr val="ffffff"/>
@@ -7024,7 +7431,7 @@
         <p:spPr>
           <a:xfrm>
             <a:off x="320040" y="3246120"/>
-            <a:ext cx="4160160" cy="54360"/>
+            <a:ext cx="4159800" cy="54000"/>
           </a:xfrm>
           <a:prstGeom prst="rect">
             <a:avLst/>
@@ -7050,6 +7457,11 @@
             <a:noAutofit/>
           </a:bodyPr>
           <a:p>
+            <a:pPr>
+              <a:lnSpc>
+                <a:spcPct val="100000"/>
+              </a:lnSpc>
+            </a:pPr>
             <a:endParaRPr b="0" lang="en-US" sz="1800" spc="-1" strike="noStrike">
               <a:solidFill>
                 <a:srgbClr val="ffffff"/>
@@ -7068,7 +7480,7 @@
         <p:spPr>
           <a:xfrm>
             <a:off x="457200" y="3337560"/>
-            <a:ext cx="1371240" cy="255600"/>
+            <a:ext cx="1370880" cy="255240"/>
           </a:xfrm>
           <a:prstGeom prst="rect">
             <a:avLst/>
@@ -7125,7 +7537,7 @@
         <p:spPr>
           <a:xfrm>
             <a:off x="3063240" y="3337560"/>
-            <a:ext cx="1279800" cy="255600"/>
+            <a:ext cx="1279440" cy="255240"/>
           </a:xfrm>
           <a:prstGeom prst="rect">
             <a:avLst/>
@@ -7182,7 +7594,7 @@
         <p:spPr>
           <a:xfrm>
             <a:off x="457200" y="3593520"/>
-            <a:ext cx="3858480" cy="219240"/>
+            <a:ext cx="3858120" cy="218880"/>
           </a:xfrm>
           <a:prstGeom prst="rect">
             <a:avLst/>
@@ -7239,7 +7651,7 @@
         <p:spPr>
           <a:xfrm>
             <a:off x="457200" y="3831480"/>
-            <a:ext cx="3858480" cy="475200"/>
+            <a:ext cx="3858120" cy="474840"/>
           </a:xfrm>
           <a:prstGeom prst="rect">
             <a:avLst/>
@@ -7296,7 +7708,7 @@
         <p:spPr>
           <a:xfrm>
             <a:off x="457200" y="4361760"/>
-            <a:ext cx="45360" cy="402120"/>
+            <a:ext cx="45000" cy="401760"/>
           </a:xfrm>
           <a:prstGeom prst="rect">
             <a:avLst/>
@@ -7322,6 +7734,11 @@
             <a:noAutofit/>
           </a:bodyPr>
           <a:p>
+            <a:pPr>
+              <a:lnSpc>
+                <a:spcPct val="100000"/>
+              </a:lnSpc>
+            </a:pPr>
             <a:endParaRPr b="0" lang="en-US" sz="1800" spc="-1" strike="noStrike">
               <a:solidFill>
                 <a:srgbClr val="000000"/>
@@ -7340,7 +7757,7 @@
         <p:spPr>
           <a:xfrm>
             <a:off x="576000" y="4361760"/>
-            <a:ext cx="3730320" cy="475200"/>
+            <a:ext cx="3729960" cy="474840"/>
           </a:xfrm>
           <a:prstGeom prst="rect">
             <a:avLst/>
@@ -7397,7 +7814,7 @@
         <p:spPr>
           <a:xfrm>
             <a:off x="4663440" y="3246120"/>
-            <a:ext cx="4160160" cy="1663920"/>
+            <a:ext cx="4159800" cy="1663560"/>
           </a:xfrm>
           <a:prstGeom prst="rect">
             <a:avLst/>
@@ -7430,6 +7847,11 @@
             <a:noAutofit/>
           </a:bodyPr>
           <a:p>
+            <a:pPr>
+              <a:lnSpc>
+                <a:spcPct val="100000"/>
+              </a:lnSpc>
+            </a:pPr>
             <a:endParaRPr b="0" lang="en-US" sz="1800" spc="-1" strike="noStrike">
               <a:solidFill>
                 <a:srgbClr val="ffffff"/>
@@ -7448,7 +7870,7 @@
         <p:spPr>
           <a:xfrm>
             <a:off x="4663440" y="3246120"/>
-            <a:ext cx="4160160" cy="54360"/>
+            <a:ext cx="4159800" cy="54000"/>
           </a:xfrm>
           <a:prstGeom prst="rect">
             <a:avLst/>
@@ -7474,6 +7896,11 @@
             <a:noAutofit/>
           </a:bodyPr>
           <a:p>
+            <a:pPr>
+              <a:lnSpc>
+                <a:spcPct val="100000"/>
+              </a:lnSpc>
+            </a:pPr>
             <a:endParaRPr b="0" lang="en-US" sz="1800" spc="-1" strike="noStrike">
               <a:solidFill>
                 <a:srgbClr val="ffffff"/>
@@ -7492,7 +7919,7 @@
         <p:spPr>
           <a:xfrm>
             <a:off x="4800600" y="3337560"/>
-            <a:ext cx="1371240" cy="255600"/>
+            <a:ext cx="1370880" cy="255240"/>
           </a:xfrm>
           <a:prstGeom prst="rect">
             <a:avLst/>
@@ -7549,7 +7976,7 @@
         <p:spPr>
           <a:xfrm>
             <a:off x="7406640" y="3337560"/>
-            <a:ext cx="1279800" cy="255600"/>
+            <a:ext cx="1279440" cy="255240"/>
           </a:xfrm>
           <a:prstGeom prst="rect">
             <a:avLst/>
@@ -7606,7 +8033,7 @@
         <p:spPr>
           <a:xfrm>
             <a:off x="4800600" y="3593520"/>
-            <a:ext cx="3858480" cy="219240"/>
+            <a:ext cx="3858120" cy="218880"/>
           </a:xfrm>
           <a:prstGeom prst="rect">
             <a:avLst/>
@@ -7663,7 +8090,7 @@
         <p:spPr>
           <a:xfrm>
             <a:off x="4800600" y="3831480"/>
-            <a:ext cx="3858480" cy="475200"/>
+            <a:ext cx="3858120" cy="474840"/>
           </a:xfrm>
           <a:prstGeom prst="rect">
             <a:avLst/>
@@ -7720,7 +8147,7 @@
         <p:spPr>
           <a:xfrm>
             <a:off x="4800600" y="4361760"/>
-            <a:ext cx="45360" cy="402120"/>
+            <a:ext cx="45000" cy="401760"/>
           </a:xfrm>
           <a:prstGeom prst="rect">
             <a:avLst/>
@@ -7746,6 +8173,11 @@
             <a:noAutofit/>
           </a:bodyPr>
           <a:p>
+            <a:pPr>
+              <a:lnSpc>
+                <a:spcPct val="100000"/>
+              </a:lnSpc>
+            </a:pPr>
             <a:endParaRPr b="0" lang="en-US" sz="1800" spc="-1" strike="noStrike">
               <a:solidFill>
                 <a:srgbClr val="ffffff"/>
@@ -7764,7 +8196,7 @@
         <p:spPr>
           <a:xfrm>
             <a:off x="4919400" y="4361760"/>
-            <a:ext cx="3730320" cy="475200"/>
+            <a:ext cx="3729960" cy="474840"/>
           </a:xfrm>
           <a:prstGeom prst="rect">
             <a:avLst/>
@@ -7821,7 +8253,7 @@
         <p:spPr>
           <a:xfrm>
             <a:off x="320040" y="4851360"/>
-            <a:ext cx="8503560" cy="292320"/>
+            <a:ext cx="8503200" cy="291960"/>
           </a:xfrm>
           <a:prstGeom prst="rect">
             <a:avLst/>
@@ -7847,6 +8279,11 @@
             <a:noAutofit/>
           </a:bodyPr>
           <a:p>
+            <a:pPr>
+              <a:lnSpc>
+                <a:spcPct val="100000"/>
+              </a:lnSpc>
+            </a:pPr>
             <a:endParaRPr b="0" lang="en-US" sz="1800" spc="-1" strike="noStrike">
               <a:solidFill>
                 <a:srgbClr val="ffffff"/>
@@ -7865,7 +8302,7 @@
         <p:spPr>
           <a:xfrm>
             <a:off x="457200" y="4800600"/>
-            <a:ext cx="8320680" cy="292320"/>
+            <a:ext cx="8320320" cy="291960"/>
           </a:xfrm>
           <a:prstGeom prst="rect">
             <a:avLst/>
@@ -7969,7 +8406,7 @@
         <p:spPr>
           <a:xfrm>
             <a:off x="320040" y="201240"/>
-            <a:ext cx="63720" cy="566640"/>
+            <a:ext cx="63360" cy="566280"/>
           </a:xfrm>
           <a:prstGeom prst="rect">
             <a:avLst/>
@@ -7995,6 +8432,11 @@
             <a:noAutofit/>
           </a:bodyPr>
           <a:p>
+            <a:pPr>
+              <a:lnSpc>
+                <a:spcPct val="100000"/>
+              </a:lnSpc>
+            </a:pPr>
             <a:endParaRPr b="0" lang="en-US" sz="1800" spc="-1" strike="noStrike">
               <a:solidFill>
                 <a:srgbClr val="ffffff"/>
@@ -8013,7 +8455,7 @@
         <p:spPr>
           <a:xfrm>
             <a:off x="475560" y="164520"/>
-            <a:ext cx="8320680" cy="658080"/>
+            <a:ext cx="8320320" cy="657720"/>
           </a:xfrm>
           <a:prstGeom prst="rect">
             <a:avLst/>
@@ -8113,7 +8555,7 @@
         <p:spPr>
           <a:xfrm>
             <a:off x="320040" y="987480"/>
-            <a:ext cx="5120280" cy="694440"/>
+            <a:ext cx="5119920" cy="694080"/>
           </a:xfrm>
           <a:prstGeom prst="rect">
             <a:avLst/>
@@ -8146,6 +8588,11 @@
             <a:noAutofit/>
           </a:bodyPr>
           <a:p>
+            <a:pPr>
+              <a:lnSpc>
+                <a:spcPct val="100000"/>
+              </a:lnSpc>
+            </a:pPr>
             <a:endParaRPr b="0" lang="en-US" sz="1800" spc="-1" strike="noStrike">
               <a:solidFill>
                 <a:srgbClr val="ffffff"/>
@@ -8164,7 +8611,7 @@
         <p:spPr>
           <a:xfrm>
             <a:off x="320040" y="987480"/>
-            <a:ext cx="54360" cy="694440"/>
+            <a:ext cx="54000" cy="694080"/>
           </a:xfrm>
           <a:prstGeom prst="rect">
             <a:avLst/>
@@ -8190,6 +8637,11 @@
             <a:noAutofit/>
           </a:bodyPr>
           <a:p>
+            <a:pPr>
+              <a:lnSpc>
+                <a:spcPct val="100000"/>
+              </a:lnSpc>
+            </a:pPr>
             <a:endParaRPr b="0" lang="en-US" sz="1800" spc="-1" strike="noStrike">
               <a:solidFill>
                 <a:srgbClr val="ffffff"/>
@@ -8208,7 +8660,7 @@
         <p:spPr>
           <a:xfrm>
             <a:off x="457200" y="1106280"/>
-            <a:ext cx="776880" cy="328680"/>
+            <a:ext cx="776520" cy="328320"/>
           </a:xfrm>
           <a:prstGeom prst="rect">
             <a:avLst/>
@@ -8236,6 +8688,11 @@
             <a:noAutofit/>
           </a:bodyPr>
           <a:p>
+            <a:pPr>
+              <a:lnSpc>
+                <a:spcPct val="100000"/>
+              </a:lnSpc>
+            </a:pPr>
             <a:endParaRPr b="0" lang="en-US" sz="1800" spc="-1" strike="noStrike">
               <a:solidFill>
                 <a:srgbClr val="ffffff"/>
@@ -8254,7 +8711,7 @@
         <p:spPr>
           <a:xfrm>
             <a:off x="457200" y="1106280"/>
-            <a:ext cx="776880" cy="328680"/>
+            <a:ext cx="776520" cy="328320"/>
           </a:xfrm>
           <a:prstGeom prst="rect">
             <a:avLst/>
@@ -8311,7 +8768,7 @@
         <p:spPr>
           <a:xfrm>
             <a:off x="1353240" y="1051560"/>
-            <a:ext cx="3931560" cy="255600"/>
+            <a:ext cx="3931200" cy="255240"/>
           </a:xfrm>
           <a:prstGeom prst="rect">
             <a:avLst/>
@@ -8368,7 +8825,7 @@
         <p:spPr>
           <a:xfrm>
             <a:off x="1353240" y="1325880"/>
-            <a:ext cx="3931560" cy="273960"/>
+            <a:ext cx="3931200" cy="273600"/>
           </a:xfrm>
           <a:prstGeom prst="rect">
             <a:avLst/>
@@ -8425,7 +8882,7 @@
         <p:spPr>
           <a:xfrm>
             <a:off x="320040" y="1792080"/>
-            <a:ext cx="5120280" cy="694440"/>
+            <a:ext cx="5119920" cy="694080"/>
           </a:xfrm>
           <a:prstGeom prst="rect">
             <a:avLst/>
@@ -8458,6 +8915,11 @@
             <a:noAutofit/>
           </a:bodyPr>
           <a:p>
+            <a:pPr>
+              <a:lnSpc>
+                <a:spcPct val="100000"/>
+              </a:lnSpc>
+            </a:pPr>
             <a:endParaRPr b="0" lang="en-US" sz="1800" spc="-1" strike="noStrike">
               <a:solidFill>
                 <a:srgbClr val="ffffff"/>
@@ -8476,7 +8938,7 @@
         <p:spPr>
           <a:xfrm>
             <a:off x="320040" y="1792080"/>
-            <a:ext cx="54360" cy="694440"/>
+            <a:ext cx="54000" cy="694080"/>
           </a:xfrm>
           <a:prstGeom prst="rect">
             <a:avLst/>
@@ -8502,6 +8964,11 @@
             <a:noAutofit/>
           </a:bodyPr>
           <a:p>
+            <a:pPr>
+              <a:lnSpc>
+                <a:spcPct val="100000"/>
+              </a:lnSpc>
+            </a:pPr>
             <a:endParaRPr b="0" lang="en-US" sz="1800" spc="-1" strike="noStrike">
               <a:solidFill>
                 <a:srgbClr val="ffffff"/>
@@ -8520,7 +8987,7 @@
         <p:spPr>
           <a:xfrm>
             <a:off x="457200" y="1911240"/>
-            <a:ext cx="776880" cy="328680"/>
+            <a:ext cx="776520" cy="328320"/>
           </a:xfrm>
           <a:prstGeom prst="rect">
             <a:avLst/>
@@ -8548,6 +9015,11 @@
             <a:noAutofit/>
           </a:bodyPr>
           <a:p>
+            <a:pPr>
+              <a:lnSpc>
+                <a:spcPct val="100000"/>
+              </a:lnSpc>
+            </a:pPr>
             <a:endParaRPr b="0" lang="en-US" sz="1800" spc="-1" strike="noStrike">
               <a:solidFill>
                 <a:srgbClr val="ffffff"/>
@@ -8566,7 +9038,7 @@
         <p:spPr>
           <a:xfrm>
             <a:off x="457200" y="1911240"/>
-            <a:ext cx="776880" cy="328680"/>
+            <a:ext cx="776520" cy="328320"/>
           </a:xfrm>
           <a:prstGeom prst="rect">
             <a:avLst/>
@@ -8623,7 +9095,7 @@
         <p:spPr>
           <a:xfrm>
             <a:off x="1353240" y="1856160"/>
-            <a:ext cx="3931560" cy="255600"/>
+            <a:ext cx="3931200" cy="255240"/>
           </a:xfrm>
           <a:prstGeom prst="rect">
             <a:avLst/>
@@ -8680,7 +9152,7 @@
         <p:spPr>
           <a:xfrm>
             <a:off x="1353240" y="2130480"/>
-            <a:ext cx="3931560" cy="273960"/>
+            <a:ext cx="3931200" cy="273600"/>
           </a:xfrm>
           <a:prstGeom prst="rect">
             <a:avLst/>
@@ -8737,7 +9209,7 @@
         <p:spPr>
           <a:xfrm>
             <a:off x="320040" y="2597040"/>
-            <a:ext cx="5120280" cy="694440"/>
+            <a:ext cx="5119920" cy="694080"/>
           </a:xfrm>
           <a:prstGeom prst="rect">
             <a:avLst/>
@@ -8770,6 +9242,11 @@
             <a:noAutofit/>
           </a:bodyPr>
           <a:p>
+            <a:pPr>
+              <a:lnSpc>
+                <a:spcPct val="100000"/>
+              </a:lnSpc>
+            </a:pPr>
             <a:endParaRPr b="0" lang="en-US" sz="1800" spc="-1" strike="noStrike">
               <a:solidFill>
                 <a:srgbClr val="ffffff"/>
@@ -8788,7 +9265,7 @@
         <p:spPr>
           <a:xfrm>
             <a:off x="320040" y="2597040"/>
-            <a:ext cx="54360" cy="694440"/>
+            <a:ext cx="54000" cy="694080"/>
           </a:xfrm>
           <a:prstGeom prst="rect">
             <a:avLst/>
@@ -8814,6 +9291,11 @@
             <a:noAutofit/>
           </a:bodyPr>
           <a:p>
+            <a:pPr>
+              <a:lnSpc>
+                <a:spcPct val="100000"/>
+              </a:lnSpc>
+            </a:pPr>
             <a:endParaRPr b="0" lang="en-US" sz="1800" spc="-1" strike="noStrike">
               <a:solidFill>
                 <a:srgbClr val="000000"/>
@@ -8832,7 +9314,7 @@
         <p:spPr>
           <a:xfrm>
             <a:off x="457200" y="2715840"/>
-            <a:ext cx="776880" cy="328680"/>
+            <a:ext cx="776520" cy="328320"/>
           </a:xfrm>
           <a:prstGeom prst="rect">
             <a:avLst/>
@@ -8860,6 +9342,11 @@
             <a:noAutofit/>
           </a:bodyPr>
           <a:p>
+            <a:pPr>
+              <a:lnSpc>
+                <a:spcPct val="100000"/>
+              </a:lnSpc>
+            </a:pPr>
             <a:endParaRPr b="0" lang="en-US" sz="1800" spc="-1" strike="noStrike">
               <a:solidFill>
                 <a:srgbClr val="000000"/>
@@ -8878,7 +9365,7 @@
         <p:spPr>
           <a:xfrm>
             <a:off x="457200" y="2715840"/>
-            <a:ext cx="776880" cy="328680"/>
+            <a:ext cx="776520" cy="328320"/>
           </a:xfrm>
           <a:prstGeom prst="rect">
             <a:avLst/>
@@ -8935,7 +9422,7 @@
         <p:spPr>
           <a:xfrm>
             <a:off x="1353240" y="2660760"/>
-            <a:ext cx="3931560" cy="255600"/>
+            <a:ext cx="3931200" cy="255240"/>
           </a:xfrm>
           <a:prstGeom prst="rect">
             <a:avLst/>
@@ -8992,7 +9479,7 @@
         <p:spPr>
           <a:xfrm>
             <a:off x="1353240" y="2935080"/>
-            <a:ext cx="3931560" cy="273960"/>
+            <a:ext cx="3931200" cy="273600"/>
           </a:xfrm>
           <a:prstGeom prst="rect">
             <a:avLst/>
@@ -9049,7 +9536,7 @@
         <p:spPr>
           <a:xfrm>
             <a:off x="320040" y="3401640"/>
-            <a:ext cx="5120280" cy="694440"/>
+            <a:ext cx="5119920" cy="694080"/>
           </a:xfrm>
           <a:prstGeom prst="rect">
             <a:avLst/>
@@ -9082,6 +9569,11 @@
             <a:noAutofit/>
           </a:bodyPr>
           <a:p>
+            <a:pPr>
+              <a:lnSpc>
+                <a:spcPct val="100000"/>
+              </a:lnSpc>
+            </a:pPr>
             <a:endParaRPr b="0" lang="en-US" sz="1800" spc="-1" strike="noStrike">
               <a:solidFill>
                 <a:srgbClr val="ffffff"/>
@@ -9100,7 +9592,7 @@
         <p:spPr>
           <a:xfrm>
             <a:off x="320040" y="3401640"/>
-            <a:ext cx="54360" cy="694440"/>
+            <a:ext cx="54000" cy="694080"/>
           </a:xfrm>
           <a:prstGeom prst="rect">
             <a:avLst/>
@@ -9126,6 +9618,11 @@
             <a:noAutofit/>
           </a:bodyPr>
           <a:p>
+            <a:pPr>
+              <a:lnSpc>
+                <a:spcPct val="100000"/>
+              </a:lnSpc>
+            </a:pPr>
             <a:endParaRPr b="0" lang="en-US" sz="1800" spc="-1" strike="noStrike">
               <a:solidFill>
                 <a:srgbClr val="ffffff"/>
@@ -9144,7 +9641,7 @@
         <p:spPr>
           <a:xfrm>
             <a:off x="457200" y="3520440"/>
-            <a:ext cx="776880" cy="328680"/>
+            <a:ext cx="776520" cy="328320"/>
           </a:xfrm>
           <a:prstGeom prst="rect">
             <a:avLst/>
@@ -9172,6 +9669,11 @@
             <a:noAutofit/>
           </a:bodyPr>
           <a:p>
+            <a:pPr>
+              <a:lnSpc>
+                <a:spcPct val="100000"/>
+              </a:lnSpc>
+            </a:pPr>
             <a:endParaRPr b="0" lang="en-US" sz="1800" spc="-1" strike="noStrike">
               <a:solidFill>
                 <a:srgbClr val="ffffff"/>
@@ -9190,7 +9692,7 @@
         <p:spPr>
           <a:xfrm>
             <a:off x="457200" y="3520440"/>
-            <a:ext cx="776880" cy="328680"/>
+            <a:ext cx="776520" cy="328320"/>
           </a:xfrm>
           <a:prstGeom prst="rect">
             <a:avLst/>
@@ -9247,7 +9749,7 @@
         <p:spPr>
           <a:xfrm>
             <a:off x="1353240" y="3465720"/>
-            <a:ext cx="3931560" cy="255600"/>
+            <a:ext cx="3931200" cy="255240"/>
           </a:xfrm>
           <a:prstGeom prst="rect">
             <a:avLst/>
@@ -9304,7 +9806,7 @@
         <p:spPr>
           <a:xfrm>
             <a:off x="1353240" y="3740040"/>
-            <a:ext cx="3931560" cy="273960"/>
+            <a:ext cx="3931200" cy="273600"/>
           </a:xfrm>
           <a:prstGeom prst="rect">
             <a:avLst/>
@@ -9361,7 +9863,7 @@
         <p:spPr>
           <a:xfrm>
             <a:off x="320040" y="4206240"/>
-            <a:ext cx="5120280" cy="694440"/>
+            <a:ext cx="5119920" cy="694080"/>
           </a:xfrm>
           <a:prstGeom prst="rect">
             <a:avLst/>
@@ -9394,6 +9896,11 @@
             <a:noAutofit/>
           </a:bodyPr>
           <a:p>
+            <a:pPr>
+              <a:lnSpc>
+                <a:spcPct val="100000"/>
+              </a:lnSpc>
+            </a:pPr>
             <a:endParaRPr b="0" lang="en-US" sz="1800" spc="-1" strike="noStrike">
               <a:solidFill>
                 <a:srgbClr val="ffffff"/>
@@ -9412,7 +9919,7 @@
         <p:spPr>
           <a:xfrm>
             <a:off x="320040" y="4206240"/>
-            <a:ext cx="54360" cy="694440"/>
+            <a:ext cx="54000" cy="694080"/>
           </a:xfrm>
           <a:prstGeom prst="rect">
             <a:avLst/>
@@ -9438,6 +9945,11 @@
             <a:noAutofit/>
           </a:bodyPr>
           <a:p>
+            <a:pPr>
+              <a:lnSpc>
+                <a:spcPct val="100000"/>
+              </a:lnSpc>
+            </a:pPr>
             <a:endParaRPr b="0" lang="en-US" sz="1800" spc="-1" strike="noStrike">
               <a:solidFill>
                 <a:srgbClr val="ffffff"/>
@@ -9456,7 +9968,7 @@
         <p:spPr>
           <a:xfrm>
             <a:off x="457200" y="4325040"/>
-            <a:ext cx="776880" cy="328680"/>
+            <a:ext cx="776520" cy="328320"/>
           </a:xfrm>
           <a:prstGeom prst="rect">
             <a:avLst/>
@@ -9484,6 +9996,11 @@
             <a:noAutofit/>
           </a:bodyPr>
           <a:p>
+            <a:pPr>
+              <a:lnSpc>
+                <a:spcPct val="100000"/>
+              </a:lnSpc>
+            </a:pPr>
             <a:endParaRPr b="0" lang="en-US" sz="1800" spc="-1" strike="noStrike">
               <a:solidFill>
                 <a:srgbClr val="ffffff"/>
@@ -9502,7 +10019,7 @@
         <p:spPr>
           <a:xfrm>
             <a:off x="457200" y="4325040"/>
-            <a:ext cx="776880" cy="328680"/>
+            <a:ext cx="776520" cy="328320"/>
           </a:xfrm>
           <a:prstGeom prst="rect">
             <a:avLst/>
@@ -9559,7 +10076,7 @@
         <p:spPr>
           <a:xfrm>
             <a:off x="1353240" y="4270320"/>
-            <a:ext cx="3931560" cy="255600"/>
+            <a:ext cx="3931200" cy="255240"/>
           </a:xfrm>
           <a:prstGeom prst="rect">
             <a:avLst/>
@@ -9616,7 +10133,7 @@
         <p:spPr>
           <a:xfrm>
             <a:off x="1353240" y="4544640"/>
-            <a:ext cx="3931560" cy="273960"/>
+            <a:ext cx="3931200" cy="273600"/>
           </a:xfrm>
           <a:prstGeom prst="rect">
             <a:avLst/>
@@ -9673,7 +10190,7 @@
         <p:spPr>
           <a:xfrm>
             <a:off x="5669280" y="987480"/>
-            <a:ext cx="3154320" cy="2450160"/>
+            <a:ext cx="3153960" cy="2449800"/>
           </a:xfrm>
           <a:prstGeom prst="rect">
             <a:avLst/>
@@ -9706,6 +10223,11 @@
             <a:noAutofit/>
           </a:bodyPr>
           <a:p>
+            <a:pPr>
+              <a:lnSpc>
+                <a:spcPct val="100000"/>
+              </a:lnSpc>
+            </a:pPr>
             <a:endParaRPr b="0" lang="en-US" sz="1800" spc="-1" strike="noStrike">
               <a:solidFill>
                 <a:srgbClr val="ffffff"/>
@@ -9724,7 +10246,7 @@
         <p:spPr>
           <a:xfrm>
             <a:off x="5669280" y="987480"/>
-            <a:ext cx="3154320" cy="54360"/>
+            <a:ext cx="3153960" cy="54000"/>
           </a:xfrm>
           <a:prstGeom prst="rect">
             <a:avLst/>
@@ -9750,6 +10272,11 @@
             <a:noAutofit/>
           </a:bodyPr>
           <a:p>
+            <a:pPr>
+              <a:lnSpc>
+                <a:spcPct val="100000"/>
+              </a:lnSpc>
+            </a:pPr>
             <a:endParaRPr b="0" lang="en-US" sz="1800" spc="-1" strike="noStrike">
               <a:solidFill>
                 <a:srgbClr val="ffffff"/>
@@ -9768,7 +10295,7 @@
         <p:spPr>
           <a:xfrm>
             <a:off x="5806440" y="1078920"/>
-            <a:ext cx="2880000" cy="255600"/>
+            <a:ext cx="2879640" cy="255240"/>
           </a:xfrm>
           <a:prstGeom prst="rect">
             <a:avLst/>
@@ -9825,7 +10352,7 @@
         <p:spPr>
           <a:xfrm>
             <a:off x="5779080" y="1389960"/>
-            <a:ext cx="2944080" cy="347040"/>
+            <a:ext cx="2943720" cy="346680"/>
           </a:xfrm>
           <a:prstGeom prst="rect">
             <a:avLst/>
@@ -9882,7 +10409,7 @@
         <p:spPr>
           <a:xfrm>
             <a:off x="5779080" y="1774080"/>
-            <a:ext cx="2944080" cy="347040"/>
+            <a:ext cx="2943720" cy="346680"/>
           </a:xfrm>
           <a:prstGeom prst="rect">
             <a:avLst/>
@@ -9939,7 +10466,7 @@
         <p:spPr>
           <a:xfrm>
             <a:off x="5779080" y="2157840"/>
-            <a:ext cx="2944080" cy="347040"/>
+            <a:ext cx="2943720" cy="346680"/>
           </a:xfrm>
           <a:prstGeom prst="rect">
             <a:avLst/>
@@ -9996,7 +10523,7 @@
         <p:spPr>
           <a:xfrm>
             <a:off x="5779080" y="2541960"/>
-            <a:ext cx="2944080" cy="347040"/>
+            <a:ext cx="2943720" cy="346680"/>
           </a:xfrm>
           <a:prstGeom prst="rect">
             <a:avLst/>
@@ -10053,7 +10580,7 @@
         <p:spPr>
           <a:xfrm>
             <a:off x="5779080" y="2926080"/>
-            <a:ext cx="2944080" cy="347040"/>
+            <a:ext cx="2943720" cy="346680"/>
           </a:xfrm>
           <a:prstGeom prst="rect">
             <a:avLst/>
@@ -10110,7 +10637,7 @@
         <p:spPr>
           <a:xfrm>
             <a:off x="5669280" y="3547800"/>
-            <a:ext cx="3154320" cy="1352880"/>
+            <a:ext cx="3153960" cy="1352520"/>
           </a:xfrm>
           <a:prstGeom prst="rect">
             <a:avLst/>
@@ -10143,6 +10670,11 @@
             <a:noAutofit/>
           </a:bodyPr>
           <a:p>
+            <a:pPr>
+              <a:lnSpc>
+                <a:spcPct val="100000"/>
+              </a:lnSpc>
+            </a:pPr>
             <a:endParaRPr b="0" lang="en-US" sz="1800" spc="-1" strike="noStrike">
               <a:solidFill>
                 <a:srgbClr val="ffffff"/>
@@ -10161,7 +10693,7 @@
         <p:spPr>
           <a:xfrm>
             <a:off x="5669280" y="3547800"/>
-            <a:ext cx="3154320" cy="54360"/>
+            <a:ext cx="3153960" cy="54000"/>
           </a:xfrm>
           <a:prstGeom prst="rect">
             <a:avLst/>
@@ -10187,6 +10719,11 @@
             <a:noAutofit/>
           </a:bodyPr>
           <a:p>
+            <a:pPr>
+              <a:lnSpc>
+                <a:spcPct val="100000"/>
+              </a:lnSpc>
+            </a:pPr>
             <a:endParaRPr b="0" lang="en-US" sz="1800" spc="-1" strike="noStrike">
               <a:solidFill>
                 <a:srgbClr val="000000"/>
@@ -10205,7 +10742,7 @@
         <p:spPr>
           <a:xfrm>
             <a:off x="5806440" y="3639240"/>
-            <a:ext cx="2880000" cy="255600"/>
+            <a:ext cx="2879640" cy="255240"/>
           </a:xfrm>
           <a:prstGeom prst="rect">
             <a:avLst/>
@@ -10262,7 +10799,7 @@
         <p:spPr>
           <a:xfrm>
             <a:off x="5779080" y="3950280"/>
-            <a:ext cx="2944080" cy="219240"/>
+            <a:ext cx="2943720" cy="218880"/>
           </a:xfrm>
           <a:prstGeom prst="rect">
             <a:avLst/>
@@ -10329,7 +10866,7 @@
         <p:spPr>
           <a:xfrm>
             <a:off x="5779080" y="4187880"/>
-            <a:ext cx="2944080" cy="219240"/>
+            <a:ext cx="2943720" cy="218880"/>
           </a:xfrm>
           <a:prstGeom prst="rect">
             <a:avLst/>
@@ -10396,7 +10933,7 @@
         <p:spPr>
           <a:xfrm>
             <a:off x="5779080" y="4425840"/>
-            <a:ext cx="2944080" cy="219240"/>
+            <a:ext cx="2943720" cy="218880"/>
           </a:xfrm>
           <a:prstGeom prst="rect">
             <a:avLst/>
@@ -10463,7 +11000,7 @@
         <p:spPr>
           <a:xfrm>
             <a:off x="5779080" y="4663440"/>
-            <a:ext cx="2944080" cy="219240"/>
+            <a:ext cx="2943720" cy="218880"/>
           </a:xfrm>
           <a:prstGeom prst="rect">
             <a:avLst/>
@@ -10567,7 +11104,7 @@
         <p:spPr>
           <a:xfrm>
             <a:off x="320040" y="201240"/>
-            <a:ext cx="63720" cy="566640"/>
+            <a:ext cx="63360" cy="566280"/>
           </a:xfrm>
           <a:prstGeom prst="rect">
             <a:avLst/>
@@ -10593,6 +11130,11 @@
             <a:noAutofit/>
           </a:bodyPr>
           <a:p>
+            <a:pPr>
+              <a:lnSpc>
+                <a:spcPct val="100000"/>
+              </a:lnSpc>
+            </a:pPr>
             <a:endParaRPr b="0" lang="en-US" sz="1800" spc="-1" strike="noStrike">
               <a:solidFill>
                 <a:srgbClr val="ffffff"/>
@@ -10611,7 +11153,7 @@
         <p:spPr>
           <a:xfrm>
             <a:off x="475560" y="164520"/>
-            <a:ext cx="8320680" cy="658080"/>
+            <a:ext cx="8320320" cy="657720"/>
           </a:xfrm>
           <a:prstGeom prst="rect">
             <a:avLst/>
@@ -10711,7 +11253,7 @@
         <p:spPr>
           <a:xfrm>
             <a:off x="7223760" y="201240"/>
-            <a:ext cx="1645560" cy="383760"/>
+            <a:ext cx="1645200" cy="383400"/>
           </a:xfrm>
           <a:prstGeom prst="rect">
             <a:avLst/>
@@ -10758,7 +11300,7 @@
         <p:spPr>
           <a:xfrm>
             <a:off x="320040" y="960120"/>
-            <a:ext cx="4205880" cy="3382920"/>
+            <a:ext cx="4205520" cy="3382560"/>
           </a:xfrm>
           <a:prstGeom prst="rect">
             <a:avLst/>
@@ -10791,6 +11333,11 @@
             <a:noAutofit/>
           </a:bodyPr>
           <a:p>
+            <a:pPr>
+              <a:lnSpc>
+                <a:spcPct val="100000"/>
+              </a:lnSpc>
+            </a:pPr>
             <a:endParaRPr b="0" lang="en-US" sz="1800" spc="-1" strike="noStrike">
               <a:solidFill>
                 <a:srgbClr val="ffffff"/>
@@ -10809,7 +11356,7 @@
         <p:spPr>
           <a:xfrm>
             <a:off x="457200" y="1024200"/>
-            <a:ext cx="3931560" cy="292320"/>
+            <a:ext cx="3931200" cy="291960"/>
           </a:xfrm>
           <a:prstGeom prst="rect">
             <a:avLst/>
@@ -10866,7 +11413,7 @@
         <p:spPr>
           <a:xfrm>
             <a:off x="457200" y="1353240"/>
-            <a:ext cx="1691280" cy="255600"/>
+            <a:ext cx="1690920" cy="255240"/>
           </a:xfrm>
           <a:prstGeom prst="rect">
             <a:avLst/>
@@ -10923,7 +11470,7 @@
         <p:spPr>
           <a:xfrm>
             <a:off x="2194560" y="1353240"/>
-            <a:ext cx="1508400" cy="255600"/>
+            <a:ext cx="1508040" cy="255240"/>
           </a:xfrm>
           <a:prstGeom prst="rect">
             <a:avLst/>
@@ -10980,7 +11527,7 @@
         <p:spPr>
           <a:xfrm>
             <a:off x="3749040" y="1353240"/>
-            <a:ext cx="502560" cy="255600"/>
+            <a:ext cx="502200" cy="255240"/>
           </a:xfrm>
           <a:prstGeom prst="rect">
             <a:avLst/>
@@ -11027,7 +11574,7 @@
         <p:spPr>
           <a:xfrm>
             <a:off x="384120" y="1627560"/>
-            <a:ext cx="4087080" cy="438480"/>
+            <a:ext cx="4086720" cy="438120"/>
           </a:xfrm>
           <a:prstGeom prst="rect">
             <a:avLst/>
@@ -11053,6 +11600,11 @@
             <a:noAutofit/>
           </a:bodyPr>
           <a:p>
+            <a:pPr>
+              <a:lnSpc>
+                <a:spcPct val="100000"/>
+              </a:lnSpc>
+            </a:pPr>
             <a:endParaRPr b="0" lang="en-US" sz="1800" spc="-1" strike="noStrike">
               <a:solidFill>
                 <a:srgbClr val="ffffff"/>
@@ -11071,7 +11623,7 @@
         <p:spPr>
           <a:xfrm>
             <a:off x="457200" y="1664280"/>
-            <a:ext cx="1691280" cy="347040"/>
+            <a:ext cx="1690920" cy="346680"/>
           </a:xfrm>
           <a:prstGeom prst="rect">
             <a:avLst/>
@@ -11128,7 +11680,7 @@
         <p:spPr>
           <a:xfrm>
             <a:off x="2194560" y="1664280"/>
-            <a:ext cx="1508400" cy="347040"/>
+            <a:ext cx="1508040" cy="346680"/>
           </a:xfrm>
           <a:prstGeom prst="rect">
             <a:avLst/>
@@ -11185,7 +11737,7 @@
         <p:spPr>
           <a:xfrm>
             <a:off x="3749040" y="1664280"/>
-            <a:ext cx="502560" cy="347040"/>
+            <a:ext cx="502200" cy="346680"/>
           </a:xfrm>
           <a:prstGeom prst="rect">
             <a:avLst/>
@@ -11242,7 +11794,7 @@
         <p:spPr>
           <a:xfrm>
             <a:off x="384120" y="2112120"/>
-            <a:ext cx="4087080" cy="438480"/>
+            <a:ext cx="4086720" cy="438120"/>
           </a:xfrm>
           <a:prstGeom prst="rect">
             <a:avLst/>
@@ -11268,6 +11820,11 @@
             <a:noAutofit/>
           </a:bodyPr>
           <a:p>
+            <a:pPr>
+              <a:lnSpc>
+                <a:spcPct val="100000"/>
+              </a:lnSpc>
+            </a:pPr>
             <a:endParaRPr b="0" lang="en-US" sz="1800" spc="-1" strike="noStrike">
               <a:solidFill>
                 <a:srgbClr val="ffffff"/>
@@ -11286,7 +11843,7 @@
         <p:spPr>
           <a:xfrm>
             <a:off x="457200" y="2148840"/>
-            <a:ext cx="1691280" cy="347040"/>
+            <a:ext cx="1690920" cy="346680"/>
           </a:xfrm>
           <a:prstGeom prst="rect">
             <a:avLst/>
@@ -11343,7 +11900,7 @@
         <p:spPr>
           <a:xfrm>
             <a:off x="2194560" y="2148840"/>
-            <a:ext cx="1508400" cy="347040"/>
+            <a:ext cx="1508040" cy="346680"/>
           </a:xfrm>
           <a:prstGeom prst="rect">
             <a:avLst/>
@@ -11400,7 +11957,7 @@
         <p:spPr>
           <a:xfrm>
             <a:off x="3749040" y="2148840"/>
-            <a:ext cx="502560" cy="347040"/>
+            <a:ext cx="502200" cy="346680"/>
           </a:xfrm>
           <a:prstGeom prst="rect">
             <a:avLst/>
@@ -11457,7 +12014,7 @@
         <p:spPr>
           <a:xfrm>
             <a:off x="384120" y="2597040"/>
-            <a:ext cx="4087080" cy="438480"/>
+            <a:ext cx="4086720" cy="438120"/>
           </a:xfrm>
           <a:prstGeom prst="rect">
             <a:avLst/>
@@ -11483,6 +12040,11 @@
             <a:noAutofit/>
           </a:bodyPr>
           <a:p>
+            <a:pPr>
+              <a:lnSpc>
+                <a:spcPct val="100000"/>
+              </a:lnSpc>
+            </a:pPr>
             <a:endParaRPr b="0" lang="en-US" sz="1800" spc="-1" strike="noStrike">
               <a:solidFill>
                 <a:srgbClr val="ffffff"/>
@@ -11501,7 +12063,7 @@
         <p:spPr>
           <a:xfrm>
             <a:off x="457200" y="2633400"/>
-            <a:ext cx="1691280" cy="347040"/>
+            <a:ext cx="1690920" cy="346680"/>
           </a:xfrm>
           <a:prstGeom prst="rect">
             <a:avLst/>
@@ -11558,7 +12120,7 @@
         <p:spPr>
           <a:xfrm>
             <a:off x="2194560" y="2633400"/>
-            <a:ext cx="1508400" cy="347040"/>
+            <a:ext cx="1508040" cy="346680"/>
           </a:xfrm>
           <a:prstGeom prst="rect">
             <a:avLst/>
@@ -11615,7 +12177,7 @@
         <p:spPr>
           <a:xfrm>
             <a:off x="3749040" y="2633400"/>
-            <a:ext cx="502560" cy="347040"/>
+            <a:ext cx="502200" cy="346680"/>
           </a:xfrm>
           <a:prstGeom prst="rect">
             <a:avLst/>
@@ -11672,7 +12234,7 @@
         <p:spPr>
           <a:xfrm>
             <a:off x="384120" y="3081600"/>
-            <a:ext cx="4087080" cy="438480"/>
+            <a:ext cx="4086720" cy="438120"/>
           </a:xfrm>
           <a:prstGeom prst="rect">
             <a:avLst/>
@@ -11698,6 +12260,11 @@
             <a:noAutofit/>
           </a:bodyPr>
           <a:p>
+            <a:pPr>
+              <a:lnSpc>
+                <a:spcPct val="100000"/>
+              </a:lnSpc>
+            </a:pPr>
             <a:endParaRPr b="0" lang="en-US" sz="1800" spc="-1" strike="noStrike">
               <a:solidFill>
                 <a:srgbClr val="ffffff"/>
@@ -11716,7 +12283,7 @@
         <p:spPr>
           <a:xfrm>
             <a:off x="457200" y="3117960"/>
-            <a:ext cx="1691280" cy="347040"/>
+            <a:ext cx="1690920" cy="346680"/>
           </a:xfrm>
           <a:prstGeom prst="rect">
             <a:avLst/>
@@ -11773,7 +12340,7 @@
         <p:spPr>
           <a:xfrm>
             <a:off x="2194560" y="3117960"/>
-            <a:ext cx="1508400" cy="347040"/>
+            <a:ext cx="1508040" cy="346680"/>
           </a:xfrm>
           <a:prstGeom prst="rect">
             <a:avLst/>
@@ -11830,7 +12397,7 @@
         <p:spPr>
           <a:xfrm>
             <a:off x="3749040" y="3117960"/>
-            <a:ext cx="502560" cy="347040"/>
+            <a:ext cx="502200" cy="346680"/>
           </a:xfrm>
           <a:prstGeom prst="rect">
             <a:avLst/>
@@ -11887,7 +12454,7 @@
         <p:spPr>
           <a:xfrm>
             <a:off x="384120" y="3566160"/>
-            <a:ext cx="4087080" cy="438480"/>
+            <a:ext cx="4086720" cy="438120"/>
           </a:xfrm>
           <a:prstGeom prst="rect">
             <a:avLst/>
@@ -11913,6 +12480,11 @@
             <a:noAutofit/>
           </a:bodyPr>
           <a:p>
+            <a:pPr>
+              <a:lnSpc>
+                <a:spcPct val="100000"/>
+              </a:lnSpc>
+            </a:pPr>
             <a:endParaRPr b="0" lang="en-US" sz="1800" spc="-1" strike="noStrike">
               <a:solidFill>
                 <a:srgbClr val="ffffff"/>
@@ -11931,7 +12503,7 @@
         <p:spPr>
           <a:xfrm>
             <a:off x="457200" y="3602880"/>
-            <a:ext cx="1691280" cy="347040"/>
+            <a:ext cx="1690920" cy="346680"/>
           </a:xfrm>
           <a:prstGeom prst="rect">
             <a:avLst/>
@@ -11988,7 +12560,7 @@
         <p:spPr>
           <a:xfrm>
             <a:off x="2194560" y="3602880"/>
-            <a:ext cx="1508400" cy="347040"/>
+            <a:ext cx="1508040" cy="346680"/>
           </a:xfrm>
           <a:prstGeom prst="rect">
             <a:avLst/>
@@ -12045,7 +12617,7 @@
         <p:spPr>
           <a:xfrm>
             <a:off x="3749040" y="3602880"/>
-            <a:ext cx="502560" cy="347040"/>
+            <a:ext cx="502200" cy="346680"/>
           </a:xfrm>
           <a:prstGeom prst="rect">
             <a:avLst/>
@@ -12102,7 +12674,7 @@
         <p:spPr>
           <a:xfrm>
             <a:off x="384120" y="4114800"/>
-            <a:ext cx="4087080" cy="182520"/>
+            <a:ext cx="4086720" cy="182160"/>
           </a:xfrm>
           <a:prstGeom prst="rect">
             <a:avLst/>
@@ -12132,6 +12704,11 @@
             <a:noAutofit/>
           </a:bodyPr>
           <a:p>
+            <a:pPr>
+              <a:lnSpc>
+                <a:spcPct val="100000"/>
+              </a:lnSpc>
+            </a:pPr>
             <a:endParaRPr b="0" lang="en-US" sz="1800" spc="-1" strike="noStrike">
               <a:solidFill>
                 <a:srgbClr val="ffffff"/>
@@ -12150,7 +12727,7 @@
         <p:spPr>
           <a:xfrm>
             <a:off x="457200" y="4114800"/>
-            <a:ext cx="3931560" cy="255600"/>
+            <a:ext cx="3931200" cy="255240"/>
           </a:xfrm>
           <a:prstGeom prst="rect">
             <a:avLst/>
@@ -12207,7 +12784,7 @@
         <p:spPr>
           <a:xfrm>
             <a:off x="4709160" y="960120"/>
-            <a:ext cx="4114440" cy="1965600"/>
+            <a:ext cx="4114080" cy="1965240"/>
           </a:xfrm>
           <a:prstGeom prst="rect">
             <a:avLst/>
@@ -12240,6 +12817,11 @@
             <a:noAutofit/>
           </a:bodyPr>
           <a:p>
+            <a:pPr>
+              <a:lnSpc>
+                <a:spcPct val="100000"/>
+              </a:lnSpc>
+            </a:pPr>
             <a:endParaRPr b="0" lang="en-US" sz="1800" spc="-1" strike="noStrike">
               <a:solidFill>
                 <a:srgbClr val="ffffff"/>
@@ -12258,7 +12840,7 @@
         <p:spPr>
           <a:xfrm>
             <a:off x="4846320" y="1024200"/>
-            <a:ext cx="3840120" cy="273960"/>
+            <a:ext cx="3839760" cy="273600"/>
           </a:xfrm>
           <a:prstGeom prst="rect">
             <a:avLst/>
@@ -12315,7 +12897,7 @@
         <p:spPr>
           <a:xfrm>
             <a:off x="4846320" y="1371600"/>
-            <a:ext cx="2559960" cy="273960"/>
+            <a:ext cx="2559600" cy="273600"/>
           </a:xfrm>
           <a:prstGeom prst="rect">
             <a:avLst/>
@@ -12372,7 +12954,7 @@
         <p:spPr>
           <a:xfrm>
             <a:off x="7452360" y="1371600"/>
-            <a:ext cx="1279800" cy="273960"/>
+            <a:ext cx="1279440" cy="273600"/>
           </a:xfrm>
           <a:prstGeom prst="rect">
             <a:avLst/>
@@ -12429,7 +13011,7 @@
         <p:spPr>
           <a:xfrm>
             <a:off x="4846320" y="1691640"/>
-            <a:ext cx="2559960" cy="273960"/>
+            <a:ext cx="2559600" cy="273600"/>
           </a:xfrm>
           <a:prstGeom prst="rect">
             <a:avLst/>
@@ -12486,7 +13068,7 @@
         <p:spPr>
           <a:xfrm>
             <a:off x="7452360" y="1691640"/>
-            <a:ext cx="1279800" cy="273960"/>
+            <a:ext cx="1279440" cy="273600"/>
           </a:xfrm>
           <a:prstGeom prst="rect">
             <a:avLst/>
@@ -12543,7 +13125,7 @@
         <p:spPr>
           <a:xfrm>
             <a:off x="4846320" y="2011680"/>
-            <a:ext cx="2559960" cy="273960"/>
+            <a:ext cx="2559600" cy="273600"/>
           </a:xfrm>
           <a:prstGeom prst="rect">
             <a:avLst/>
@@ -12600,7 +13182,7 @@
         <p:spPr>
           <a:xfrm>
             <a:off x="7452360" y="2011680"/>
-            <a:ext cx="1279800" cy="273960"/>
+            <a:ext cx="1279440" cy="273600"/>
           </a:xfrm>
           <a:prstGeom prst="rect">
             <a:avLst/>
@@ -12657,7 +13239,7 @@
         <p:spPr>
           <a:xfrm>
             <a:off x="4846320" y="2331720"/>
-            <a:ext cx="2559960" cy="273960"/>
+            <a:ext cx="2559600" cy="273600"/>
           </a:xfrm>
           <a:prstGeom prst="rect">
             <a:avLst/>
@@ -12714,7 +13296,7 @@
         <p:spPr>
           <a:xfrm>
             <a:off x="7452360" y="2331720"/>
-            <a:ext cx="1279800" cy="273960"/>
+            <a:ext cx="1279440" cy="273600"/>
           </a:xfrm>
           <a:prstGeom prst="rect">
             <a:avLst/>
@@ -12771,7 +13353,7 @@
         <p:spPr>
           <a:xfrm>
             <a:off x="4846320" y="2651760"/>
-            <a:ext cx="2559960" cy="273960"/>
+            <a:ext cx="2559600" cy="273600"/>
           </a:xfrm>
           <a:prstGeom prst="rect">
             <a:avLst/>
@@ -12828,7 +13410,7 @@
         <p:spPr>
           <a:xfrm>
             <a:off x="7452360" y="2651760"/>
-            <a:ext cx="1279800" cy="273960"/>
+            <a:ext cx="1279440" cy="273600"/>
           </a:xfrm>
           <a:prstGeom prst="rect">
             <a:avLst/>
@@ -12885,7 +13467,7 @@
         <p:spPr>
           <a:xfrm>
             <a:off x="4709160" y="2999160"/>
-            <a:ext cx="4114440" cy="1343880"/>
+            <a:ext cx="4114080" cy="1343520"/>
           </a:xfrm>
           <a:prstGeom prst="rect">
             <a:avLst/>
@@ -12918,6 +13500,11 @@
             <a:noAutofit/>
           </a:bodyPr>
           <a:p>
+            <a:pPr>
+              <a:lnSpc>
+                <a:spcPct val="100000"/>
+              </a:lnSpc>
+            </a:pPr>
             <a:endParaRPr b="0" lang="en-US" sz="1800" spc="-1" strike="noStrike">
               <a:solidFill>
                 <a:srgbClr val="ffffff"/>
@@ -12936,7 +13523,7 @@
         <p:spPr>
           <a:xfrm>
             <a:off x="4709160" y="2999160"/>
-            <a:ext cx="4114440" cy="54360"/>
+            <a:ext cx="4114080" cy="54000"/>
           </a:xfrm>
           <a:prstGeom prst="rect">
             <a:avLst/>
@@ -12962,6 +13549,11 @@
             <a:noAutofit/>
           </a:bodyPr>
           <a:p>
+            <a:pPr>
+              <a:lnSpc>
+                <a:spcPct val="100000"/>
+              </a:lnSpc>
+            </a:pPr>
             <a:endParaRPr b="0" lang="en-US" sz="1800" spc="-1" strike="noStrike">
               <a:solidFill>
                 <a:srgbClr val="ffffff"/>
@@ -12980,7 +13572,7 @@
         <p:spPr>
           <a:xfrm>
             <a:off x="4846320" y="3090600"/>
-            <a:ext cx="3840120" cy="255600"/>
+            <a:ext cx="3839760" cy="255240"/>
           </a:xfrm>
           <a:prstGeom prst="rect">
             <a:avLst/>
@@ -13037,7 +13629,7 @@
         <p:spPr>
           <a:xfrm>
             <a:off x="4846320" y="3401640"/>
-            <a:ext cx="3840120" cy="219240"/>
+            <a:ext cx="3839760" cy="218880"/>
           </a:xfrm>
           <a:prstGeom prst="rect">
             <a:avLst/>
@@ -13104,7 +13696,7 @@
         <p:spPr>
           <a:xfrm>
             <a:off x="4846320" y="3639240"/>
-            <a:ext cx="3840120" cy="219240"/>
+            <a:ext cx="3839760" cy="218880"/>
           </a:xfrm>
           <a:prstGeom prst="rect">
             <a:avLst/>
@@ -13171,7 +13763,7 @@
         <p:spPr>
           <a:xfrm>
             <a:off x="4846320" y="3877200"/>
-            <a:ext cx="3840120" cy="219240"/>
+            <a:ext cx="3839760" cy="218880"/>
           </a:xfrm>
           <a:prstGeom prst="rect">
             <a:avLst/>
@@ -13238,7 +13830,7 @@
         <p:spPr>
           <a:xfrm>
             <a:off x="4846320" y="4114800"/>
-            <a:ext cx="3840120" cy="219240"/>
+            <a:ext cx="3839760" cy="218880"/>
           </a:xfrm>
           <a:prstGeom prst="rect">
             <a:avLst/>
@@ -13342,7 +13934,7 @@
         <p:spPr>
           <a:xfrm>
             <a:off x="320040" y="201240"/>
-            <a:ext cx="63720" cy="566640"/>
+            <a:ext cx="63360" cy="566280"/>
           </a:xfrm>
           <a:prstGeom prst="rect">
             <a:avLst/>
@@ -13368,6 +13960,11 @@
             <a:noAutofit/>
           </a:bodyPr>
           <a:p>
+            <a:pPr>
+              <a:lnSpc>
+                <a:spcPct val="100000"/>
+              </a:lnSpc>
+            </a:pPr>
             <a:endParaRPr b="0" lang="en-US" sz="1800" spc="-1" strike="noStrike">
               <a:solidFill>
                 <a:srgbClr val="ffffff"/>
@@ -13386,7 +13983,7 @@
         <p:spPr>
           <a:xfrm>
             <a:off x="475560" y="164520"/>
-            <a:ext cx="8320680" cy="658080"/>
+            <a:ext cx="8320320" cy="657720"/>
           </a:xfrm>
           <a:prstGeom prst="rect">
             <a:avLst/>
@@ -13486,7 +14083,7 @@
         <p:spPr>
           <a:xfrm>
             <a:off x="7223760" y="201240"/>
-            <a:ext cx="1645560" cy="383760"/>
+            <a:ext cx="1645200" cy="383400"/>
           </a:xfrm>
           <a:prstGeom prst="rect">
             <a:avLst/>
@@ -13533,7 +14130,7 @@
         <p:spPr>
           <a:xfrm>
             <a:off x="274680" y="1627920"/>
-            <a:ext cx="4297320" cy="1115280"/>
+            <a:ext cx="4296960" cy="1114920"/>
           </a:xfrm>
           <a:prstGeom prst="rect">
             <a:avLst/>
@@ -13566,6 +14163,11 @@
             <a:noAutofit/>
           </a:bodyPr>
           <a:p>
+            <a:pPr>
+              <a:lnSpc>
+                <a:spcPct val="100000"/>
+              </a:lnSpc>
+            </a:pPr>
             <a:endParaRPr b="0" lang="en-US" sz="1800" spc="-1" strike="noStrike">
               <a:solidFill>
                 <a:srgbClr val="ffffff"/>
@@ -13584,7 +14186,7 @@
         <p:spPr>
           <a:xfrm>
             <a:off x="274680" y="1627920"/>
-            <a:ext cx="54360" cy="1115280"/>
+            <a:ext cx="54000" cy="1114920"/>
           </a:xfrm>
           <a:prstGeom prst="rect">
             <a:avLst/>
@@ -13610,6 +14212,11 @@
             <a:noAutofit/>
           </a:bodyPr>
           <a:p>
+            <a:pPr>
+              <a:lnSpc>
+                <a:spcPct val="100000"/>
+              </a:lnSpc>
+            </a:pPr>
             <a:endParaRPr b="0" lang="en-US" sz="1800" spc="-1" strike="noStrike">
               <a:solidFill>
                 <a:srgbClr val="ffffff"/>
@@ -13628,7 +14235,7 @@
         <p:spPr>
           <a:xfrm>
             <a:off x="457200" y="1673640"/>
-            <a:ext cx="502560" cy="383760"/>
+            <a:ext cx="502200" cy="383400"/>
           </a:xfrm>
           <a:prstGeom prst="rect">
             <a:avLst/>
@@ -13685,7 +14292,7 @@
         <p:spPr>
           <a:xfrm>
             <a:off x="1005840" y="1627920"/>
-            <a:ext cx="3474360" cy="292320"/>
+            <a:ext cx="3474000" cy="291960"/>
           </a:xfrm>
           <a:prstGeom prst="rect">
             <a:avLst/>
@@ -13742,7 +14349,7 @@
         <p:spPr>
           <a:xfrm>
             <a:off x="1005840" y="1828800"/>
-            <a:ext cx="3428640" cy="658080"/>
+            <a:ext cx="3428280" cy="657720"/>
           </a:xfrm>
           <a:prstGeom prst="rect">
             <a:avLst/>
@@ -13799,7 +14406,7 @@
         <p:spPr>
           <a:xfrm>
             <a:off x="2057400" y="2971800"/>
-            <a:ext cx="456840" cy="109440"/>
+            <a:ext cx="456480" cy="109080"/>
           </a:xfrm>
           <a:prstGeom prst="rect">
             <a:avLst/>
@@ -13856,7 +14463,7 @@
         <p:spPr>
           <a:xfrm>
             <a:off x="457200" y="2386440"/>
-            <a:ext cx="502560" cy="383760"/>
+            <a:ext cx="502200" cy="383400"/>
           </a:xfrm>
           <a:prstGeom prst="rect">
             <a:avLst/>
@@ -13903,7 +14510,7 @@
         <p:spPr>
           <a:xfrm>
             <a:off x="1005840" y="2322720"/>
-            <a:ext cx="3474360" cy="292320"/>
+            <a:ext cx="3474000" cy="291960"/>
           </a:xfrm>
           <a:prstGeom prst="rect">
             <a:avLst/>
@@ -13950,7 +14557,7 @@
         <p:spPr>
           <a:xfrm>
             <a:off x="1005840" y="2633400"/>
-            <a:ext cx="3428640" cy="658080"/>
+            <a:ext cx="3428280" cy="657720"/>
           </a:xfrm>
           <a:prstGeom prst="rect">
             <a:avLst/>
@@ -13997,7 +14604,7 @@
         <p:spPr>
           <a:xfrm>
             <a:off x="2011680" y="3383280"/>
-            <a:ext cx="456840" cy="109440"/>
+            <a:ext cx="456480" cy="109080"/>
           </a:xfrm>
           <a:prstGeom prst="rect">
             <a:avLst/>
@@ -14054,7 +14661,7 @@
         <p:spPr>
           <a:xfrm>
             <a:off x="320040" y="3228120"/>
-            <a:ext cx="4297320" cy="1115280"/>
+            <a:ext cx="4296960" cy="1114920"/>
           </a:xfrm>
           <a:prstGeom prst="rect">
             <a:avLst/>
@@ -14087,6 +14694,11 @@
             <a:noAutofit/>
           </a:bodyPr>
           <a:p>
+            <a:pPr>
+              <a:lnSpc>
+                <a:spcPct val="100000"/>
+              </a:lnSpc>
+            </a:pPr>
             <a:endParaRPr b="0" lang="en-US" sz="1800" spc="-1" strike="noStrike">
               <a:solidFill>
                 <a:srgbClr val="ffffff"/>
@@ -14105,7 +14717,7 @@
         <p:spPr>
           <a:xfrm>
             <a:off x="320040" y="3228120"/>
-            <a:ext cx="54360" cy="1115280"/>
+            <a:ext cx="54000" cy="1114920"/>
           </a:xfrm>
           <a:prstGeom prst="rect">
             <a:avLst/>
@@ -14131,6 +14743,11 @@
             <a:noAutofit/>
           </a:bodyPr>
           <a:p>
+            <a:pPr>
+              <a:lnSpc>
+                <a:spcPct val="100000"/>
+              </a:lnSpc>
+            </a:pPr>
             <a:endParaRPr b="0" lang="en-US" sz="1800" spc="-1" strike="noStrike">
               <a:solidFill>
                 <a:srgbClr val="000000"/>
@@ -14149,7 +14766,7 @@
         <p:spPr>
           <a:xfrm>
             <a:off x="457200" y="3429000"/>
-            <a:ext cx="502560" cy="383760"/>
+            <a:ext cx="502200" cy="383400"/>
           </a:xfrm>
           <a:prstGeom prst="rect">
             <a:avLst/>
@@ -14206,7 +14823,7 @@
         <p:spPr>
           <a:xfrm>
             <a:off x="1005840" y="3365280"/>
-            <a:ext cx="3474360" cy="292320"/>
+            <a:ext cx="3474000" cy="291960"/>
           </a:xfrm>
           <a:prstGeom prst="rect">
             <a:avLst/>
@@ -14263,7 +14880,7 @@
         <p:spPr>
           <a:xfrm>
             <a:off x="959760" y="3657600"/>
-            <a:ext cx="3428640" cy="658080"/>
+            <a:ext cx="3428280" cy="657720"/>
           </a:xfrm>
           <a:prstGeom prst="rect">
             <a:avLst/>
@@ -14320,7 +14937,7 @@
         <p:spPr>
           <a:xfrm>
             <a:off x="4800600" y="987480"/>
-            <a:ext cx="4023000" cy="2304000"/>
+            <a:ext cx="4022640" cy="2303640"/>
           </a:xfrm>
           <a:prstGeom prst="rect">
             <a:avLst/>
@@ -14353,6 +14970,11 @@
             <a:noAutofit/>
           </a:bodyPr>
           <a:p>
+            <a:pPr>
+              <a:lnSpc>
+                <a:spcPct val="100000"/>
+              </a:lnSpc>
+            </a:pPr>
             <a:endParaRPr b="0" lang="en-US" sz="1800" spc="-1" strike="noStrike">
               <a:solidFill>
                 <a:srgbClr val="ffffff"/>
@@ -14371,7 +14993,7 @@
         <p:spPr>
           <a:xfrm>
             <a:off x="4937760" y="1060560"/>
-            <a:ext cx="3748680" cy="273960"/>
+            <a:ext cx="3748320" cy="273600"/>
           </a:xfrm>
           <a:prstGeom prst="rect">
             <a:avLst/>
@@ -14428,7 +15050,7 @@
         <p:spPr>
           <a:xfrm>
             <a:off x="4846320" y="1380600"/>
-            <a:ext cx="3931560" cy="205560"/>
+            <a:ext cx="3931200" cy="205200"/>
           </a:xfrm>
           <a:prstGeom prst="rect">
             <a:avLst/>
@@ -14454,6 +15076,11 @@
             <a:noAutofit/>
           </a:bodyPr>
           <a:p>
+            <a:pPr>
+              <a:lnSpc>
+                <a:spcPct val="100000"/>
+              </a:lnSpc>
+            </a:pPr>
             <a:endParaRPr b="0" lang="en-US" sz="1800" spc="-1" strike="noStrike">
               <a:solidFill>
                 <a:srgbClr val="ffffff"/>
@@ -14472,7 +15099,7 @@
         <p:spPr>
           <a:xfrm>
             <a:off x="4937760" y="1408320"/>
-            <a:ext cx="2377080" cy="182520"/>
+            <a:ext cx="2376720" cy="182160"/>
           </a:xfrm>
           <a:prstGeom prst="rect">
             <a:avLst/>
@@ -14529,7 +15156,7 @@
         <p:spPr>
           <a:xfrm>
             <a:off x="7360920" y="1408320"/>
-            <a:ext cx="1371240" cy="182520"/>
+            <a:ext cx="1370880" cy="182160"/>
           </a:xfrm>
           <a:prstGeom prst="rect">
             <a:avLst/>
@@ -14586,7 +15213,7 @@
         <p:spPr>
           <a:xfrm>
             <a:off x="4937760" y="1623240"/>
-            <a:ext cx="2377080" cy="182520"/>
+            <a:ext cx="2376720" cy="182160"/>
           </a:xfrm>
           <a:prstGeom prst="rect">
             <a:avLst/>
@@ -14643,7 +15270,7 @@
         <p:spPr>
           <a:xfrm>
             <a:off x="7360920" y="1623240"/>
-            <a:ext cx="1371240" cy="182520"/>
+            <a:ext cx="1370880" cy="182160"/>
           </a:xfrm>
           <a:prstGeom prst="rect">
             <a:avLst/>
@@ -14700,7 +15327,7 @@
         <p:spPr>
           <a:xfrm>
             <a:off x="4846320" y="1810440"/>
-            <a:ext cx="3931560" cy="205560"/>
+            <a:ext cx="3931200" cy="205200"/>
           </a:xfrm>
           <a:prstGeom prst="rect">
             <a:avLst/>
@@ -14726,6 +15353,11 @@
             <a:noAutofit/>
           </a:bodyPr>
           <a:p>
+            <a:pPr>
+              <a:lnSpc>
+                <a:spcPct val="100000"/>
+              </a:lnSpc>
+            </a:pPr>
             <a:endParaRPr b="0" lang="en-US" sz="1800" spc="-1" strike="noStrike">
               <a:solidFill>
                 <a:srgbClr val="ffffff"/>
@@ -14744,7 +15376,7 @@
         <p:spPr>
           <a:xfrm>
             <a:off x="4937760" y="1837800"/>
-            <a:ext cx="2377080" cy="182520"/>
+            <a:ext cx="2376720" cy="182160"/>
           </a:xfrm>
           <a:prstGeom prst="rect">
             <a:avLst/>
@@ -14801,7 +15433,7 @@
         <p:spPr>
           <a:xfrm>
             <a:off x="7360920" y="1837800"/>
-            <a:ext cx="1371240" cy="182520"/>
+            <a:ext cx="1370880" cy="182160"/>
           </a:xfrm>
           <a:prstGeom prst="rect">
             <a:avLst/>
@@ -14858,7 +15490,7 @@
         <p:spPr>
           <a:xfrm>
             <a:off x="4937760" y="2052720"/>
-            <a:ext cx="2377080" cy="182520"/>
+            <a:ext cx="2376720" cy="182160"/>
           </a:xfrm>
           <a:prstGeom prst="rect">
             <a:avLst/>
@@ -14915,7 +15547,7 @@
         <p:spPr>
           <a:xfrm>
             <a:off x="7360920" y="2052720"/>
-            <a:ext cx="1371240" cy="182520"/>
+            <a:ext cx="1370880" cy="182160"/>
           </a:xfrm>
           <a:prstGeom prst="rect">
             <a:avLst/>
@@ -14972,7 +15604,7 @@
         <p:spPr>
           <a:xfrm>
             <a:off x="4846320" y="2240280"/>
-            <a:ext cx="3931560" cy="205560"/>
+            <a:ext cx="3931200" cy="205200"/>
           </a:xfrm>
           <a:prstGeom prst="rect">
             <a:avLst/>
@@ -14998,6 +15630,11 @@
             <a:noAutofit/>
           </a:bodyPr>
           <a:p>
+            <a:pPr>
+              <a:lnSpc>
+                <a:spcPct val="100000"/>
+              </a:lnSpc>
+            </a:pPr>
             <a:endParaRPr b="0" lang="en-US" sz="1800" spc="-1" strike="noStrike">
               <a:solidFill>
                 <a:srgbClr val="ffffff"/>
@@ -15016,7 +15653,7 @@
         <p:spPr>
           <a:xfrm>
             <a:off x="4937760" y="2267640"/>
-            <a:ext cx="2377080" cy="182520"/>
+            <a:ext cx="2376720" cy="182160"/>
           </a:xfrm>
           <a:prstGeom prst="rect">
             <a:avLst/>
@@ -15073,7 +15710,7 @@
         <p:spPr>
           <a:xfrm>
             <a:off x="7360920" y="2267640"/>
-            <a:ext cx="1371240" cy="182520"/>
+            <a:ext cx="1370880" cy="182160"/>
           </a:xfrm>
           <a:prstGeom prst="rect">
             <a:avLst/>
@@ -15130,7 +15767,7 @@
         <p:spPr>
           <a:xfrm>
             <a:off x="4937760" y="2482560"/>
-            <a:ext cx="2377080" cy="182520"/>
+            <a:ext cx="2376720" cy="182160"/>
           </a:xfrm>
           <a:prstGeom prst="rect">
             <a:avLst/>
@@ -15187,7 +15824,7 @@
         <p:spPr>
           <a:xfrm>
             <a:off x="7360920" y="2482560"/>
-            <a:ext cx="1371240" cy="182520"/>
+            <a:ext cx="1370880" cy="182160"/>
           </a:xfrm>
           <a:prstGeom prst="rect">
             <a:avLst/>
@@ -15244,7 +15881,7 @@
         <p:spPr>
           <a:xfrm>
             <a:off x="4846320" y="2670120"/>
-            <a:ext cx="3931560" cy="205560"/>
+            <a:ext cx="3931200" cy="205200"/>
           </a:xfrm>
           <a:prstGeom prst="rect">
             <a:avLst/>
@@ -15270,6 +15907,11 @@
             <a:noAutofit/>
           </a:bodyPr>
           <a:p>
+            <a:pPr>
+              <a:lnSpc>
+                <a:spcPct val="100000"/>
+              </a:lnSpc>
+            </a:pPr>
             <a:endParaRPr b="0" lang="en-US" sz="1800" spc="-1" strike="noStrike">
               <a:solidFill>
                 <a:srgbClr val="ffffff"/>
@@ -15288,7 +15930,7 @@
         <p:spPr>
           <a:xfrm>
             <a:off x="4937760" y="2697480"/>
-            <a:ext cx="2377080" cy="182520"/>
+            <a:ext cx="2376720" cy="182160"/>
           </a:xfrm>
           <a:prstGeom prst="rect">
             <a:avLst/>
@@ -15345,7 +15987,7 @@
         <p:spPr>
           <a:xfrm>
             <a:off x="7360920" y="2697480"/>
-            <a:ext cx="1371240" cy="182520"/>
+            <a:ext cx="1370880" cy="182160"/>
           </a:xfrm>
           <a:prstGeom prst="rect">
             <a:avLst/>
@@ -15402,7 +16044,7 @@
         <p:spPr>
           <a:xfrm>
             <a:off x="4937760" y="2912400"/>
-            <a:ext cx="2377080" cy="182520"/>
+            <a:ext cx="2376720" cy="182160"/>
           </a:xfrm>
           <a:prstGeom prst="rect">
             <a:avLst/>
@@ -15459,7 +16101,7 @@
         <p:spPr>
           <a:xfrm>
             <a:off x="7360920" y="2912400"/>
-            <a:ext cx="1371240" cy="182520"/>
+            <a:ext cx="1370880" cy="182160"/>
           </a:xfrm>
           <a:prstGeom prst="rect">
             <a:avLst/>
@@ -15516,7 +16158,7 @@
         <p:spPr>
           <a:xfrm>
             <a:off x="4846320" y="3099960"/>
-            <a:ext cx="3931560" cy="205560"/>
+            <a:ext cx="3931200" cy="205200"/>
           </a:xfrm>
           <a:prstGeom prst="rect">
             <a:avLst/>
@@ -15542,6 +16184,11 @@
             <a:noAutofit/>
           </a:bodyPr>
           <a:p>
+            <a:pPr>
+              <a:lnSpc>
+                <a:spcPct val="100000"/>
+              </a:lnSpc>
+            </a:pPr>
             <a:endParaRPr b="0" lang="en-US" sz="1800" spc="-1" strike="noStrike">
               <a:solidFill>
                 <a:srgbClr val="ffffff"/>
@@ -15560,7 +16207,7 @@
         <p:spPr>
           <a:xfrm>
             <a:off x="4937760" y="3127320"/>
-            <a:ext cx="2377080" cy="182520"/>
+            <a:ext cx="2376720" cy="182160"/>
           </a:xfrm>
           <a:prstGeom prst="rect">
             <a:avLst/>
@@ -15617,7 +16264,7 @@
         <p:spPr>
           <a:xfrm>
             <a:off x="7360920" y="3127320"/>
-            <a:ext cx="1371240" cy="182520"/>
+            <a:ext cx="1370880" cy="182160"/>
           </a:xfrm>
           <a:prstGeom prst="rect">
             <a:avLst/>
@@ -15674,7 +16321,7 @@
         <p:spPr>
           <a:xfrm>
             <a:off x="4800600" y="3727440"/>
-            <a:ext cx="4023000" cy="414360"/>
+            <a:ext cx="4022640" cy="414000"/>
           </a:xfrm>
           <a:prstGeom prst="rect">
             <a:avLst/>
@@ -15721,7 +16368,7 @@
         <p:spPr>
           <a:xfrm>
             <a:off x="4937760" y="4171680"/>
-            <a:ext cx="3748680" cy="621720"/>
+            <a:ext cx="3748320" cy="621360"/>
           </a:xfrm>
           <a:prstGeom prst="rect">
             <a:avLst/>
@@ -15805,7 +16452,7 @@
         <p:spPr>
           <a:xfrm>
             <a:off x="320040" y="201240"/>
-            <a:ext cx="63720" cy="566640"/>
+            <a:ext cx="63360" cy="566280"/>
           </a:xfrm>
           <a:prstGeom prst="rect">
             <a:avLst/>
@@ -15831,6 +16478,11 @@
             <a:noAutofit/>
           </a:bodyPr>
           <a:p>
+            <a:pPr>
+              <a:lnSpc>
+                <a:spcPct val="100000"/>
+              </a:lnSpc>
+            </a:pPr>
             <a:endParaRPr b="0" lang="en-US" sz="1800" spc="-1" strike="noStrike">
               <a:solidFill>
                 <a:srgbClr val="000000"/>
@@ -15849,7 +16501,7 @@
         <p:spPr>
           <a:xfrm>
             <a:off x="475560" y="164520"/>
-            <a:ext cx="8320680" cy="658080"/>
+            <a:ext cx="8320320" cy="657720"/>
           </a:xfrm>
           <a:prstGeom prst="rect">
             <a:avLst/>
@@ -15949,7 +16601,7 @@
         <p:spPr>
           <a:xfrm>
             <a:off x="320040" y="987480"/>
-            <a:ext cx="4205880" cy="840960"/>
+            <a:ext cx="4205520" cy="840600"/>
           </a:xfrm>
           <a:prstGeom prst="rect">
             <a:avLst/>
@@ -15982,6 +16634,11 @@
             <a:noAutofit/>
           </a:bodyPr>
           <a:p>
+            <a:pPr>
+              <a:lnSpc>
+                <a:spcPct val="100000"/>
+              </a:lnSpc>
+            </a:pPr>
             <a:endParaRPr b="0" lang="en-US" sz="1800" spc="-1" strike="noStrike">
               <a:solidFill>
                 <a:srgbClr val="ffffff"/>
@@ -16000,7 +16657,7 @@
         <p:spPr>
           <a:xfrm>
             <a:off x="320040" y="987480"/>
-            <a:ext cx="54360" cy="840960"/>
+            <a:ext cx="54000" cy="840600"/>
           </a:xfrm>
           <a:prstGeom prst="rect">
             <a:avLst/>
@@ -16026,6 +16683,11 @@
             <a:noAutofit/>
           </a:bodyPr>
           <a:p>
+            <a:pPr>
+              <a:lnSpc>
+                <a:spcPct val="100000"/>
+              </a:lnSpc>
+            </a:pPr>
             <a:endParaRPr b="0" lang="en-US" sz="1800" spc="-1" strike="noStrike">
               <a:solidFill>
                 <a:srgbClr val="ffffff"/>
@@ -16044,7 +16706,7 @@
         <p:spPr>
           <a:xfrm>
             <a:off x="457200" y="1097280"/>
-            <a:ext cx="420120" cy="420120"/>
+            <a:ext cx="419760" cy="419760"/>
           </a:xfrm>
           <a:prstGeom prst="rect">
             <a:avLst/>
@@ -16072,6 +16734,11 @@
             <a:noAutofit/>
           </a:bodyPr>
           <a:p>
+            <a:pPr>
+              <a:lnSpc>
+                <a:spcPct val="100000"/>
+              </a:lnSpc>
+            </a:pPr>
             <a:endParaRPr b="0" lang="en-US" sz="1800" spc="-1" strike="noStrike">
               <a:solidFill>
                 <a:srgbClr val="ffffff"/>
@@ -16090,7 +16757,7 @@
         <p:spPr>
           <a:xfrm>
             <a:off x="457200" y="1097280"/>
-            <a:ext cx="420120" cy="420120"/>
+            <a:ext cx="419760" cy="419760"/>
           </a:xfrm>
           <a:prstGeom prst="rect">
             <a:avLst/>
@@ -16147,7 +16814,7 @@
         <p:spPr>
           <a:xfrm>
             <a:off x="978480" y="1078920"/>
-            <a:ext cx="3401280" cy="273960"/>
+            <a:ext cx="3400920" cy="273600"/>
           </a:xfrm>
           <a:prstGeom prst="rect">
             <a:avLst/>
@@ -16204,7 +16871,7 @@
         <p:spPr>
           <a:xfrm>
             <a:off x="978480" y="1389960"/>
-            <a:ext cx="3401280" cy="347040"/>
+            <a:ext cx="3400920" cy="346680"/>
           </a:xfrm>
           <a:prstGeom prst="rect">
             <a:avLst/>
@@ -16261,7 +16928,7 @@
         <p:spPr>
           <a:xfrm>
             <a:off x="4754880" y="987480"/>
-            <a:ext cx="4205880" cy="840960"/>
+            <a:ext cx="4205520" cy="840600"/>
           </a:xfrm>
           <a:prstGeom prst="rect">
             <a:avLst/>
@@ -16294,6 +16961,11 @@
             <a:noAutofit/>
           </a:bodyPr>
           <a:p>
+            <a:pPr>
+              <a:lnSpc>
+                <a:spcPct val="100000"/>
+              </a:lnSpc>
+            </a:pPr>
             <a:endParaRPr b="0" lang="en-US" sz="1800" spc="-1" strike="noStrike">
               <a:solidFill>
                 <a:srgbClr val="ffffff"/>
@@ -16312,7 +16984,7 @@
         <p:spPr>
           <a:xfrm>
             <a:off x="4754880" y="987480"/>
-            <a:ext cx="54360" cy="840960"/>
+            <a:ext cx="54000" cy="840600"/>
           </a:xfrm>
           <a:prstGeom prst="rect">
             <a:avLst/>
@@ -16338,6 +17010,11 @@
             <a:noAutofit/>
           </a:bodyPr>
           <a:p>
+            <a:pPr>
+              <a:lnSpc>
+                <a:spcPct val="100000"/>
+              </a:lnSpc>
+            </a:pPr>
             <a:endParaRPr b="0" lang="en-US" sz="1800" spc="-1" strike="noStrike">
               <a:solidFill>
                 <a:srgbClr val="ffffff"/>
@@ -16356,7 +17033,7 @@
         <p:spPr>
           <a:xfrm>
             <a:off x="4892040" y="1097280"/>
-            <a:ext cx="420120" cy="420120"/>
+            <a:ext cx="419760" cy="419760"/>
           </a:xfrm>
           <a:prstGeom prst="rect">
             <a:avLst/>
@@ -16384,6 +17061,11 @@
             <a:noAutofit/>
           </a:bodyPr>
           <a:p>
+            <a:pPr>
+              <a:lnSpc>
+                <a:spcPct val="100000"/>
+              </a:lnSpc>
+            </a:pPr>
             <a:endParaRPr b="0" lang="en-US" sz="1800" spc="-1" strike="noStrike">
               <a:solidFill>
                 <a:srgbClr val="ffffff"/>
@@ -16402,7 +17084,7 @@
         <p:spPr>
           <a:xfrm>
             <a:off x="4892040" y="1097280"/>
-            <a:ext cx="420120" cy="420120"/>
+            <a:ext cx="419760" cy="419760"/>
           </a:xfrm>
           <a:prstGeom prst="rect">
             <a:avLst/>
@@ -16459,7 +17141,7 @@
         <p:spPr>
           <a:xfrm>
             <a:off x="5413320" y="1078920"/>
-            <a:ext cx="3401280" cy="273960"/>
+            <a:ext cx="3400920" cy="273600"/>
           </a:xfrm>
           <a:prstGeom prst="rect">
             <a:avLst/>
@@ -16516,7 +17198,7 @@
         <p:spPr>
           <a:xfrm>
             <a:off x="5413320" y="1389960"/>
-            <a:ext cx="3401280" cy="347040"/>
+            <a:ext cx="3400920" cy="346680"/>
           </a:xfrm>
           <a:prstGeom prst="rect">
             <a:avLst/>
@@ -16573,7 +17255,7 @@
         <p:spPr>
           <a:xfrm>
             <a:off x="320040" y="1974960"/>
-            <a:ext cx="4205880" cy="840960"/>
+            <a:ext cx="4205520" cy="840600"/>
           </a:xfrm>
           <a:prstGeom prst="rect">
             <a:avLst/>
@@ -16606,6 +17288,11 @@
             <a:noAutofit/>
           </a:bodyPr>
           <a:p>
+            <a:pPr>
+              <a:lnSpc>
+                <a:spcPct val="100000"/>
+              </a:lnSpc>
+            </a:pPr>
             <a:endParaRPr b="0" lang="en-US" sz="1800" spc="-1" strike="noStrike">
               <a:solidFill>
                 <a:srgbClr val="ffffff"/>
@@ -16624,7 +17311,7 @@
         <p:spPr>
           <a:xfrm>
             <a:off x="320040" y="1974960"/>
-            <a:ext cx="54360" cy="840960"/>
+            <a:ext cx="54000" cy="840600"/>
           </a:xfrm>
           <a:prstGeom prst="rect">
             <a:avLst/>
@@ -16650,6 +17337,11 @@
             <a:noAutofit/>
           </a:bodyPr>
           <a:p>
+            <a:pPr>
+              <a:lnSpc>
+                <a:spcPct val="100000"/>
+              </a:lnSpc>
+            </a:pPr>
             <a:endParaRPr b="0" lang="en-US" sz="1800" spc="-1" strike="noStrike">
               <a:solidFill>
                 <a:srgbClr val="000000"/>
@@ -16668,7 +17360,7 @@
         <p:spPr>
           <a:xfrm>
             <a:off x="457200" y="2084760"/>
-            <a:ext cx="420120" cy="420120"/>
+            <a:ext cx="419760" cy="419760"/>
           </a:xfrm>
           <a:prstGeom prst="rect">
             <a:avLst/>
@@ -16696,6 +17388,11 @@
             <a:noAutofit/>
           </a:bodyPr>
           <a:p>
+            <a:pPr>
+              <a:lnSpc>
+                <a:spcPct val="100000"/>
+              </a:lnSpc>
+            </a:pPr>
             <a:endParaRPr b="0" lang="en-US" sz="1800" spc="-1" strike="noStrike">
               <a:solidFill>
                 <a:srgbClr val="000000"/>
@@ -16714,7 +17411,7 @@
         <p:spPr>
           <a:xfrm>
             <a:off x="457200" y="2084760"/>
-            <a:ext cx="420120" cy="420120"/>
+            <a:ext cx="419760" cy="419760"/>
           </a:xfrm>
           <a:prstGeom prst="rect">
             <a:avLst/>
@@ -16771,7 +17468,7 @@
         <p:spPr>
           <a:xfrm>
             <a:off x="978480" y="2066400"/>
-            <a:ext cx="3401280" cy="273960"/>
+            <a:ext cx="3400920" cy="273600"/>
           </a:xfrm>
           <a:prstGeom prst="rect">
             <a:avLst/>
@@ -16828,7 +17525,7 @@
         <p:spPr>
           <a:xfrm>
             <a:off x="978480" y="2377440"/>
-            <a:ext cx="3401280" cy="347040"/>
+            <a:ext cx="3400920" cy="346680"/>
           </a:xfrm>
           <a:prstGeom prst="rect">
             <a:avLst/>
@@ -16885,7 +17582,7 @@
         <p:spPr>
           <a:xfrm>
             <a:off x="4754880" y="1974960"/>
-            <a:ext cx="4205880" cy="840960"/>
+            <a:ext cx="4205520" cy="840600"/>
           </a:xfrm>
           <a:prstGeom prst="rect">
             <a:avLst/>
@@ -16918,6 +17615,11 @@
             <a:noAutofit/>
           </a:bodyPr>
           <a:p>
+            <a:pPr>
+              <a:lnSpc>
+                <a:spcPct val="100000"/>
+              </a:lnSpc>
+            </a:pPr>
             <a:endParaRPr b="0" lang="en-US" sz="1800" spc="-1" strike="noStrike">
               <a:solidFill>
                 <a:srgbClr val="ffffff"/>
@@ -16936,7 +17638,7 @@
         <p:spPr>
           <a:xfrm>
             <a:off x="4754880" y="1974960"/>
-            <a:ext cx="54360" cy="840960"/>
+            <a:ext cx="54000" cy="840600"/>
           </a:xfrm>
           <a:prstGeom prst="rect">
             <a:avLst/>
@@ -16962,6 +17664,11 @@
             <a:noAutofit/>
           </a:bodyPr>
           <a:p>
+            <a:pPr>
+              <a:lnSpc>
+                <a:spcPct val="100000"/>
+              </a:lnSpc>
+            </a:pPr>
             <a:endParaRPr b="0" lang="en-US" sz="1800" spc="-1" strike="noStrike">
               <a:solidFill>
                 <a:srgbClr val="000000"/>
@@ -16980,7 +17687,7 @@
         <p:spPr>
           <a:xfrm>
             <a:off x="4892040" y="2084760"/>
-            <a:ext cx="420120" cy="420120"/>
+            <a:ext cx="419760" cy="419760"/>
           </a:xfrm>
           <a:prstGeom prst="rect">
             <a:avLst/>
@@ -17008,6 +17715,11 @@
             <a:noAutofit/>
           </a:bodyPr>
           <a:p>
+            <a:pPr>
+              <a:lnSpc>
+                <a:spcPct val="100000"/>
+              </a:lnSpc>
+            </a:pPr>
             <a:endParaRPr b="0" lang="en-US" sz="1800" spc="-1" strike="noStrike">
               <a:solidFill>
                 <a:srgbClr val="000000"/>
@@ -17026,7 +17738,7 @@
         <p:spPr>
           <a:xfrm>
             <a:off x="4892040" y="2084760"/>
-            <a:ext cx="420120" cy="420120"/>
+            <a:ext cx="419760" cy="419760"/>
           </a:xfrm>
           <a:prstGeom prst="rect">
             <a:avLst/>
@@ -17083,7 +17795,7 @@
         <p:spPr>
           <a:xfrm>
             <a:off x="5413320" y="2066400"/>
-            <a:ext cx="3401280" cy="273960"/>
+            <a:ext cx="3400920" cy="273600"/>
           </a:xfrm>
           <a:prstGeom prst="rect">
             <a:avLst/>
@@ -17140,7 +17852,7 @@
         <p:spPr>
           <a:xfrm>
             <a:off x="5413320" y="2377440"/>
-            <a:ext cx="3401280" cy="347040"/>
+            <a:ext cx="3400920" cy="346680"/>
           </a:xfrm>
           <a:prstGeom prst="rect">
             <a:avLst/>
@@ -17197,7 +17909,7 @@
         <p:spPr>
           <a:xfrm>
             <a:off x="320040" y="2962800"/>
-            <a:ext cx="4205880" cy="840960"/>
+            <a:ext cx="4205520" cy="840600"/>
           </a:xfrm>
           <a:prstGeom prst="rect">
             <a:avLst/>
@@ -17230,6 +17942,11 @@
             <a:noAutofit/>
           </a:bodyPr>
           <a:p>
+            <a:pPr>
+              <a:lnSpc>
+                <a:spcPct val="100000"/>
+              </a:lnSpc>
+            </a:pPr>
             <a:endParaRPr b="0" lang="en-US" sz="1800" spc="-1" strike="noStrike">
               <a:solidFill>
                 <a:srgbClr val="ffffff"/>
@@ -17248,7 +17965,7 @@
         <p:spPr>
           <a:xfrm>
             <a:off x="320040" y="2962800"/>
-            <a:ext cx="54360" cy="840960"/>
+            <a:ext cx="54000" cy="840600"/>
           </a:xfrm>
           <a:prstGeom prst="rect">
             <a:avLst/>
@@ -17274,6 +17991,11 @@
             <a:noAutofit/>
           </a:bodyPr>
           <a:p>
+            <a:pPr>
+              <a:lnSpc>
+                <a:spcPct val="100000"/>
+              </a:lnSpc>
+            </a:pPr>
             <a:endParaRPr b="0" lang="en-US" sz="1800" spc="-1" strike="noStrike">
               <a:solidFill>
                 <a:srgbClr val="ffffff"/>
@@ -17292,7 +18014,7 @@
         <p:spPr>
           <a:xfrm>
             <a:off x="457200" y="3072240"/>
-            <a:ext cx="420120" cy="420120"/>
+            <a:ext cx="419760" cy="419760"/>
           </a:xfrm>
           <a:prstGeom prst="rect">
             <a:avLst/>
@@ -17320,6 +18042,11 @@
             <a:noAutofit/>
           </a:bodyPr>
           <a:p>
+            <a:pPr>
+              <a:lnSpc>
+                <a:spcPct val="100000"/>
+              </a:lnSpc>
+            </a:pPr>
             <a:endParaRPr b="0" lang="en-US" sz="1800" spc="-1" strike="noStrike">
               <a:solidFill>
                 <a:srgbClr val="ffffff"/>
@@ -17338,7 +18065,7 @@
         <p:spPr>
           <a:xfrm>
             <a:off x="457200" y="3072240"/>
-            <a:ext cx="420120" cy="420120"/>
+            <a:ext cx="419760" cy="419760"/>
           </a:xfrm>
           <a:prstGeom prst="rect">
             <a:avLst/>
@@ -17395,7 +18122,7 @@
         <p:spPr>
           <a:xfrm>
             <a:off x="978480" y="3054240"/>
-            <a:ext cx="3401280" cy="273960"/>
+            <a:ext cx="3400920" cy="273600"/>
           </a:xfrm>
           <a:prstGeom prst="rect">
             <a:avLst/>
@@ -17452,7 +18179,7 @@
         <p:spPr>
           <a:xfrm>
             <a:off x="978480" y="3364920"/>
-            <a:ext cx="3401280" cy="347040"/>
+            <a:ext cx="3400920" cy="346680"/>
           </a:xfrm>
           <a:prstGeom prst="rect">
             <a:avLst/>
@@ -17509,7 +18236,7 @@
         <p:spPr>
           <a:xfrm>
             <a:off x="4754880" y="2962800"/>
-            <a:ext cx="4205880" cy="840960"/>
+            <a:ext cx="4205520" cy="840600"/>
           </a:xfrm>
           <a:prstGeom prst="rect">
             <a:avLst/>
@@ -17542,6 +18269,11 @@
             <a:noAutofit/>
           </a:bodyPr>
           <a:p>
+            <a:pPr>
+              <a:lnSpc>
+                <a:spcPct val="100000"/>
+              </a:lnSpc>
+            </a:pPr>
             <a:endParaRPr b="0" lang="en-US" sz="1800" spc="-1" strike="noStrike">
               <a:solidFill>
                 <a:srgbClr val="ffffff"/>
@@ -17560,7 +18292,7 @@
         <p:spPr>
           <a:xfrm>
             <a:off x="4754880" y="2962800"/>
-            <a:ext cx="54360" cy="840960"/>
+            <a:ext cx="54000" cy="840600"/>
           </a:xfrm>
           <a:prstGeom prst="rect">
             <a:avLst/>
@@ -17586,6 +18318,11 @@
             <a:noAutofit/>
           </a:bodyPr>
           <a:p>
+            <a:pPr>
+              <a:lnSpc>
+                <a:spcPct val="100000"/>
+              </a:lnSpc>
+            </a:pPr>
             <a:endParaRPr b="0" lang="en-US" sz="1800" spc="-1" strike="noStrike">
               <a:solidFill>
                 <a:srgbClr val="ffffff"/>
@@ -17604,7 +18341,7 @@
         <p:spPr>
           <a:xfrm>
             <a:off x="4892040" y="3072240"/>
-            <a:ext cx="420120" cy="420120"/>
+            <a:ext cx="419760" cy="419760"/>
           </a:xfrm>
           <a:prstGeom prst="rect">
             <a:avLst/>
@@ -17632,6 +18369,11 @@
             <a:noAutofit/>
           </a:bodyPr>
           <a:p>
+            <a:pPr>
+              <a:lnSpc>
+                <a:spcPct val="100000"/>
+              </a:lnSpc>
+            </a:pPr>
             <a:endParaRPr b="0" lang="en-US" sz="1800" spc="-1" strike="noStrike">
               <a:solidFill>
                 <a:srgbClr val="ffffff"/>
@@ -17650,7 +18392,7 @@
         <p:spPr>
           <a:xfrm>
             <a:off x="4892040" y="3072240"/>
-            <a:ext cx="420120" cy="420120"/>
+            <a:ext cx="419760" cy="419760"/>
           </a:xfrm>
           <a:prstGeom prst="rect">
             <a:avLst/>
@@ -17707,7 +18449,7 @@
         <p:spPr>
           <a:xfrm>
             <a:off x="5413320" y="3054240"/>
-            <a:ext cx="3401280" cy="273960"/>
+            <a:ext cx="3400920" cy="273600"/>
           </a:xfrm>
           <a:prstGeom prst="rect">
             <a:avLst/>
@@ -17764,7 +18506,7 @@
         <p:spPr>
           <a:xfrm>
             <a:off x="5413320" y="3364920"/>
-            <a:ext cx="3401280" cy="347040"/>
+            <a:ext cx="3400920" cy="346680"/>
           </a:xfrm>
           <a:prstGeom prst="rect">
             <a:avLst/>
@@ -17821,7 +18563,7 @@
         <p:spPr>
           <a:xfrm>
             <a:off x="320040" y="3950280"/>
-            <a:ext cx="4205880" cy="840960"/>
+            <a:ext cx="4205520" cy="840600"/>
           </a:xfrm>
           <a:prstGeom prst="rect">
             <a:avLst/>
@@ -17854,6 +18596,11 @@
             <a:noAutofit/>
           </a:bodyPr>
           <a:p>
+            <a:pPr>
+              <a:lnSpc>
+                <a:spcPct val="100000"/>
+              </a:lnSpc>
+            </a:pPr>
             <a:endParaRPr b="0" lang="en-US" sz="1800" spc="-1" strike="noStrike">
               <a:solidFill>
                 <a:srgbClr val="ffffff"/>
@@ -17872,7 +18619,7 @@
         <p:spPr>
           <a:xfrm>
             <a:off x="320040" y="3950280"/>
-            <a:ext cx="54360" cy="840960"/>
+            <a:ext cx="54000" cy="840600"/>
           </a:xfrm>
           <a:prstGeom prst="rect">
             <a:avLst/>
@@ -17898,6 +18645,11 @@
             <a:noAutofit/>
           </a:bodyPr>
           <a:p>
+            <a:pPr>
+              <a:lnSpc>
+                <a:spcPct val="100000"/>
+              </a:lnSpc>
+            </a:pPr>
             <a:endParaRPr b="0" lang="en-US" sz="1800" spc="-1" strike="noStrike">
               <a:solidFill>
                 <a:srgbClr val="ffffff"/>
@@ -17916,7 +18668,7 @@
         <p:spPr>
           <a:xfrm>
             <a:off x="457200" y="4060080"/>
-            <a:ext cx="420120" cy="420120"/>
+            <a:ext cx="419760" cy="419760"/>
           </a:xfrm>
           <a:prstGeom prst="rect">
             <a:avLst/>
@@ -17944,6 +18696,11 @@
             <a:noAutofit/>
           </a:bodyPr>
           <a:p>
+            <a:pPr>
+              <a:lnSpc>
+                <a:spcPct val="100000"/>
+              </a:lnSpc>
+            </a:pPr>
             <a:endParaRPr b="0" lang="en-US" sz="1800" spc="-1" strike="noStrike">
               <a:solidFill>
                 <a:srgbClr val="ffffff"/>
@@ -17962,7 +18719,7 @@
         <p:spPr>
           <a:xfrm>
             <a:off x="457200" y="4060080"/>
-            <a:ext cx="420120" cy="420120"/>
+            <a:ext cx="419760" cy="419760"/>
           </a:xfrm>
           <a:prstGeom prst="rect">
             <a:avLst/>
@@ -18019,7 +18776,7 @@
         <p:spPr>
           <a:xfrm>
             <a:off x="978480" y="4041720"/>
-            <a:ext cx="3401280" cy="273960"/>
+            <a:ext cx="3400920" cy="273600"/>
           </a:xfrm>
           <a:prstGeom prst="rect">
             <a:avLst/>
@@ -18076,7 +18833,7 @@
         <p:spPr>
           <a:xfrm>
             <a:off x="978480" y="4352400"/>
-            <a:ext cx="3401280" cy="347040"/>
+            <a:ext cx="3400920" cy="346680"/>
           </a:xfrm>
           <a:prstGeom prst="rect">
             <a:avLst/>
@@ -18133,7 +18890,7 @@
         <p:spPr>
           <a:xfrm>
             <a:off x="4754880" y="3950280"/>
-            <a:ext cx="4205880" cy="840960"/>
+            <a:ext cx="4205520" cy="840600"/>
           </a:xfrm>
           <a:prstGeom prst="rect">
             <a:avLst/>
@@ -18166,6 +18923,11 @@
             <a:noAutofit/>
           </a:bodyPr>
           <a:p>
+            <a:pPr>
+              <a:lnSpc>
+                <a:spcPct val="100000"/>
+              </a:lnSpc>
+            </a:pPr>
             <a:endParaRPr b="0" lang="en-US" sz="1800" spc="-1" strike="noStrike">
               <a:solidFill>
                 <a:srgbClr val="ffffff"/>
@@ -18184,7 +18946,7 @@
         <p:spPr>
           <a:xfrm>
             <a:off x="4754880" y="3950280"/>
-            <a:ext cx="54360" cy="840960"/>
+            <a:ext cx="54000" cy="840600"/>
           </a:xfrm>
           <a:prstGeom prst="rect">
             <a:avLst/>
@@ -18210,6 +18972,11 @@
             <a:noAutofit/>
           </a:bodyPr>
           <a:p>
+            <a:pPr>
+              <a:lnSpc>
+                <a:spcPct val="100000"/>
+              </a:lnSpc>
+            </a:pPr>
             <a:endParaRPr b="0" lang="en-US" sz="1800" spc="-1" strike="noStrike">
               <a:solidFill>
                 <a:srgbClr val="ffffff"/>
@@ -18228,7 +18995,7 @@
         <p:spPr>
           <a:xfrm>
             <a:off x="4892040" y="4060080"/>
-            <a:ext cx="420120" cy="420120"/>
+            <a:ext cx="419760" cy="419760"/>
           </a:xfrm>
           <a:prstGeom prst="rect">
             <a:avLst/>
@@ -18256,6 +19023,11 @@
             <a:noAutofit/>
           </a:bodyPr>
           <a:p>
+            <a:pPr>
+              <a:lnSpc>
+                <a:spcPct val="100000"/>
+              </a:lnSpc>
+            </a:pPr>
             <a:endParaRPr b="0" lang="en-US" sz="1800" spc="-1" strike="noStrike">
               <a:solidFill>
                 <a:srgbClr val="ffffff"/>
@@ -18274,7 +19046,7 @@
         <p:spPr>
           <a:xfrm>
             <a:off x="4892040" y="4060080"/>
-            <a:ext cx="420120" cy="420120"/>
+            <a:ext cx="419760" cy="419760"/>
           </a:xfrm>
           <a:prstGeom prst="rect">
             <a:avLst/>
@@ -18331,7 +19103,7 @@
         <p:spPr>
           <a:xfrm>
             <a:off x="5413320" y="4041720"/>
-            <a:ext cx="3401280" cy="273960"/>
+            <a:ext cx="3400920" cy="273600"/>
           </a:xfrm>
           <a:prstGeom prst="rect">
             <a:avLst/>
@@ -18388,7 +19160,7 @@
         <p:spPr>
           <a:xfrm>
             <a:off x="5413320" y="4352400"/>
-            <a:ext cx="3401280" cy="347040"/>
+            <a:ext cx="3400920" cy="346680"/>
           </a:xfrm>
           <a:prstGeom prst="rect">
             <a:avLst/>
@@ -18445,7 +19217,7 @@
         <p:spPr>
           <a:xfrm>
             <a:off x="320040" y="4663440"/>
-            <a:ext cx="8503560" cy="347040"/>
+            <a:ext cx="8503200" cy="346680"/>
           </a:xfrm>
           <a:prstGeom prst="rect">
             <a:avLst/>
@@ -18471,6 +19243,11 @@
             <a:noAutofit/>
           </a:bodyPr>
           <a:p>
+            <a:pPr>
+              <a:lnSpc>
+                <a:spcPct val="100000"/>
+              </a:lnSpc>
+            </a:pPr>
             <a:endParaRPr b="0" lang="en-US" sz="1800" spc="-1" strike="noStrike">
               <a:solidFill>
                 <a:srgbClr val="ffffff"/>
@@ -18489,7 +19266,7 @@
         <p:spPr>
           <a:xfrm>
             <a:off x="457200" y="4663440"/>
-            <a:ext cx="8320680" cy="347040"/>
+            <a:ext cx="8320320" cy="346680"/>
           </a:xfrm>
           <a:prstGeom prst="rect">
             <a:avLst/>
@@ -18593,7 +19370,7 @@
         <p:spPr>
           <a:xfrm>
             <a:off x="320040" y="201240"/>
-            <a:ext cx="63720" cy="566640"/>
+            <a:ext cx="63360" cy="566280"/>
           </a:xfrm>
           <a:prstGeom prst="rect">
             <a:avLst/>
@@ -18619,6 +19396,11 @@
             <a:noAutofit/>
           </a:bodyPr>
           <a:p>
+            <a:pPr>
+              <a:lnSpc>
+                <a:spcPct val="100000"/>
+              </a:lnSpc>
+            </a:pPr>
             <a:endParaRPr b="0" lang="en-US" sz="1800" spc="-1" strike="noStrike">
               <a:solidFill>
                 <a:srgbClr val="000000"/>
@@ -18637,7 +19419,7 @@
         <p:spPr>
           <a:xfrm>
             <a:off x="475560" y="164520"/>
-            <a:ext cx="8320680" cy="658080"/>
+            <a:ext cx="8320320" cy="657720"/>
           </a:xfrm>
           <a:prstGeom prst="rect">
             <a:avLst/>
@@ -18741,7 +19523,7 @@
         <p:spPr>
           <a:xfrm>
             <a:off x="320040" y="960120"/>
-            <a:ext cx="5394600" cy="1846800"/>
+            <a:ext cx="5394240" cy="1846440"/>
           </a:xfrm>
           <a:prstGeom prst="rect">
             <a:avLst/>
@@ -18760,7 +19542,7 @@
         <p:spPr>
           <a:xfrm>
             <a:off x="320040" y="960120"/>
-            <a:ext cx="5394600" cy="1846800"/>
+            <a:ext cx="5394240" cy="1846440"/>
           </a:xfrm>
           <a:prstGeom prst="rect">
             <a:avLst/>
@@ -18784,6 +19566,11 @@
             <a:noAutofit/>
           </a:bodyPr>
           <a:p>
+            <a:pPr>
+              <a:lnSpc>
+                <a:spcPct val="100000"/>
+              </a:lnSpc>
+            </a:pPr>
             <a:endParaRPr b="0" lang="en-US" sz="1800" spc="-1" strike="noStrike">
               <a:solidFill>
                 <a:srgbClr val="ffffff"/>
@@ -18806,7 +19593,7 @@
         <p:spPr>
           <a:xfrm>
             <a:off x="5852160" y="960120"/>
-            <a:ext cx="2971440" cy="1846800"/>
+            <a:ext cx="2971080" cy="1846440"/>
           </a:xfrm>
           <a:prstGeom prst="rect">
             <a:avLst/>
@@ -18825,7 +19612,7 @@
         <p:spPr>
           <a:xfrm>
             <a:off x="5852160" y="960120"/>
-            <a:ext cx="2971440" cy="1846800"/>
+            <a:ext cx="2971080" cy="1846440"/>
           </a:xfrm>
           <a:prstGeom prst="rect">
             <a:avLst/>
@@ -18849,6 +19636,11 @@
             <a:noAutofit/>
           </a:bodyPr>
           <a:p>
+            <a:pPr>
+              <a:lnSpc>
+                <a:spcPct val="100000"/>
+              </a:lnSpc>
+            </a:pPr>
             <a:endParaRPr b="0" lang="en-US" sz="1800" spc="-1" strike="noStrike">
               <a:solidFill>
                 <a:srgbClr val="ffffff"/>
@@ -18867,7 +19659,7 @@
         <p:spPr>
           <a:xfrm>
             <a:off x="320040" y="2834640"/>
-            <a:ext cx="5394600" cy="200880"/>
+            <a:ext cx="5394240" cy="200520"/>
           </a:xfrm>
           <a:prstGeom prst="rect">
             <a:avLst/>
@@ -18924,7 +19716,7 @@
         <p:spPr>
           <a:xfrm>
             <a:off x="5852160" y="2834640"/>
-            <a:ext cx="2971440" cy="200880"/>
+            <a:ext cx="2971080" cy="200520"/>
           </a:xfrm>
           <a:prstGeom prst="rect">
             <a:avLst/>
@@ -18985,7 +19777,7 @@
         <p:spPr>
           <a:xfrm>
             <a:off x="320040" y="3090600"/>
-            <a:ext cx="5394600" cy="1919880"/>
+            <a:ext cx="5394240" cy="1919520"/>
           </a:xfrm>
           <a:prstGeom prst="rect">
             <a:avLst/>
@@ -19004,7 +19796,7 @@
         <p:spPr>
           <a:xfrm>
             <a:off x="320040" y="3090600"/>
-            <a:ext cx="5394600" cy="1919880"/>
+            <a:ext cx="5394240" cy="1919520"/>
           </a:xfrm>
           <a:prstGeom prst="rect">
             <a:avLst/>
@@ -19028,6 +19820,11 @@
             <a:noAutofit/>
           </a:bodyPr>
           <a:p>
+            <a:pPr>
+              <a:lnSpc>
+                <a:spcPct val="100000"/>
+              </a:lnSpc>
+            </a:pPr>
             <a:endParaRPr b="0" lang="en-US" sz="1800" spc="-1" strike="noStrike">
               <a:solidFill>
                 <a:srgbClr val="ffffff"/>
@@ -19050,7 +19847,7 @@
         <p:spPr>
           <a:xfrm>
             <a:off x="5852160" y="3090600"/>
-            <a:ext cx="2971440" cy="1919880"/>
+            <a:ext cx="2971080" cy="1919520"/>
           </a:xfrm>
           <a:prstGeom prst="rect">
             <a:avLst/>
@@ -19069,7 +19866,7 @@
         <p:spPr>
           <a:xfrm>
             <a:off x="5852160" y="3090600"/>
-            <a:ext cx="2971440" cy="1919880"/>
+            <a:ext cx="2971080" cy="1919520"/>
           </a:xfrm>
           <a:prstGeom prst="rect">
             <a:avLst/>
@@ -19093,6 +19890,11 @@
             <a:noAutofit/>
           </a:bodyPr>
           <a:p>
+            <a:pPr>
+              <a:lnSpc>
+                <a:spcPct val="100000"/>
+              </a:lnSpc>
+            </a:pPr>
             <a:endParaRPr b="0" lang="en-US" sz="1800" spc="-1" strike="noStrike">
               <a:solidFill>
                 <a:srgbClr val="ffffff"/>
@@ -19111,7 +19913,7 @@
         <p:spPr>
           <a:xfrm>
             <a:off x="320040" y="5029200"/>
-            <a:ext cx="5394600" cy="182520"/>
+            <a:ext cx="5394240" cy="182160"/>
           </a:xfrm>
           <a:prstGeom prst="rect">
             <a:avLst/>
@@ -19168,7 +19970,7 @@
         <p:spPr>
           <a:xfrm>
             <a:off x="5852160" y="5029200"/>
-            <a:ext cx="2971440" cy="182520"/>
+            <a:ext cx="2971080" cy="182160"/>
           </a:xfrm>
           <a:prstGeom prst="rect">
             <a:avLst/>
@@ -19262,7 +20064,7 @@
         <p:spPr>
           <a:xfrm>
             <a:off x="320040" y="201240"/>
-            <a:ext cx="63720" cy="566640"/>
+            <a:ext cx="63360" cy="566280"/>
           </a:xfrm>
           <a:prstGeom prst="rect">
             <a:avLst/>
@@ -19288,6 +20090,11 @@
             <a:noAutofit/>
           </a:bodyPr>
           <a:p>
+            <a:pPr>
+              <a:lnSpc>
+                <a:spcPct val="100000"/>
+              </a:lnSpc>
+            </a:pPr>
             <a:endParaRPr b="0" lang="en-US" sz="1800" spc="-1" strike="noStrike">
               <a:solidFill>
                 <a:srgbClr val="ffffff"/>
@@ -19306,7 +20113,7 @@
         <p:spPr>
           <a:xfrm>
             <a:off x="475560" y="164520"/>
-            <a:ext cx="8320680" cy="658080"/>
+            <a:ext cx="8320320" cy="657720"/>
           </a:xfrm>
           <a:prstGeom prst="rect">
             <a:avLst/>
@@ -19406,7 +20213,7 @@
         <p:spPr>
           <a:xfrm>
             <a:off x="7223760" y="201240"/>
-            <a:ext cx="1645560" cy="383760"/>
+            <a:ext cx="1645200" cy="383400"/>
           </a:xfrm>
           <a:prstGeom prst="rect">
             <a:avLst/>
@@ -19453,7 +20260,7 @@
         <p:spPr>
           <a:xfrm>
             <a:off x="320040" y="960120"/>
-            <a:ext cx="4160160" cy="3931560"/>
+            <a:ext cx="4159800" cy="3931200"/>
           </a:xfrm>
           <a:prstGeom prst="rect">
             <a:avLst/>
@@ -19486,6 +20293,11 @@
             <a:noAutofit/>
           </a:bodyPr>
           <a:p>
+            <a:pPr>
+              <a:lnSpc>
+                <a:spcPct val="100000"/>
+              </a:lnSpc>
+            </a:pPr>
             <a:endParaRPr b="0" lang="en-US" sz="1800" spc="-1" strike="noStrike">
               <a:solidFill>
                 <a:srgbClr val="ffffff"/>
@@ -19504,7 +20316,7 @@
         <p:spPr>
           <a:xfrm>
             <a:off x="457200" y="1024200"/>
-            <a:ext cx="3885840" cy="273960"/>
+            <a:ext cx="3885480" cy="273600"/>
           </a:xfrm>
           <a:prstGeom prst="rect">
             <a:avLst/>
@@ -19561,7 +20373,7 @@
         <p:spPr>
           <a:xfrm>
             <a:off x="384120" y="1389960"/>
-            <a:ext cx="54360" cy="895680"/>
+            <a:ext cx="54000" cy="895320"/>
           </a:xfrm>
           <a:prstGeom prst="rect">
             <a:avLst/>
@@ -19587,6 +20399,11 @@
             <a:noAutofit/>
           </a:bodyPr>
           <a:p>
+            <a:pPr>
+              <a:lnSpc>
+                <a:spcPct val="100000"/>
+              </a:lnSpc>
+            </a:pPr>
             <a:endParaRPr b="0" lang="en-US" sz="1800" spc="-1" strike="noStrike">
               <a:solidFill>
                 <a:srgbClr val="ffffff"/>
@@ -19605,7 +20422,7 @@
         <p:spPr>
           <a:xfrm>
             <a:off x="548640" y="1389960"/>
-            <a:ext cx="3840120" cy="200880"/>
+            <a:ext cx="3839760" cy="200520"/>
           </a:xfrm>
           <a:prstGeom prst="rect">
             <a:avLst/>
@@ -19662,7 +20479,7 @@
         <p:spPr>
           <a:xfrm>
             <a:off x="548640" y="1609200"/>
-            <a:ext cx="3840120" cy="219240"/>
+            <a:ext cx="3839760" cy="218880"/>
           </a:xfrm>
           <a:prstGeom prst="rect">
             <a:avLst/>
@@ -19729,7 +20546,7 @@
         <p:spPr>
           <a:xfrm>
             <a:off x="548640" y="1847160"/>
-            <a:ext cx="3840120" cy="219240"/>
+            <a:ext cx="3839760" cy="218880"/>
           </a:xfrm>
           <a:prstGeom prst="rect">
             <a:avLst/>
@@ -19796,7 +20613,7 @@
         <p:spPr>
           <a:xfrm>
             <a:off x="548640" y="2084760"/>
-            <a:ext cx="3840120" cy="219240"/>
+            <a:ext cx="3839760" cy="218880"/>
           </a:xfrm>
           <a:prstGeom prst="rect">
             <a:avLst/>
@@ -19863,7 +20680,7 @@
         <p:spPr>
           <a:xfrm>
             <a:off x="384120" y="2432160"/>
-            <a:ext cx="54360" cy="895680"/>
+            <a:ext cx="54000" cy="895320"/>
           </a:xfrm>
           <a:prstGeom prst="rect">
             <a:avLst/>
@@ -19889,6 +20706,11 @@
             <a:noAutofit/>
           </a:bodyPr>
           <a:p>
+            <a:pPr>
+              <a:lnSpc>
+                <a:spcPct val="100000"/>
+              </a:lnSpc>
+            </a:pPr>
             <a:endParaRPr b="0" lang="en-US" sz="1800" spc="-1" strike="noStrike">
               <a:solidFill>
                 <a:srgbClr val="ffffff"/>
@@ -19907,7 +20729,7 @@
         <p:spPr>
           <a:xfrm>
             <a:off x="548640" y="2432160"/>
-            <a:ext cx="3840120" cy="200880"/>
+            <a:ext cx="3839760" cy="200520"/>
           </a:xfrm>
           <a:prstGeom prst="rect">
             <a:avLst/>
@@ -19964,7 +20786,7 @@
         <p:spPr>
           <a:xfrm>
             <a:off x="548640" y="2651760"/>
-            <a:ext cx="3840120" cy="219240"/>
+            <a:ext cx="3839760" cy="218880"/>
           </a:xfrm>
           <a:prstGeom prst="rect">
             <a:avLst/>
@@ -20031,7 +20853,7 @@
         <p:spPr>
           <a:xfrm>
             <a:off x="548640" y="2889360"/>
-            <a:ext cx="3840120" cy="219240"/>
+            <a:ext cx="3839760" cy="218880"/>
           </a:xfrm>
           <a:prstGeom prst="rect">
             <a:avLst/>
@@ -20098,7 +20920,7 @@
         <p:spPr>
           <a:xfrm>
             <a:off x="548640" y="3127320"/>
-            <a:ext cx="3840120" cy="219240"/>
+            <a:ext cx="3839760" cy="218880"/>
           </a:xfrm>
           <a:prstGeom prst="rect">
             <a:avLst/>
@@ -20165,7 +20987,7 @@
         <p:spPr>
           <a:xfrm>
             <a:off x="384120" y="3474720"/>
-            <a:ext cx="54360" cy="895680"/>
+            <a:ext cx="54000" cy="895320"/>
           </a:xfrm>
           <a:prstGeom prst="rect">
             <a:avLst/>
@@ -20191,6 +21013,11 @@
             <a:noAutofit/>
           </a:bodyPr>
           <a:p>
+            <a:pPr>
+              <a:lnSpc>
+                <a:spcPct val="100000"/>
+              </a:lnSpc>
+            </a:pPr>
             <a:endParaRPr b="0" lang="en-US" sz="1800" spc="-1" strike="noStrike">
               <a:solidFill>
                 <a:srgbClr val="000000"/>
@@ -20209,7 +21036,7 @@
         <p:spPr>
           <a:xfrm>
             <a:off x="548640" y="3474720"/>
-            <a:ext cx="3840120" cy="200880"/>
+            <a:ext cx="3839760" cy="200520"/>
           </a:xfrm>
           <a:prstGeom prst="rect">
             <a:avLst/>
@@ -20266,7 +21093,7 @@
         <p:spPr>
           <a:xfrm>
             <a:off x="548640" y="3694320"/>
-            <a:ext cx="3840120" cy="219240"/>
+            <a:ext cx="3839760" cy="218880"/>
           </a:xfrm>
           <a:prstGeom prst="rect">
             <a:avLst/>
@@ -20333,7 +21160,7 @@
         <p:spPr>
           <a:xfrm>
             <a:off x="548640" y="3931920"/>
-            <a:ext cx="3840120" cy="219240"/>
+            <a:ext cx="3839760" cy="218880"/>
           </a:xfrm>
           <a:prstGeom prst="rect">
             <a:avLst/>
@@ -20400,7 +21227,7 @@
         <p:spPr>
           <a:xfrm>
             <a:off x="548640" y="4169520"/>
-            <a:ext cx="3840120" cy="219240"/>
+            <a:ext cx="3839760" cy="218880"/>
           </a:xfrm>
           <a:prstGeom prst="rect">
             <a:avLst/>
@@ -20467,7 +21294,7 @@
         <p:spPr>
           <a:xfrm>
             <a:off x="384120" y="4517280"/>
-            <a:ext cx="54360" cy="658080"/>
+            <a:ext cx="54000" cy="657720"/>
           </a:xfrm>
           <a:prstGeom prst="rect">
             <a:avLst/>
@@ -20493,6 +21320,11 @@
             <a:noAutofit/>
           </a:bodyPr>
           <a:p>
+            <a:pPr>
+              <a:lnSpc>
+                <a:spcPct val="100000"/>
+              </a:lnSpc>
+            </a:pPr>
             <a:endParaRPr b="0" lang="en-US" sz="1800" spc="-1" strike="noStrike">
               <a:solidFill>
                 <a:srgbClr val="ffffff"/>
@@ -20511,7 +21343,7 @@
         <p:spPr>
           <a:xfrm>
             <a:off x="548640" y="4517280"/>
-            <a:ext cx="3840120" cy="200880"/>
+            <a:ext cx="3839760" cy="200520"/>
           </a:xfrm>
           <a:prstGeom prst="rect">
             <a:avLst/>
@@ -20568,7 +21400,7 @@
         <p:spPr>
           <a:xfrm>
             <a:off x="548640" y="4736520"/>
-            <a:ext cx="3840120" cy="219240"/>
+            <a:ext cx="3839760" cy="218880"/>
           </a:xfrm>
           <a:prstGeom prst="rect">
             <a:avLst/>
@@ -20635,7 +21467,7 @@
         <p:spPr>
           <a:xfrm>
             <a:off x="548640" y="4974480"/>
-            <a:ext cx="3840120" cy="219240"/>
+            <a:ext cx="3839760" cy="218880"/>
           </a:xfrm>
           <a:prstGeom prst="rect">
             <a:avLst/>
@@ -20702,7 +21534,7 @@
         <p:spPr>
           <a:xfrm>
             <a:off x="4663440" y="960120"/>
-            <a:ext cx="4160160" cy="3931560"/>
+            <a:ext cx="4159800" cy="3931200"/>
           </a:xfrm>
           <a:prstGeom prst="rect">
             <a:avLst/>
@@ -20735,6 +21567,11 @@
             <a:noAutofit/>
           </a:bodyPr>
           <a:p>
+            <a:pPr>
+              <a:lnSpc>
+                <a:spcPct val="100000"/>
+              </a:lnSpc>
+            </a:pPr>
             <a:endParaRPr b="0" lang="en-US" sz="1800" spc="-1" strike="noStrike">
               <a:solidFill>
                 <a:srgbClr val="ffffff"/>
@@ -20753,7 +21590,7 @@
         <p:spPr>
           <a:xfrm>
             <a:off x="4800600" y="1024200"/>
-            <a:ext cx="3885840" cy="273960"/>
+            <a:ext cx="3885480" cy="273600"/>
           </a:xfrm>
           <a:prstGeom prst="rect">
             <a:avLst/>
@@ -20810,7 +21647,7 @@
         <p:spPr>
           <a:xfrm>
             <a:off x="4736520" y="1389960"/>
-            <a:ext cx="4023000" cy="456840"/>
+            <a:ext cx="4022640" cy="456480"/>
           </a:xfrm>
           <a:prstGeom prst="rect">
             <a:avLst/>
@@ -20836,6 +21673,11 @@
             <a:noAutofit/>
           </a:bodyPr>
           <a:p>
+            <a:pPr>
+              <a:lnSpc>
+                <a:spcPct val="100000"/>
+              </a:lnSpc>
+            </a:pPr>
             <a:endParaRPr b="0" lang="en-US" sz="1800" spc="-1" strike="noStrike">
               <a:solidFill>
                 <a:srgbClr val="ffffff"/>
@@ -20854,7 +21696,7 @@
         <p:spPr>
           <a:xfrm>
             <a:off x="4736520" y="1481400"/>
-            <a:ext cx="45360" cy="273960"/>
+            <a:ext cx="45000" cy="273600"/>
           </a:xfrm>
           <a:prstGeom prst="rect">
             <a:avLst/>
@@ -20880,6 +21722,11 @@
             <a:noAutofit/>
           </a:bodyPr>
           <a:p>
+            <a:pPr>
+              <a:lnSpc>
+                <a:spcPct val="100000"/>
+              </a:lnSpc>
+            </a:pPr>
             <a:endParaRPr b="0" lang="en-US" sz="1800" spc="-1" strike="noStrike">
               <a:solidFill>
                 <a:srgbClr val="000000"/>
@@ -20898,7 +21745,7 @@
         <p:spPr>
           <a:xfrm>
             <a:off x="4864680" y="1444680"/>
-            <a:ext cx="2377080" cy="219240"/>
+            <a:ext cx="2376720" cy="218880"/>
           </a:xfrm>
           <a:prstGeom prst="rect">
             <a:avLst/>
@@ -20955,7 +21802,7 @@
         <p:spPr>
           <a:xfrm>
             <a:off x="4864680" y="1645920"/>
-            <a:ext cx="2377080" cy="182520"/>
+            <a:ext cx="2376720" cy="182160"/>
           </a:xfrm>
           <a:prstGeom prst="rect">
             <a:avLst/>
@@ -21012,7 +21859,7 @@
         <p:spPr>
           <a:xfrm>
             <a:off x="4736520" y="1929240"/>
-            <a:ext cx="4023000" cy="456840"/>
+            <a:ext cx="4022640" cy="456480"/>
           </a:xfrm>
           <a:prstGeom prst="rect">
             <a:avLst/>
@@ -21038,6 +21885,11 @@
             <a:noAutofit/>
           </a:bodyPr>
           <a:p>
+            <a:pPr>
+              <a:lnSpc>
+                <a:spcPct val="100000"/>
+              </a:lnSpc>
+            </a:pPr>
             <a:endParaRPr b="0" lang="en-US" sz="1800" spc="-1" strike="noStrike">
               <a:solidFill>
                 <a:srgbClr val="ffffff"/>
@@ -21056,7 +21908,7 @@
         <p:spPr>
           <a:xfrm>
             <a:off x="4736520" y="2020680"/>
-            <a:ext cx="45360" cy="273960"/>
+            <a:ext cx="45000" cy="273600"/>
           </a:xfrm>
           <a:prstGeom prst="rect">
             <a:avLst/>
@@ -21082,6 +21934,11 @@
             <a:noAutofit/>
           </a:bodyPr>
           <a:p>
+            <a:pPr>
+              <a:lnSpc>
+                <a:spcPct val="100000"/>
+              </a:lnSpc>
+            </a:pPr>
             <a:endParaRPr b="0" lang="en-US" sz="1800" spc="-1" strike="noStrike">
               <a:solidFill>
                 <a:srgbClr val="ffffff"/>
@@ -21100,7 +21957,7 @@
         <p:spPr>
           <a:xfrm>
             <a:off x="4864680" y="1984320"/>
-            <a:ext cx="2377080" cy="219240"/>
+            <a:ext cx="2376720" cy="218880"/>
           </a:xfrm>
           <a:prstGeom prst="rect">
             <a:avLst/>
@@ -21157,7 +22014,7 @@
         <p:spPr>
           <a:xfrm>
             <a:off x="4864680" y="2185560"/>
-            <a:ext cx="2377080" cy="182520"/>
+            <a:ext cx="2376720" cy="182160"/>
           </a:xfrm>
           <a:prstGeom prst="rect">
             <a:avLst/>
@@ -21214,7 +22071,7 @@
         <p:spPr>
           <a:xfrm>
             <a:off x="4736520" y="2468880"/>
-            <a:ext cx="4023000" cy="456840"/>
+            <a:ext cx="4022640" cy="456480"/>
           </a:xfrm>
           <a:prstGeom prst="rect">
             <a:avLst/>
@@ -21240,6 +22097,11 @@
             <a:noAutofit/>
           </a:bodyPr>
           <a:p>
+            <a:pPr>
+              <a:lnSpc>
+                <a:spcPct val="100000"/>
+              </a:lnSpc>
+            </a:pPr>
             <a:endParaRPr b="0" lang="en-US" sz="1800" spc="-1" strike="noStrike">
               <a:solidFill>
                 <a:srgbClr val="ffffff"/>
@@ -21258,7 +22120,7 @@
         <p:spPr>
           <a:xfrm>
             <a:off x="4736520" y="2560320"/>
-            <a:ext cx="45360" cy="273960"/>
+            <a:ext cx="45000" cy="273600"/>
           </a:xfrm>
           <a:prstGeom prst="rect">
             <a:avLst/>
@@ -21284,6 +22146,11 @@
             <a:noAutofit/>
           </a:bodyPr>
           <a:p>
+            <a:pPr>
+              <a:lnSpc>
+                <a:spcPct val="100000"/>
+              </a:lnSpc>
+            </a:pPr>
             <a:endParaRPr b="0" lang="en-US" sz="1800" spc="-1" strike="noStrike">
               <a:solidFill>
                 <a:srgbClr val="ffffff"/>
@@ -21302,7 +22169,7 @@
         <p:spPr>
           <a:xfrm>
             <a:off x="4864680" y="2523600"/>
-            <a:ext cx="2377080" cy="219240"/>
+            <a:ext cx="2376720" cy="218880"/>
           </a:xfrm>
           <a:prstGeom prst="rect">
             <a:avLst/>
@@ -21359,7 +22226,7 @@
         <p:spPr>
           <a:xfrm>
             <a:off x="4864680" y="2724840"/>
-            <a:ext cx="2377080" cy="182520"/>
+            <a:ext cx="2376720" cy="182160"/>
           </a:xfrm>
           <a:prstGeom prst="rect">
             <a:avLst/>
@@ -21416,7 +22283,7 @@
         <p:spPr>
           <a:xfrm>
             <a:off x="4736520" y="3008520"/>
-            <a:ext cx="4023000" cy="456840"/>
+            <a:ext cx="4022640" cy="456480"/>
           </a:xfrm>
           <a:prstGeom prst="rect">
             <a:avLst/>
@@ -21442,6 +22309,11 @@
             <a:noAutofit/>
           </a:bodyPr>
           <a:p>
+            <a:pPr>
+              <a:lnSpc>
+                <a:spcPct val="100000"/>
+              </a:lnSpc>
+            </a:pPr>
             <a:endParaRPr b="0" lang="en-US" sz="1800" spc="-1" strike="noStrike">
               <a:solidFill>
                 <a:srgbClr val="ffffff"/>
@@ -21460,7 +22332,7 @@
         <p:spPr>
           <a:xfrm>
             <a:off x="4736520" y="3099960"/>
-            <a:ext cx="45360" cy="273960"/>
+            <a:ext cx="45000" cy="273600"/>
           </a:xfrm>
           <a:prstGeom prst="rect">
             <a:avLst/>
@@ -21486,6 +22358,11 @@
             <a:noAutofit/>
           </a:bodyPr>
           <a:p>
+            <a:pPr>
+              <a:lnSpc>
+                <a:spcPct val="100000"/>
+              </a:lnSpc>
+            </a:pPr>
             <a:endParaRPr b="0" lang="en-US" sz="1800" spc="-1" strike="noStrike">
               <a:solidFill>
                 <a:srgbClr val="ffffff"/>
@@ -21504,7 +22381,7 @@
         <p:spPr>
           <a:xfrm>
             <a:off x="4864680" y="3063240"/>
-            <a:ext cx="2377080" cy="219240"/>
+            <a:ext cx="2376720" cy="218880"/>
           </a:xfrm>
           <a:prstGeom prst="rect">
             <a:avLst/>
@@ -21561,7 +22438,7 @@
         <p:spPr>
           <a:xfrm>
             <a:off x="4864680" y="3264480"/>
-            <a:ext cx="2377080" cy="182520"/>
+            <a:ext cx="2376720" cy="182160"/>
           </a:xfrm>
           <a:prstGeom prst="rect">
             <a:avLst/>
@@ -21618,7 +22495,7 @@
         <p:spPr>
           <a:xfrm>
             <a:off x="4736520" y="3547800"/>
-            <a:ext cx="4023000" cy="456840"/>
+            <a:ext cx="4022640" cy="456480"/>
           </a:xfrm>
           <a:prstGeom prst="rect">
             <a:avLst/>
@@ -21644,6 +22521,11 @@
             <a:noAutofit/>
           </a:bodyPr>
           <a:p>
+            <a:pPr>
+              <a:lnSpc>
+                <a:spcPct val="100000"/>
+              </a:lnSpc>
+            </a:pPr>
             <a:endParaRPr b="0" lang="en-US" sz="1800" spc="-1" strike="noStrike">
               <a:solidFill>
                 <a:srgbClr val="ffffff"/>
@@ -21662,7 +22544,7 @@
         <p:spPr>
           <a:xfrm>
             <a:off x="4736520" y="3639240"/>
-            <a:ext cx="45360" cy="273960"/>
+            <a:ext cx="45000" cy="273600"/>
           </a:xfrm>
           <a:prstGeom prst="rect">
             <a:avLst/>
@@ -21688,6 +22570,11 @@
             <a:noAutofit/>
           </a:bodyPr>
           <a:p>
+            <a:pPr>
+              <a:lnSpc>
+                <a:spcPct val="100000"/>
+              </a:lnSpc>
+            </a:pPr>
             <a:endParaRPr b="0" lang="en-US" sz="1800" spc="-1" strike="noStrike">
               <a:solidFill>
                 <a:srgbClr val="ffffff"/>
@@ -21706,7 +22593,7 @@
         <p:spPr>
           <a:xfrm>
             <a:off x="4864680" y="3602880"/>
-            <a:ext cx="2377080" cy="219240"/>
+            <a:ext cx="2376720" cy="218880"/>
           </a:xfrm>
           <a:prstGeom prst="rect">
             <a:avLst/>
@@ -21763,7 +22650,7 @@
         <p:spPr>
           <a:xfrm>
             <a:off x="4864680" y="3803760"/>
-            <a:ext cx="2377080" cy="182520"/>
+            <a:ext cx="2376720" cy="182160"/>
           </a:xfrm>
           <a:prstGeom prst="rect">
             <a:avLst/>
@@ -21820,7 +22707,7 @@
         <p:spPr>
           <a:xfrm>
             <a:off x="4736520" y="4087440"/>
-            <a:ext cx="4023000" cy="456840"/>
+            <a:ext cx="4022640" cy="456480"/>
           </a:xfrm>
           <a:prstGeom prst="rect">
             <a:avLst/>
@@ -21846,6 +22733,11 @@
             <a:noAutofit/>
           </a:bodyPr>
           <a:p>
+            <a:pPr>
+              <a:lnSpc>
+                <a:spcPct val="100000"/>
+              </a:lnSpc>
+            </a:pPr>
             <a:endParaRPr b="0" lang="en-US" sz="1800" spc="-1" strike="noStrike">
               <a:solidFill>
                 <a:srgbClr val="ffffff"/>
@@ -21864,7 +22756,7 @@
         <p:spPr>
           <a:xfrm>
             <a:off x="4736520" y="4178880"/>
-            <a:ext cx="45360" cy="273960"/>
+            <a:ext cx="45000" cy="273600"/>
           </a:xfrm>
           <a:prstGeom prst="rect">
             <a:avLst/>
@@ -21890,6 +22782,11 @@
             <a:noAutofit/>
           </a:bodyPr>
           <a:p>
+            <a:pPr>
+              <a:lnSpc>
+                <a:spcPct val="100000"/>
+              </a:lnSpc>
+            </a:pPr>
             <a:endParaRPr b="0" lang="en-US" sz="1800" spc="-1" strike="noStrike">
               <a:solidFill>
                 <a:srgbClr val="ffffff"/>
@@ -21908,7 +22805,7 @@
         <p:spPr>
           <a:xfrm>
             <a:off x="4864680" y="4142160"/>
-            <a:ext cx="2377080" cy="219240"/>
+            <a:ext cx="2376720" cy="218880"/>
           </a:xfrm>
           <a:prstGeom prst="rect">
             <a:avLst/>
@@ -21965,7 +22862,7 @@
         <p:spPr>
           <a:xfrm>
             <a:off x="4864680" y="4343400"/>
-            <a:ext cx="2377080" cy="182520"/>
+            <a:ext cx="2376720" cy="182160"/>
           </a:xfrm>
           <a:prstGeom prst="rect">
             <a:avLst/>
@@ -22022,7 +22919,7 @@
         <p:spPr>
           <a:xfrm>
             <a:off x="4736520" y="4663440"/>
-            <a:ext cx="4023000" cy="228240"/>
+            <a:ext cx="4022640" cy="227880"/>
           </a:xfrm>
           <a:prstGeom prst="rect">
             <a:avLst/>
@@ -22052,6 +22949,11 @@
             <a:noAutofit/>
           </a:bodyPr>
           <a:p>
+            <a:pPr>
+              <a:lnSpc>
+                <a:spcPct val="100000"/>
+              </a:lnSpc>
+            </a:pPr>
             <a:endParaRPr b="0" lang="en-US" sz="1800" spc="-1" strike="noStrike">
               <a:solidFill>
                 <a:srgbClr val="ffffff"/>
@@ -22070,7 +22972,7 @@
         <p:spPr>
           <a:xfrm>
             <a:off x="4800600" y="4663440"/>
-            <a:ext cx="3931560" cy="228240"/>
+            <a:ext cx="3931200" cy="227880"/>
           </a:xfrm>
           <a:prstGeom prst="rect">
             <a:avLst/>
@@ -22164,7 +23066,7 @@
         <p:spPr>
           <a:xfrm>
             <a:off x="320040" y="201240"/>
-            <a:ext cx="63720" cy="566640"/>
+            <a:ext cx="63360" cy="566280"/>
           </a:xfrm>
           <a:prstGeom prst="rect">
             <a:avLst/>
@@ -22190,6 +23092,11 @@
             <a:noAutofit/>
           </a:bodyPr>
           <a:p>
+            <a:pPr>
+              <a:lnSpc>
+                <a:spcPct val="100000"/>
+              </a:lnSpc>
+            </a:pPr>
             <a:endParaRPr b="0" lang="en-US" sz="1800" spc="-1" strike="noStrike">
               <a:solidFill>
                 <a:srgbClr val="ffffff"/>
@@ -22208,7 +23115,7 @@
         <p:spPr>
           <a:xfrm>
             <a:off x="475560" y="164520"/>
-            <a:ext cx="8320680" cy="658080"/>
+            <a:ext cx="8320320" cy="657720"/>
           </a:xfrm>
           <a:prstGeom prst="rect">
             <a:avLst/>
@@ -22308,7 +23215,7 @@
         <p:spPr>
           <a:xfrm>
             <a:off x="7223760" y="201240"/>
-            <a:ext cx="1645560" cy="383760"/>
+            <a:ext cx="1645200" cy="383400"/>
           </a:xfrm>
           <a:prstGeom prst="rect">
             <a:avLst/>
@@ -22359,7 +23266,7 @@
         <p:spPr>
           <a:xfrm>
             <a:off x="320040" y="960120"/>
-            <a:ext cx="4160160" cy="2057040"/>
+            <a:ext cx="4159800" cy="2056680"/>
           </a:xfrm>
           <a:prstGeom prst="rect">
             <a:avLst/>
@@ -22378,7 +23285,7 @@
         <p:spPr>
           <a:xfrm>
             <a:off x="320040" y="960120"/>
-            <a:ext cx="4160160" cy="2057040"/>
+            <a:ext cx="4159800" cy="2056680"/>
           </a:xfrm>
           <a:prstGeom prst="rect">
             <a:avLst/>
@@ -22402,6 +23309,11 @@
             <a:noAutofit/>
           </a:bodyPr>
           <a:p>
+            <a:pPr>
+              <a:lnSpc>
+                <a:spcPct val="100000"/>
+              </a:lnSpc>
+            </a:pPr>
             <a:endParaRPr b="0" lang="en-US" sz="1800" spc="-1" strike="noStrike">
               <a:solidFill>
                 <a:srgbClr val="ffffff"/>
@@ -22420,7 +23332,7 @@
         <p:spPr>
           <a:xfrm>
             <a:off x="320040" y="3035880"/>
-            <a:ext cx="4160160" cy="182520"/>
+            <a:ext cx="4159800" cy="182160"/>
           </a:xfrm>
           <a:prstGeom prst="rect">
             <a:avLst/>
@@ -22481,7 +23393,7 @@
         <p:spPr>
           <a:xfrm>
             <a:off x="320040" y="3291840"/>
-            <a:ext cx="2011320" cy="1691280"/>
+            <a:ext cx="2010960" cy="1690920"/>
           </a:xfrm>
           <a:prstGeom prst="rect">
             <a:avLst/>
@@ -22500,7 +23412,7 @@
         <p:spPr>
           <a:xfrm>
             <a:off x="320040" y="3291840"/>
-            <a:ext cx="2011320" cy="1691280"/>
+            <a:ext cx="2010960" cy="1690920"/>
           </a:xfrm>
           <a:prstGeom prst="rect">
             <a:avLst/>
@@ -22524,6 +23436,11 @@
             <a:noAutofit/>
           </a:bodyPr>
           <a:p>
+            <a:pPr>
+              <a:lnSpc>
+                <a:spcPct val="100000"/>
+              </a:lnSpc>
+            </a:pPr>
             <a:endParaRPr b="0" lang="en-US" sz="1800" spc="-1" strike="noStrike">
               <a:solidFill>
                 <a:srgbClr val="ffffff"/>
@@ -22546,7 +23463,7 @@
         <p:spPr>
           <a:xfrm>
             <a:off x="2423160" y="3291840"/>
-            <a:ext cx="2011320" cy="1691280"/>
+            <a:ext cx="2010960" cy="1690920"/>
           </a:xfrm>
           <a:prstGeom prst="rect">
             <a:avLst/>
@@ -22565,7 +23482,7 @@
         <p:spPr>
           <a:xfrm>
             <a:off x="2423160" y="3291840"/>
-            <a:ext cx="2011320" cy="1691280"/>
+            <a:ext cx="2010960" cy="1690920"/>
           </a:xfrm>
           <a:prstGeom prst="rect">
             <a:avLst/>
@@ -22589,6 +23506,11 @@
             <a:noAutofit/>
           </a:bodyPr>
           <a:p>
+            <a:pPr>
+              <a:lnSpc>
+                <a:spcPct val="100000"/>
+              </a:lnSpc>
+            </a:pPr>
             <a:endParaRPr b="0" lang="en-US" sz="1800" spc="-1" strike="noStrike">
               <a:solidFill>
                 <a:srgbClr val="ffffff"/>
@@ -22607,7 +23529,7 @@
         <p:spPr>
           <a:xfrm>
             <a:off x="320040" y="5001840"/>
-            <a:ext cx="2011320" cy="155160"/>
+            <a:ext cx="2010960" cy="154800"/>
           </a:xfrm>
           <a:prstGeom prst="rect">
             <a:avLst/>
@@ -22664,7 +23586,7 @@
         <p:spPr>
           <a:xfrm>
             <a:off x="2423160" y="5001840"/>
-            <a:ext cx="2011320" cy="155160"/>
+            <a:ext cx="2010960" cy="154800"/>
           </a:xfrm>
           <a:prstGeom prst="rect">
             <a:avLst/>
@@ -22721,7 +23643,7 @@
         <p:spPr>
           <a:xfrm>
             <a:off x="4663440" y="960120"/>
-            <a:ext cx="4160160" cy="3913200"/>
+            <a:ext cx="4159800" cy="3912840"/>
           </a:xfrm>
           <a:prstGeom prst="rect">
             <a:avLst/>
@@ -22754,6 +23676,11 @@
             <a:noAutofit/>
           </a:bodyPr>
           <a:p>
+            <a:pPr>
+              <a:lnSpc>
+                <a:spcPct val="100000"/>
+              </a:lnSpc>
+            </a:pPr>
             <a:endParaRPr b="0" lang="en-US" sz="1800" spc="-1" strike="noStrike">
               <a:solidFill>
                 <a:srgbClr val="ffffff"/>
@@ -22772,7 +23699,7 @@
         <p:spPr>
           <a:xfrm>
             <a:off x="4800600" y="1024200"/>
-            <a:ext cx="3885840" cy="273960"/>
+            <a:ext cx="3885480" cy="273600"/>
           </a:xfrm>
           <a:prstGeom prst="rect">
             <a:avLst/>
@@ -22829,7 +23756,7 @@
         <p:spPr>
           <a:xfrm>
             <a:off x="4800600" y="1353240"/>
-            <a:ext cx="2102760" cy="273960"/>
+            <a:ext cx="2102400" cy="273600"/>
           </a:xfrm>
           <a:prstGeom prst="rect">
             <a:avLst/>
@@ -22857,6 +23784,11 @@
             <a:noAutofit/>
           </a:bodyPr>
           <a:p>
+            <a:pPr>
+              <a:lnSpc>
+                <a:spcPct val="100000"/>
+              </a:lnSpc>
+            </a:pPr>
             <a:endParaRPr b="0" lang="en-US" sz="1800" spc="-1" strike="noStrike">
               <a:solidFill>
                 <a:srgbClr val="ffffff"/>
@@ -22875,7 +23807,7 @@
         <p:spPr>
           <a:xfrm>
             <a:off x="4800600" y="1353240"/>
-            <a:ext cx="2102760" cy="273960"/>
+            <a:ext cx="2102400" cy="273600"/>
           </a:xfrm>
           <a:prstGeom prst="rect">
             <a:avLst/>
@@ -22932,7 +23864,7 @@
         <p:spPr>
           <a:xfrm>
             <a:off x="6995160" y="1353240"/>
-            <a:ext cx="1032840" cy="273960"/>
+            <a:ext cx="1032480" cy="273600"/>
           </a:xfrm>
           <a:prstGeom prst="rect">
             <a:avLst/>
@@ -22960,6 +23892,11 @@
             <a:noAutofit/>
           </a:bodyPr>
           <a:p>
+            <a:pPr>
+              <a:lnSpc>
+                <a:spcPct val="100000"/>
+              </a:lnSpc>
+            </a:pPr>
             <a:endParaRPr b="0" lang="en-US" sz="1800" spc="-1" strike="noStrike">
               <a:solidFill>
                 <a:srgbClr val="ffffff"/>
@@ -22978,7 +23915,7 @@
         <p:spPr>
           <a:xfrm>
             <a:off x="6995160" y="1353240"/>
-            <a:ext cx="1032840" cy="273960"/>
+            <a:ext cx="1032480" cy="273600"/>
           </a:xfrm>
           <a:prstGeom prst="rect">
             <a:avLst/>
@@ -23035,7 +23972,7 @@
         <p:spPr>
           <a:xfrm>
             <a:off x="8119800" y="1353240"/>
-            <a:ext cx="703800" cy="273960"/>
+            <a:ext cx="703440" cy="273600"/>
           </a:xfrm>
           <a:prstGeom prst="rect">
             <a:avLst/>
@@ -23063,6 +24000,11 @@
             <a:noAutofit/>
           </a:bodyPr>
           <a:p>
+            <a:pPr>
+              <a:lnSpc>
+                <a:spcPct val="100000"/>
+              </a:lnSpc>
+            </a:pPr>
             <a:endParaRPr b="0" lang="en-US" sz="1800" spc="-1" strike="noStrike">
               <a:solidFill>
                 <a:srgbClr val="ffffff"/>
@@ -23081,7 +24023,7 @@
         <p:spPr>
           <a:xfrm>
             <a:off x="8119800" y="1353240"/>
-            <a:ext cx="703800" cy="273960"/>
+            <a:ext cx="703440" cy="273600"/>
           </a:xfrm>
           <a:prstGeom prst="rect">
             <a:avLst/>
@@ -23138,7 +24080,7 @@
         <p:spPr>
           <a:xfrm>
             <a:off x="4736520" y="1664280"/>
-            <a:ext cx="4023000" cy="310680"/>
+            <a:ext cx="4022640" cy="310320"/>
           </a:xfrm>
           <a:prstGeom prst="rect">
             <a:avLst/>
@@ -23164,6 +24106,11 @@
             <a:noAutofit/>
           </a:bodyPr>
           <a:p>
+            <a:pPr>
+              <a:lnSpc>
+                <a:spcPct val="100000"/>
+              </a:lnSpc>
+            </a:pPr>
             <a:endParaRPr b="0" lang="en-US" sz="1800" spc="-1" strike="noStrike">
               <a:solidFill>
                 <a:srgbClr val="ffffff"/>
@@ -23182,7 +24129,7 @@
         <p:spPr>
           <a:xfrm>
             <a:off x="4800600" y="1700640"/>
-            <a:ext cx="2102760" cy="237240"/>
+            <a:ext cx="2102400" cy="236880"/>
           </a:xfrm>
           <a:prstGeom prst="rect">
             <a:avLst/>
@@ -23239,7 +24186,7 @@
         <p:spPr>
           <a:xfrm>
             <a:off x="6995160" y="1700640"/>
-            <a:ext cx="1032840" cy="237240"/>
+            <a:ext cx="1032480" cy="236880"/>
           </a:xfrm>
           <a:prstGeom prst="rect">
             <a:avLst/>
@@ -23296,7 +24243,7 @@
         <p:spPr>
           <a:xfrm>
             <a:off x="8119800" y="1700640"/>
-            <a:ext cx="703800" cy="237240"/>
+            <a:ext cx="703440" cy="236880"/>
           </a:xfrm>
           <a:prstGeom prst="rect">
             <a:avLst/>
@@ -23353,7 +24300,7 @@
         <p:spPr>
           <a:xfrm>
             <a:off x="4736520" y="2002680"/>
-            <a:ext cx="4023000" cy="310680"/>
+            <a:ext cx="4022640" cy="310320"/>
           </a:xfrm>
           <a:prstGeom prst="rect">
             <a:avLst/>
@@ -23379,6 +24326,11 @@
             <a:noAutofit/>
           </a:bodyPr>
           <a:p>
+            <a:pPr>
+              <a:lnSpc>
+                <a:spcPct val="100000"/>
+              </a:lnSpc>
+            </a:pPr>
             <a:endParaRPr b="0" lang="en-US" sz="1800" spc="-1" strike="noStrike">
               <a:solidFill>
                 <a:srgbClr val="ffffff"/>
@@ -23397,7 +24349,7 @@
         <p:spPr>
           <a:xfrm>
             <a:off x="4800600" y="2039040"/>
-            <a:ext cx="2102760" cy="237240"/>
+            <a:ext cx="2102400" cy="236880"/>
           </a:xfrm>
           <a:prstGeom prst="rect">
             <a:avLst/>
@@ -23454,7 +24406,7 @@
         <p:spPr>
           <a:xfrm>
             <a:off x="6995160" y="2039040"/>
-            <a:ext cx="1032840" cy="237240"/>
+            <a:ext cx="1032480" cy="236880"/>
           </a:xfrm>
           <a:prstGeom prst="rect">
             <a:avLst/>
@@ -23511,7 +24463,7 @@
         <p:spPr>
           <a:xfrm>
             <a:off x="8119800" y="2039040"/>
-            <a:ext cx="703800" cy="237240"/>
+            <a:ext cx="703440" cy="236880"/>
           </a:xfrm>
           <a:prstGeom prst="rect">
             <a:avLst/>
@@ -23568,7 +24520,7 @@
         <p:spPr>
           <a:xfrm>
             <a:off x="4736520" y="2340720"/>
-            <a:ext cx="4023000" cy="310680"/>
+            <a:ext cx="4022640" cy="310320"/>
           </a:xfrm>
           <a:prstGeom prst="rect">
             <a:avLst/>
@@ -23594,6 +24546,11 @@
             <a:noAutofit/>
           </a:bodyPr>
           <a:p>
+            <a:pPr>
+              <a:lnSpc>
+                <a:spcPct val="100000"/>
+              </a:lnSpc>
+            </a:pPr>
             <a:endParaRPr b="0" lang="en-US" sz="1800" spc="-1" strike="noStrike">
               <a:solidFill>
                 <a:srgbClr val="ffffff"/>
@@ -23612,7 +24569,7 @@
         <p:spPr>
           <a:xfrm>
             <a:off x="4800600" y="2377440"/>
-            <a:ext cx="2102760" cy="237240"/>
+            <a:ext cx="2102400" cy="236880"/>
           </a:xfrm>
           <a:prstGeom prst="rect">
             <a:avLst/>
@@ -23669,7 +24626,7 @@
         <p:spPr>
           <a:xfrm>
             <a:off x="6995160" y="2377440"/>
-            <a:ext cx="1032840" cy="237240"/>
+            <a:ext cx="1032480" cy="236880"/>
           </a:xfrm>
           <a:prstGeom prst="rect">
             <a:avLst/>
@@ -23726,7 +24683,7 @@
         <p:spPr>
           <a:xfrm>
             <a:off x="8119800" y="2377440"/>
-            <a:ext cx="703800" cy="237240"/>
+            <a:ext cx="703440" cy="236880"/>
           </a:xfrm>
           <a:prstGeom prst="rect">
             <a:avLst/>
@@ -23783,7 +24740,7 @@
         <p:spPr>
           <a:xfrm>
             <a:off x="4736520" y="2679120"/>
-            <a:ext cx="4023000" cy="310680"/>
+            <a:ext cx="4022640" cy="310320"/>
           </a:xfrm>
           <a:prstGeom prst="rect">
             <a:avLst/>
@@ -23809,6 +24766,11 @@
             <a:noAutofit/>
           </a:bodyPr>
           <a:p>
+            <a:pPr>
+              <a:lnSpc>
+                <a:spcPct val="100000"/>
+              </a:lnSpc>
+            </a:pPr>
             <a:endParaRPr b="0" lang="en-US" sz="1800" spc="-1" strike="noStrike">
               <a:solidFill>
                 <a:srgbClr val="ffffff"/>
@@ -23827,7 +24789,7 @@
         <p:spPr>
           <a:xfrm>
             <a:off x="4800600" y="2715840"/>
-            <a:ext cx="2102760" cy="237240"/>
+            <a:ext cx="2102400" cy="236880"/>
           </a:xfrm>
           <a:prstGeom prst="rect">
             <a:avLst/>
@@ -23884,7 +24846,7 @@
         <p:spPr>
           <a:xfrm>
             <a:off x="6995160" y="2715840"/>
-            <a:ext cx="1032840" cy="237240"/>
+            <a:ext cx="1032480" cy="236880"/>
           </a:xfrm>
           <a:prstGeom prst="rect">
             <a:avLst/>
@@ -23941,7 +24903,7 @@
         <p:spPr>
           <a:xfrm>
             <a:off x="8119800" y="2715840"/>
-            <a:ext cx="703800" cy="237240"/>
+            <a:ext cx="703440" cy="236880"/>
           </a:xfrm>
           <a:prstGeom prst="rect">
             <a:avLst/>
@@ -23998,7 +24960,7 @@
         <p:spPr>
           <a:xfrm>
             <a:off x="4736520" y="3017520"/>
-            <a:ext cx="4023000" cy="310680"/>
+            <a:ext cx="4022640" cy="310320"/>
           </a:xfrm>
           <a:prstGeom prst="rect">
             <a:avLst/>
@@ -24024,6 +24986,11 @@
             <a:noAutofit/>
           </a:bodyPr>
           <a:p>
+            <a:pPr>
+              <a:lnSpc>
+                <a:spcPct val="100000"/>
+              </a:lnSpc>
+            </a:pPr>
             <a:endParaRPr b="0" lang="en-US" sz="1800" spc="-1" strike="noStrike">
               <a:solidFill>
                 <a:srgbClr val="ffffff"/>
@@ -24042,7 +25009,7 @@
         <p:spPr>
           <a:xfrm>
             <a:off x="4800600" y="3054240"/>
-            <a:ext cx="2102760" cy="237240"/>
+            <a:ext cx="2102400" cy="236880"/>
           </a:xfrm>
           <a:prstGeom prst="rect">
             <a:avLst/>
@@ -24099,7 +25066,7 @@
         <p:spPr>
           <a:xfrm>
             <a:off x="6995160" y="3054240"/>
-            <a:ext cx="1032840" cy="237240"/>
+            <a:ext cx="1032480" cy="236880"/>
           </a:xfrm>
           <a:prstGeom prst="rect">
             <a:avLst/>
@@ -24156,7 +25123,7 @@
         <p:spPr>
           <a:xfrm>
             <a:off x="8119800" y="3054240"/>
-            <a:ext cx="703800" cy="237240"/>
+            <a:ext cx="703440" cy="236880"/>
           </a:xfrm>
           <a:prstGeom prst="rect">
             <a:avLst/>
@@ -24213,7 +25180,7 @@
         <p:spPr>
           <a:xfrm>
             <a:off x="4736520" y="3355920"/>
-            <a:ext cx="4023000" cy="310680"/>
+            <a:ext cx="4022640" cy="310320"/>
           </a:xfrm>
           <a:prstGeom prst="rect">
             <a:avLst/>
@@ -24239,6 +25206,11 @@
             <a:noAutofit/>
           </a:bodyPr>
           <a:p>
+            <a:pPr>
+              <a:lnSpc>
+                <a:spcPct val="100000"/>
+              </a:lnSpc>
+            </a:pPr>
             <a:endParaRPr b="0" lang="en-US" sz="1800" spc="-1" strike="noStrike">
               <a:solidFill>
                 <a:srgbClr val="ffffff"/>
@@ -24257,7 +25229,7 @@
         <p:spPr>
           <a:xfrm>
             <a:off x="4800600" y="3392280"/>
-            <a:ext cx="2102760" cy="237240"/>
+            <a:ext cx="2102400" cy="236880"/>
           </a:xfrm>
           <a:prstGeom prst="rect">
             <a:avLst/>
@@ -24314,7 +25286,7 @@
         <p:spPr>
           <a:xfrm>
             <a:off x="6995160" y="3392280"/>
-            <a:ext cx="1032840" cy="237240"/>
+            <a:ext cx="1032480" cy="236880"/>
           </a:xfrm>
           <a:prstGeom prst="rect">
             <a:avLst/>
@@ -24371,7 +25343,7 @@
         <p:spPr>
           <a:xfrm>
             <a:off x="8119800" y="3392280"/>
-            <a:ext cx="703800" cy="237240"/>
+            <a:ext cx="703440" cy="236880"/>
           </a:xfrm>
           <a:prstGeom prst="rect">
             <a:avLst/>
@@ -24428,7 +25400,7 @@
         <p:spPr>
           <a:xfrm>
             <a:off x="4736520" y="3694320"/>
-            <a:ext cx="4023000" cy="310680"/>
+            <a:ext cx="4022640" cy="310320"/>
           </a:xfrm>
           <a:prstGeom prst="rect">
             <a:avLst/>
@@ -24454,6 +25426,11 @@
             <a:noAutofit/>
           </a:bodyPr>
           <a:p>
+            <a:pPr>
+              <a:lnSpc>
+                <a:spcPct val="100000"/>
+              </a:lnSpc>
+            </a:pPr>
             <a:endParaRPr b="0" lang="en-US" sz="1800" spc="-1" strike="noStrike">
               <a:solidFill>
                 <a:srgbClr val="ffffff"/>
@@ -24472,7 +25449,7 @@
         <p:spPr>
           <a:xfrm>
             <a:off x="4800600" y="3730680"/>
-            <a:ext cx="2102760" cy="237240"/>
+            <a:ext cx="2102400" cy="236880"/>
           </a:xfrm>
           <a:prstGeom prst="rect">
             <a:avLst/>
@@ -24529,7 +25506,7 @@
         <p:spPr>
           <a:xfrm>
             <a:off x="6995160" y="3730680"/>
-            <a:ext cx="1032840" cy="237240"/>
+            <a:ext cx="1032480" cy="236880"/>
           </a:xfrm>
           <a:prstGeom prst="rect">
             <a:avLst/>
@@ -24586,7 +25563,7 @@
         <p:spPr>
           <a:xfrm>
             <a:off x="8119800" y="3730680"/>
-            <a:ext cx="703800" cy="237240"/>
+            <a:ext cx="703440" cy="236880"/>
           </a:xfrm>
           <a:prstGeom prst="rect">
             <a:avLst/>
@@ -24643,7 +25620,7 @@
         <p:spPr>
           <a:xfrm>
             <a:off x="4736520" y="4032360"/>
-            <a:ext cx="4023000" cy="310680"/>
+            <a:ext cx="4022640" cy="310320"/>
           </a:xfrm>
           <a:prstGeom prst="rect">
             <a:avLst/>
@@ -24669,6 +25646,11 @@
             <a:noAutofit/>
           </a:bodyPr>
           <a:p>
+            <a:pPr>
+              <a:lnSpc>
+                <a:spcPct val="100000"/>
+              </a:lnSpc>
+            </a:pPr>
             <a:endParaRPr b="0" lang="en-US" sz="1800" spc="-1" strike="noStrike">
               <a:solidFill>
                 <a:srgbClr val="ffffff"/>
@@ -24687,7 +25669,7 @@
         <p:spPr>
           <a:xfrm>
             <a:off x="4800600" y="4069080"/>
-            <a:ext cx="2102760" cy="237240"/>
+            <a:ext cx="2102400" cy="236880"/>
           </a:xfrm>
           <a:prstGeom prst="rect">
             <a:avLst/>
@@ -24744,7 +25726,7 @@
         <p:spPr>
           <a:xfrm>
             <a:off x="6995160" y="4069080"/>
-            <a:ext cx="1032840" cy="237240"/>
+            <a:ext cx="1032480" cy="236880"/>
           </a:xfrm>
           <a:prstGeom prst="rect">
             <a:avLst/>
@@ -24801,7 +25783,7 @@
         <p:spPr>
           <a:xfrm>
             <a:off x="8119800" y="4069080"/>
-            <a:ext cx="703800" cy="237240"/>
+            <a:ext cx="703440" cy="236880"/>
           </a:xfrm>
           <a:prstGeom prst="rect">
             <a:avLst/>
@@ -24858,7 +25840,7 @@
         <p:spPr>
           <a:xfrm>
             <a:off x="4736520" y="4700160"/>
-            <a:ext cx="4023000" cy="200880"/>
+            <a:ext cx="4022640" cy="200520"/>
           </a:xfrm>
           <a:prstGeom prst="rect">
             <a:avLst/>
@@ -24888,6 +25870,11 @@
             <a:noAutofit/>
           </a:bodyPr>
           <a:p>
+            <a:pPr>
+              <a:lnSpc>
+                <a:spcPct val="100000"/>
+              </a:lnSpc>
+            </a:pPr>
             <a:endParaRPr b="0" lang="en-US" sz="1800" spc="-1" strike="noStrike">
               <a:solidFill>
                 <a:srgbClr val="ffffff"/>
@@ -24906,7 +25893,7 @@
         <p:spPr>
           <a:xfrm>
             <a:off x="4800600" y="4700160"/>
-            <a:ext cx="3931560" cy="200880"/>
+            <a:ext cx="3931200" cy="200520"/>
           </a:xfrm>
           <a:prstGeom prst="rect">
             <a:avLst/>
@@ -25000,7 +25987,7 @@
         <p:spPr>
           <a:xfrm>
             <a:off x="320040" y="201240"/>
-            <a:ext cx="63720" cy="566640"/>
+            <a:ext cx="63360" cy="566280"/>
           </a:xfrm>
           <a:prstGeom prst="rect">
             <a:avLst/>
@@ -25026,6 +26013,11 @@
             <a:noAutofit/>
           </a:bodyPr>
           <a:p>
+            <a:pPr>
+              <a:lnSpc>
+                <a:spcPct val="100000"/>
+              </a:lnSpc>
+            </a:pPr>
             <a:endParaRPr b="0" lang="en-US" sz="1800" spc="-1" strike="noStrike">
               <a:solidFill>
                 <a:srgbClr val="ffffff"/>
@@ -25044,7 +26036,7 @@
         <p:spPr>
           <a:xfrm>
             <a:off x="475560" y="164520"/>
-            <a:ext cx="8320680" cy="658080"/>
+            <a:ext cx="8320320" cy="657720"/>
           </a:xfrm>
           <a:prstGeom prst="rect">
             <a:avLst/>
@@ -25144,7 +26136,7 @@
         <p:spPr>
           <a:xfrm>
             <a:off x="7223760" y="201240"/>
-            <a:ext cx="1645560" cy="383760"/>
+            <a:ext cx="1645200" cy="383400"/>
           </a:xfrm>
           <a:prstGeom prst="rect">
             <a:avLst/>
@@ -25172,6 +26164,11 @@
             <a:noAutofit/>
           </a:bodyPr>
           <a:p>
+            <a:pPr>
+              <a:lnSpc>
+                <a:spcPct val="100000"/>
+              </a:lnSpc>
+            </a:pPr>
             <a:endParaRPr b="0" lang="en-US" sz="1800" spc="-1" strike="noStrike">
               <a:solidFill>
                 <a:srgbClr val="ffffff"/>
@@ -25190,7 +26187,7 @@
         <p:spPr>
           <a:xfrm>
             <a:off x="7223760" y="201240"/>
-            <a:ext cx="1645560" cy="383760"/>
+            <a:ext cx="1645200" cy="383400"/>
           </a:xfrm>
           <a:prstGeom prst="rect">
             <a:avLst/>
@@ -25247,7 +26244,7 @@
         <p:spPr>
           <a:xfrm>
             <a:off x="365760" y="960120"/>
-            <a:ext cx="1919880" cy="840960"/>
+            <a:ext cx="1919520" cy="840600"/>
           </a:xfrm>
           <a:prstGeom prst="rect">
             <a:avLst/>
@@ -25280,6 +26277,11 @@
             <a:noAutofit/>
           </a:bodyPr>
           <a:p>
+            <a:pPr>
+              <a:lnSpc>
+                <a:spcPct val="100000"/>
+              </a:lnSpc>
+            </a:pPr>
             <a:endParaRPr b="0" lang="en-US" sz="1800" spc="-1" strike="noStrike">
               <a:solidFill>
                 <a:srgbClr val="ffffff"/>
@@ -25298,7 +26300,7 @@
         <p:spPr>
           <a:xfrm>
             <a:off x="365760" y="960120"/>
-            <a:ext cx="1919880" cy="54360"/>
+            <a:ext cx="1919520" cy="54000"/>
           </a:xfrm>
           <a:prstGeom prst="rect">
             <a:avLst/>
@@ -25324,6 +26326,11 @@
             <a:noAutofit/>
           </a:bodyPr>
           <a:p>
+            <a:pPr>
+              <a:lnSpc>
+                <a:spcPct val="100000"/>
+              </a:lnSpc>
+            </a:pPr>
             <a:endParaRPr b="0" lang="en-US" sz="1800" spc="-1" strike="noStrike">
               <a:solidFill>
                 <a:srgbClr val="ffffff"/>
@@ -25342,7 +26349,7 @@
         <p:spPr>
           <a:xfrm>
             <a:off x="411480" y="1051560"/>
-            <a:ext cx="1828440" cy="456840"/>
+            <a:ext cx="1828080" cy="456480"/>
           </a:xfrm>
           <a:prstGeom prst="rect">
             <a:avLst/>
@@ -25425,7 +26432,7 @@
         <p:spPr>
           <a:xfrm>
             <a:off x="411480" y="1554480"/>
-            <a:ext cx="1828440" cy="200880"/>
+            <a:ext cx="1828080" cy="200520"/>
           </a:xfrm>
           <a:prstGeom prst="rect">
             <a:avLst/>
@@ -25482,7 +26489,7 @@
         <p:spPr>
           <a:xfrm>
             <a:off x="2304360" y="1188720"/>
-            <a:ext cx="237240" cy="347040"/>
+            <a:ext cx="236880" cy="346680"/>
           </a:xfrm>
           <a:prstGeom prst="rect">
             <a:avLst/>
@@ -25539,7 +26546,7 @@
         <p:spPr>
           <a:xfrm>
             <a:off x="2560320" y="960120"/>
-            <a:ext cx="1919880" cy="840960"/>
+            <a:ext cx="1919520" cy="840600"/>
           </a:xfrm>
           <a:prstGeom prst="rect">
             <a:avLst/>
@@ -25572,6 +26579,11 @@
             <a:noAutofit/>
           </a:bodyPr>
           <a:p>
+            <a:pPr>
+              <a:lnSpc>
+                <a:spcPct val="100000"/>
+              </a:lnSpc>
+            </a:pPr>
             <a:endParaRPr b="0" lang="en-US" sz="1800" spc="-1" strike="noStrike">
               <a:solidFill>
                 <a:srgbClr val="ffffff"/>
@@ -25590,7 +26602,7 @@
         <p:spPr>
           <a:xfrm>
             <a:off x="2560320" y="960120"/>
-            <a:ext cx="1919880" cy="54360"/>
+            <a:ext cx="1919520" cy="54000"/>
           </a:xfrm>
           <a:prstGeom prst="rect">
             <a:avLst/>
@@ -25616,6 +26628,11 @@
             <a:noAutofit/>
           </a:bodyPr>
           <a:p>
+            <a:pPr>
+              <a:lnSpc>
+                <a:spcPct val="100000"/>
+              </a:lnSpc>
+            </a:pPr>
             <a:endParaRPr b="0" lang="en-US" sz="1800" spc="-1" strike="noStrike">
               <a:solidFill>
                 <a:srgbClr val="ffffff"/>
@@ -25634,7 +26651,7 @@
         <p:spPr>
           <a:xfrm>
             <a:off x="2606040" y="1051560"/>
-            <a:ext cx="1828440" cy="456840"/>
+            <a:ext cx="1828080" cy="456480"/>
           </a:xfrm>
           <a:prstGeom prst="rect">
             <a:avLst/>
@@ -25717,7 +26734,7 @@
         <p:spPr>
           <a:xfrm>
             <a:off x="2606040" y="1554480"/>
-            <a:ext cx="1828440" cy="200880"/>
+            <a:ext cx="1828080" cy="200520"/>
           </a:xfrm>
           <a:prstGeom prst="rect">
             <a:avLst/>
@@ -25774,7 +26791,7 @@
         <p:spPr>
           <a:xfrm>
             <a:off x="4498920" y="1188720"/>
-            <a:ext cx="237240" cy="347040"/>
+            <a:ext cx="236880" cy="346680"/>
           </a:xfrm>
           <a:prstGeom prst="rect">
             <a:avLst/>
@@ -25831,7 +26848,7 @@
         <p:spPr>
           <a:xfrm>
             <a:off x="4754880" y="960120"/>
-            <a:ext cx="1919880" cy="840960"/>
+            <a:ext cx="1919520" cy="840600"/>
           </a:xfrm>
           <a:prstGeom prst="rect">
             <a:avLst/>
@@ -25864,6 +26881,11 @@
             <a:noAutofit/>
           </a:bodyPr>
           <a:p>
+            <a:pPr>
+              <a:lnSpc>
+                <a:spcPct val="100000"/>
+              </a:lnSpc>
+            </a:pPr>
             <a:endParaRPr b="0" lang="en-US" sz="1800" spc="-1" strike="noStrike">
               <a:solidFill>
                 <a:srgbClr val="ffffff"/>
@@ -25882,7 +26904,7 @@
         <p:spPr>
           <a:xfrm>
             <a:off x="4754880" y="960120"/>
-            <a:ext cx="1919880" cy="54360"/>
+            <a:ext cx="1919520" cy="54000"/>
           </a:xfrm>
           <a:prstGeom prst="rect">
             <a:avLst/>
@@ -25908,6 +26930,11 @@
             <a:noAutofit/>
           </a:bodyPr>
           <a:p>
+            <a:pPr>
+              <a:lnSpc>
+                <a:spcPct val="100000"/>
+              </a:lnSpc>
+            </a:pPr>
             <a:endParaRPr b="0" lang="en-US" sz="1800" spc="-1" strike="noStrike">
               <a:solidFill>
                 <a:srgbClr val="ffffff"/>
@@ -25926,7 +26953,7 @@
         <p:spPr>
           <a:xfrm>
             <a:off x="4800600" y="1051560"/>
-            <a:ext cx="1828440" cy="456840"/>
+            <a:ext cx="1828080" cy="456480"/>
           </a:xfrm>
           <a:prstGeom prst="rect">
             <a:avLst/>
@@ -26009,7 +27036,7 @@
         <p:spPr>
           <a:xfrm>
             <a:off x="4800600" y="1554480"/>
-            <a:ext cx="1828440" cy="200880"/>
+            <a:ext cx="1828080" cy="200520"/>
           </a:xfrm>
           <a:prstGeom prst="rect">
             <a:avLst/>
@@ -26066,7 +27093,7 @@
         <p:spPr>
           <a:xfrm>
             <a:off x="6693480" y="1188720"/>
-            <a:ext cx="237240" cy="347040"/>
+            <a:ext cx="236880" cy="346680"/>
           </a:xfrm>
           <a:prstGeom prst="rect">
             <a:avLst/>
@@ -26123,7 +27150,7 @@
         <p:spPr>
           <a:xfrm>
             <a:off x="6949440" y="960120"/>
-            <a:ext cx="1919880" cy="840960"/>
+            <a:ext cx="1919520" cy="840600"/>
           </a:xfrm>
           <a:prstGeom prst="rect">
             <a:avLst/>
@@ -26156,6 +27183,11 @@
             <a:noAutofit/>
           </a:bodyPr>
           <a:p>
+            <a:pPr>
+              <a:lnSpc>
+                <a:spcPct val="100000"/>
+              </a:lnSpc>
+            </a:pPr>
             <a:endParaRPr b="0" lang="en-US" sz="1800" spc="-1" strike="noStrike">
               <a:solidFill>
                 <a:srgbClr val="ffffff"/>
@@ -26174,7 +27206,7 @@
         <p:spPr>
           <a:xfrm>
             <a:off x="6949440" y="960120"/>
-            <a:ext cx="1919880" cy="54360"/>
+            <a:ext cx="1919520" cy="54000"/>
           </a:xfrm>
           <a:prstGeom prst="rect">
             <a:avLst/>
@@ -26200,6 +27232,11 @@
             <a:noAutofit/>
           </a:bodyPr>
           <a:p>
+            <a:pPr>
+              <a:lnSpc>
+                <a:spcPct val="100000"/>
+              </a:lnSpc>
+            </a:pPr>
             <a:endParaRPr b="0" lang="en-US" sz="1800" spc="-1" strike="noStrike">
               <a:solidFill>
                 <a:srgbClr val="ffffff"/>
@@ -26218,7 +27255,7 @@
         <p:spPr>
           <a:xfrm>
             <a:off x="6995160" y="1051560"/>
-            <a:ext cx="1828440" cy="456840"/>
+            <a:ext cx="1828080" cy="456480"/>
           </a:xfrm>
           <a:prstGeom prst="rect">
             <a:avLst/>
@@ -26301,7 +27338,7 @@
         <p:spPr>
           <a:xfrm>
             <a:off x="6995160" y="1554480"/>
-            <a:ext cx="1828440" cy="200880"/>
+            <a:ext cx="1828080" cy="200520"/>
           </a:xfrm>
           <a:prstGeom prst="rect">
             <a:avLst/>
@@ -26358,7 +27395,7 @@
         <p:spPr>
           <a:xfrm>
             <a:off x="320040" y="2567880"/>
-            <a:ext cx="4160160" cy="824040"/>
+            <a:ext cx="4159800" cy="823680"/>
           </a:xfrm>
           <a:prstGeom prst="rect">
             <a:avLst/>
@@ -26405,7 +27442,7 @@
         <p:spPr>
           <a:xfrm>
             <a:off x="457200" y="3451320"/>
-            <a:ext cx="3885840" cy="1236240"/>
+            <a:ext cx="3885480" cy="1235880"/>
           </a:xfrm>
           <a:prstGeom prst="rect">
             <a:avLst/>
@@ -26452,7 +27489,7 @@
         <p:spPr>
           <a:xfrm>
             <a:off x="4663440" y="1920240"/>
-            <a:ext cx="4160160" cy="2944080"/>
+            <a:ext cx="4159800" cy="2943720"/>
           </a:xfrm>
           <a:prstGeom prst="rect">
             <a:avLst/>
@@ -26485,6 +27522,11 @@
             <a:noAutofit/>
           </a:bodyPr>
           <a:p>
+            <a:pPr>
+              <a:lnSpc>
+                <a:spcPct val="100000"/>
+              </a:lnSpc>
+            </a:pPr>
             <a:endParaRPr b="0" lang="en-US" sz="1800" spc="-1" strike="noStrike">
               <a:solidFill>
                 <a:srgbClr val="ffffff"/>
@@ -26503,7 +27545,7 @@
         <p:spPr>
           <a:xfrm>
             <a:off x="4663440" y="1920240"/>
-            <a:ext cx="4160160" cy="54360"/>
+            <a:ext cx="4159800" cy="54000"/>
           </a:xfrm>
           <a:prstGeom prst="rect">
             <a:avLst/>
@@ -26529,6 +27571,11 @@
             <a:noAutofit/>
           </a:bodyPr>
           <a:p>
+            <a:pPr>
+              <a:lnSpc>
+                <a:spcPct val="100000"/>
+              </a:lnSpc>
+            </a:pPr>
             <a:endParaRPr b="0" lang="en-US" sz="1800" spc="-1" strike="noStrike">
               <a:solidFill>
                 <a:srgbClr val="ffffff"/>
@@ -26547,7 +27594,7 @@
         <p:spPr>
           <a:xfrm>
             <a:off x="4800600" y="2011680"/>
-            <a:ext cx="3885840" cy="273960"/>
+            <a:ext cx="3885480" cy="273600"/>
           </a:xfrm>
           <a:prstGeom prst="rect">
             <a:avLst/>
@@ -26604,7 +27651,7 @@
         <p:spPr>
           <a:xfrm>
             <a:off x="4754880" y="2414160"/>
-            <a:ext cx="566640" cy="328680"/>
+            <a:ext cx="566280" cy="328320"/>
           </a:xfrm>
           <a:prstGeom prst="rect">
             <a:avLst/>
@@ -26661,7 +27708,7 @@
         <p:spPr>
           <a:xfrm>
             <a:off x="5230440" y="2414160"/>
-            <a:ext cx="3474360" cy="347040"/>
+            <a:ext cx="3474000" cy="346680"/>
           </a:xfrm>
           <a:prstGeom prst="rect">
             <a:avLst/>
@@ -26718,7 +27765,7 @@
         <p:spPr>
           <a:xfrm>
             <a:off x="4754880" y="2907720"/>
-            <a:ext cx="566640" cy="328680"/>
+            <a:ext cx="566280" cy="328320"/>
           </a:xfrm>
           <a:prstGeom prst="rect">
             <a:avLst/>
@@ -26775,7 +27822,7 @@
         <p:spPr>
           <a:xfrm>
             <a:off x="5230440" y="2907720"/>
-            <a:ext cx="3474360" cy="347040"/>
+            <a:ext cx="3474000" cy="346680"/>
           </a:xfrm>
           <a:prstGeom prst="rect">
             <a:avLst/>
@@ -26832,7 +27879,7 @@
         <p:spPr>
           <a:xfrm>
             <a:off x="4754880" y="3401640"/>
-            <a:ext cx="566640" cy="328680"/>
+            <a:ext cx="566280" cy="328320"/>
           </a:xfrm>
           <a:prstGeom prst="rect">
             <a:avLst/>
@@ -26889,7 +27936,7 @@
         <p:spPr>
           <a:xfrm>
             <a:off x="5230440" y="3401640"/>
-            <a:ext cx="3474360" cy="347040"/>
+            <a:ext cx="3474000" cy="346680"/>
           </a:xfrm>
           <a:prstGeom prst="rect">
             <a:avLst/>
@@ -26946,7 +27993,7 @@
         <p:spPr>
           <a:xfrm>
             <a:off x="4754880" y="3895200"/>
-            <a:ext cx="566640" cy="328680"/>
+            <a:ext cx="566280" cy="328320"/>
           </a:xfrm>
           <a:prstGeom prst="rect">
             <a:avLst/>
@@ -27003,7 +28050,7 @@
         <p:spPr>
           <a:xfrm>
             <a:off x="5230440" y="3895200"/>
-            <a:ext cx="3474360" cy="347040"/>
+            <a:ext cx="3474000" cy="346680"/>
           </a:xfrm>
           <a:prstGeom prst="rect">
             <a:avLst/>
@@ -27060,7 +28107,7 @@
         <p:spPr>
           <a:xfrm>
             <a:off x="4754880" y="4389120"/>
-            <a:ext cx="566640" cy="328680"/>
+            <a:ext cx="566280" cy="328320"/>
           </a:xfrm>
           <a:prstGeom prst="rect">
             <a:avLst/>
@@ -27117,7 +28164,7 @@
         <p:spPr>
           <a:xfrm>
             <a:off x="5230440" y="4389120"/>
-            <a:ext cx="3474360" cy="347040"/>
+            <a:ext cx="3474000" cy="346680"/>
           </a:xfrm>
           <a:prstGeom prst="rect">
             <a:avLst/>
@@ -27178,7 +28225,7 @@
         <p:spPr>
           <a:xfrm>
             <a:off x="555480" y="1919520"/>
-            <a:ext cx="3787920" cy="3109680"/>
+            <a:ext cx="3787560" cy="3109320"/>
           </a:xfrm>
           <a:prstGeom prst="rect">
             <a:avLst/>
